--- a/mon/sinh_hoc/de_cuong/lop11/DeCuong_SINH11_GK1.pptx
+++ b/mon/sinh_hoc/de_cuong/lop11/DeCuong_SINH11_GK1.pptx
@@ -55,6 +55,9 @@
     <p:sldId id="303" r:id="rId54"/>
     <p:sldId id="304" r:id="rId55"/>
     <p:sldId id="305" r:id="rId56"/>
+    <p:sldId id="306" r:id="rId57"/>
+    <p:sldId id="307" r:id="rId58"/>
+    <p:sldId id="308" r:id="rId59"/>
   </p:sldIdLst>
   <p:sldSz cx="12191695" cy="6858000" type="screen4x3"/>
   <p:notesSz cx="6858000" cy="9144000"/>
@@ -3294,14 +3297,14 @@
         </p:nvSpPr>
         <p:spPr>
           <a:xfrm>
-            <a:off x="10463479" y="457200"/>
-            <a:ext cx="1179576" cy="457200"/>
+            <a:off x="10701223" y="457200"/>
+            <a:ext cx="941832" cy="457200"/>
           </a:xfrm>
           <a:prstGeom prst="roundRect">
             <a:avLst/>
           </a:prstGeom>
           <a:solidFill>
-            <a:srgbClr val="991B1B"/>
+            <a:srgbClr val="1E40AF"/>
           </a:solidFill>
           <a:ln>
             <a:noFill/>
@@ -3334,7 +3337,7 @@
                 </a:solidFill>
                 <a:latin typeface="Arial"/>
               </a:rPr>
-              <a:t>LỜI GIẢI</a:t>
+              <a:t>ĐỀ BÀI</a:t>
             </a:r>
           </a:p>
         </p:txBody>
@@ -3348,7 +3351,7 @@
         <p:spPr>
           <a:xfrm>
             <a:off x="731520" y="274320"/>
-            <a:ext cx="9793224" cy="868680"/>
+            <a:ext cx="10030968" cy="868680"/>
           </a:xfrm>
           <a:prstGeom prst="rect">
             <a:avLst/>
@@ -3368,7 +3371,7 @@
                 </a:solidFill>
                 <a:latin typeface="Arial"/>
               </a:rPr>
-              <a:t>ĐỀ MINH HỌA · PHẦN I · CÂU 2</a:t>
+              <a:t>ĐỀ MINH HỌA · PHẦN I · CÂU 1</a:t>
             </a:r>
           </a:p>
         </p:txBody>
@@ -3474,45 +3477,83 @@
           </a:bodyPr>
           <a:lstStyle/>
           <a:p>
-            <a:pPr algn="l" marL="365760" indent="-365760">
+            <a:pPr algn="l">
               <a:spcAft>
                 <a:spcPts val="800"/>
               </a:spcAft>
-              <a:buClr>
-                <a:srgbClr val="1E40AF"/>
-              </a:buClr>
-              <a:buFont typeface="Arial"/>
-              <a:buChar char="•"/>
             </a:pPr>
             <a:r>
-              <a:rPr sz="2000">
+              <a:rPr sz="2000" b="1">
                 <a:solidFill>
                   <a:srgbClr val="1E293B"/>
                 </a:solidFill>
                 <a:latin typeface="Calibri"/>
               </a:rPr>
-              <a:t>Đáp án C.</a:t>
-            </a:r>
-          </a:p>
-          <a:p>
-            <a:pPr algn="l" marL="365760" indent="-365760">
+              <a:t>Quá trình chuyển hoá năng lượng trong sinh giới gồm ba giai đoạn theo thứ tự là</a:t>
+            </a:r>
+          </a:p>
+          <a:p>
+            <a:pPr algn="l">
               <a:spcAft>
                 <a:spcPts val="800"/>
               </a:spcAft>
-              <a:buClr>
-                <a:srgbClr val="1E40AF"/>
-              </a:buClr>
-              <a:buFont typeface="Arial"/>
-              <a:buChar char="•"/>
             </a:pPr>
             <a:r>
-              <a:rPr sz="2000">
+              <a:rPr sz="2000" b="1">
                 <a:solidFill>
                   <a:srgbClr val="1E293B"/>
                 </a:solidFill>
                 <a:latin typeface="Calibri"/>
               </a:rPr>
-              <a:t>SGK mục II.2a.</a:t>
+              <a:t>A. phân giải → tổng hợp → huy động năng lượng</a:t>
+            </a:r>
+          </a:p>
+          <a:p>
+            <a:pPr algn="l">
+              <a:spcAft>
+                <a:spcPts val="800"/>
+              </a:spcAft>
+            </a:pPr>
+            <a:r>
+              <a:rPr sz="2000" b="1">
+                <a:solidFill>
+                  <a:srgbClr val="1E293B"/>
+                </a:solidFill>
+                <a:latin typeface="Calibri"/>
+              </a:rPr>
+              <a:t>B. tổng hợp → phân giải → huy động năng lượng</a:t>
+            </a:r>
+          </a:p>
+          <a:p>
+            <a:pPr algn="l">
+              <a:spcAft>
+                <a:spcPts val="800"/>
+              </a:spcAft>
+            </a:pPr>
+            <a:r>
+              <a:rPr sz="2000" b="1">
+                <a:solidFill>
+                  <a:srgbClr val="1E293B"/>
+                </a:solidFill>
+                <a:latin typeface="Calibri"/>
+              </a:rPr>
+              <a:t>C. huy động năng lượng → tổng hợp → phân giải</a:t>
+            </a:r>
+          </a:p>
+          <a:p>
+            <a:pPr algn="l">
+              <a:spcAft>
+                <a:spcPts val="800"/>
+              </a:spcAft>
+            </a:pPr>
+            <a:r>
+              <a:rPr sz="2000" b="1">
+                <a:solidFill>
+                  <a:srgbClr val="1E293B"/>
+                </a:solidFill>
+                <a:latin typeface="Calibri"/>
+              </a:rPr>
+              <a:t>D. tổng hợp → huy động năng lượng → phân giải</a:t>
             </a:r>
           </a:p>
         </p:txBody>
@@ -3595,14 +3636,14 @@
         </p:nvSpPr>
         <p:spPr>
           <a:xfrm>
-            <a:off x="10701223" y="457200"/>
-            <a:ext cx="941832" cy="457200"/>
+            <a:off x="10463479" y="457200"/>
+            <a:ext cx="1179576" cy="457200"/>
           </a:xfrm>
           <a:prstGeom prst="roundRect">
             <a:avLst/>
           </a:prstGeom>
           <a:solidFill>
-            <a:srgbClr val="1E40AF"/>
+            <a:srgbClr val="991B1B"/>
           </a:solidFill>
           <a:ln>
             <a:noFill/>
@@ -3635,7 +3676,7 @@
                 </a:solidFill>
                 <a:latin typeface="Arial"/>
               </a:rPr>
-              <a:t>ĐỀ BÀI</a:t>
+              <a:t>LỜI GIẢI</a:t>
             </a:r>
           </a:p>
         </p:txBody>
@@ -3649,7 +3690,7 @@
         <p:spPr>
           <a:xfrm>
             <a:off x="731520" y="274320"/>
-            <a:ext cx="10030968" cy="868680"/>
+            <a:ext cx="9793224" cy="868680"/>
           </a:xfrm>
           <a:prstGeom prst="rect">
             <a:avLst/>
@@ -3669,7 +3710,7 @@
                 </a:solidFill>
                 <a:latin typeface="Arial"/>
               </a:rPr>
-              <a:t>ĐỀ MINH HỌA · PHẦN I · CÂU 3</a:t>
+              <a:t>ĐỀ MINH HỌA · PHẦN I · CÂU 1</a:t>
             </a:r>
           </a:p>
         </p:txBody>
@@ -3775,83 +3816,45 @@
           </a:bodyPr>
           <a:lstStyle/>
           <a:p>
-            <a:pPr algn="l">
+            <a:pPr algn="l" marL="365760" indent="-365760">
               <a:spcAft>
                 <a:spcPts val="800"/>
               </a:spcAft>
+              <a:buClr>
+                <a:srgbClr val="1E40AF"/>
+              </a:buClr>
+              <a:buFont typeface="Arial"/>
+              <a:buChar char="•"/>
             </a:pPr>
             <a:r>
-              <a:rPr sz="2000" b="1">
+              <a:rPr sz="2000">
                 <a:solidFill>
                   <a:srgbClr val="1E293B"/>
                 </a:solidFill>
                 <a:latin typeface="Calibri"/>
               </a:rPr>
-              <a:t>Giấy tẩm cobalt chloride khô có màu xanh, khi ẩm chuyển sang màu</a:t>
-            </a:r>
-          </a:p>
-          <a:p>
-            <a:pPr algn="l">
+              <a:t>Đáp án B.</a:t>
+            </a:r>
+          </a:p>
+          <a:p>
+            <a:pPr algn="l" marL="365760" indent="-365760">
               <a:spcAft>
                 <a:spcPts val="800"/>
               </a:spcAft>
+              <a:buClr>
+                <a:srgbClr val="1E40AF"/>
+              </a:buClr>
+              <a:buFont typeface="Arial"/>
+              <a:buChar char="•"/>
             </a:pPr>
             <a:r>
-              <a:rPr sz="2000" b="1">
+              <a:rPr sz="2000">
                 <a:solidFill>
                   <a:srgbClr val="1E293B"/>
                 </a:solidFill>
                 <a:latin typeface="Calibri"/>
               </a:rPr>
-              <a:t>A. tím</a:t>
-            </a:r>
-          </a:p>
-          <a:p>
-            <a:pPr algn="l">
-              <a:spcAft>
-                <a:spcPts val="800"/>
-              </a:spcAft>
-            </a:pPr>
-            <a:r>
-              <a:rPr sz="2000" b="1">
-                <a:solidFill>
-                  <a:srgbClr val="1E293B"/>
-                </a:solidFill>
-                <a:latin typeface="Calibri"/>
-              </a:rPr>
-              <a:t>B. vàng</a:t>
-            </a:r>
-          </a:p>
-          <a:p>
-            <a:pPr algn="l">
-              <a:spcAft>
-                <a:spcPts val="800"/>
-              </a:spcAft>
-            </a:pPr>
-            <a:r>
-              <a:rPr sz="2000" b="1">
-                <a:solidFill>
-                  <a:srgbClr val="1E293B"/>
-                </a:solidFill>
-                <a:latin typeface="Calibri"/>
-              </a:rPr>
-              <a:t>C. đen</a:t>
-            </a:r>
-          </a:p>
-          <a:p>
-            <a:pPr algn="l">
-              <a:spcAft>
-                <a:spcPts val="800"/>
-              </a:spcAft>
-            </a:pPr>
-            <a:r>
-              <a:rPr sz="2000" b="1">
-                <a:solidFill>
-                  <a:srgbClr val="1E293B"/>
-                </a:solidFill>
-                <a:latin typeface="Calibri"/>
-              </a:rPr>
-              <a:t>D. hồng</a:t>
+              <a:t>SGK mục III, Hình 1.1: năng lượng ánh sáng → tổng hợp → phân giải (ATP) → huy động năng lượng cho hoạt động sống.</a:t>
             </a:r>
           </a:p>
         </p:txBody>
@@ -3934,14 +3937,14 @@
         </p:nvSpPr>
         <p:spPr>
           <a:xfrm>
-            <a:off x="10463479" y="457200"/>
-            <a:ext cx="1179576" cy="457200"/>
+            <a:off x="10701223" y="457200"/>
+            <a:ext cx="941832" cy="457200"/>
           </a:xfrm>
           <a:prstGeom prst="roundRect">
             <a:avLst/>
           </a:prstGeom>
           <a:solidFill>
-            <a:srgbClr val="991B1B"/>
+            <a:srgbClr val="1E40AF"/>
           </a:solidFill>
           <a:ln>
             <a:noFill/>
@@ -3974,7 +3977,7 @@
                 </a:solidFill>
                 <a:latin typeface="Arial"/>
               </a:rPr>
-              <a:t>LỜI GIẢI</a:t>
+              <a:t>ĐỀ BÀI</a:t>
             </a:r>
           </a:p>
         </p:txBody>
@@ -3988,7 +3991,7 @@
         <p:spPr>
           <a:xfrm>
             <a:off x="731520" y="274320"/>
-            <a:ext cx="9793224" cy="868680"/>
+            <a:ext cx="10030968" cy="868680"/>
           </a:xfrm>
           <a:prstGeom prst="rect">
             <a:avLst/>
@@ -4008,7 +4011,7 @@
                 </a:solidFill>
                 <a:latin typeface="Arial"/>
               </a:rPr>
-              <a:t>ĐỀ MINH HỌA · PHẦN I · CÂU 3</a:t>
+              <a:t>ĐỀ MINH HỌA · PHẦN I · CÂU 2</a:t>
             </a:r>
           </a:p>
         </p:txBody>
@@ -4114,45 +4117,83 @@
           </a:bodyPr>
           <a:lstStyle/>
           <a:p>
-            <a:pPr algn="l" marL="365760" indent="-365760">
+            <a:pPr algn="l">
               <a:spcAft>
                 <a:spcPts val="800"/>
               </a:spcAft>
-              <a:buClr>
-                <a:srgbClr val="1E40AF"/>
-              </a:buClr>
-              <a:buFont typeface="Arial"/>
-              <a:buChar char="•"/>
             </a:pPr>
             <a:r>
-              <a:rPr sz="2000">
+              <a:rPr sz="2000" b="1">
                 <a:solidFill>
                   <a:srgbClr val="1E293B"/>
                 </a:solidFill>
                 <a:latin typeface="Calibri"/>
               </a:rPr>
-              <a:t>Đáp án D.</a:t>
-            </a:r>
-          </a:p>
-          <a:p>
-            <a:pPr algn="l" marL="365760" indent="-365760">
+              <a:t>Dòng mạch gỗ vận chuyển chủ yếu</a:t>
+            </a:r>
+          </a:p>
+          <a:p>
+            <a:pPr algn="l">
               <a:spcAft>
                 <a:spcPts val="800"/>
               </a:spcAft>
-              <a:buClr>
-                <a:srgbClr val="1E40AF"/>
-              </a:buClr>
-              <a:buFont typeface="Arial"/>
-              <a:buChar char="•"/>
             </a:pPr>
             <a:r>
-              <a:rPr sz="2000">
+              <a:rPr sz="2000" b="1">
                 <a:solidFill>
                   <a:srgbClr val="1E293B"/>
                 </a:solidFill>
                 <a:latin typeface="Calibri"/>
               </a:rPr>
-              <a:t>SGK mục III.1c.</a:t>
+              <a:t>A. O₂ từ lá xuống rễ</a:t>
+            </a:r>
+          </a:p>
+          <a:p>
+            <a:pPr algn="l">
+              <a:spcAft>
+                <a:spcPts val="800"/>
+              </a:spcAft>
+            </a:pPr>
+            <a:r>
+              <a:rPr sz="2000" b="1">
+                <a:solidFill>
+                  <a:srgbClr val="1E293B"/>
+                </a:solidFill>
+                <a:latin typeface="Calibri"/>
+              </a:rPr>
+              <a:t>B. sucrose từ lá xuống rễ</a:t>
+            </a:r>
+          </a:p>
+          <a:p>
+            <a:pPr algn="l">
+              <a:spcAft>
+                <a:spcPts val="800"/>
+              </a:spcAft>
+            </a:pPr>
+            <a:r>
+              <a:rPr sz="2000" b="1">
+                <a:solidFill>
+                  <a:srgbClr val="1E293B"/>
+                </a:solidFill>
+                <a:latin typeface="Calibri"/>
+              </a:rPr>
+              <a:t>C. nước và chất khoáng từ rễ lên lá</a:t>
+            </a:r>
+          </a:p>
+          <a:p>
+            <a:pPr algn="l">
+              <a:spcAft>
+                <a:spcPts val="800"/>
+              </a:spcAft>
+            </a:pPr>
+            <a:r>
+              <a:rPr sz="2000" b="1">
+                <a:solidFill>
+                  <a:srgbClr val="1E293B"/>
+                </a:solidFill>
+                <a:latin typeface="Calibri"/>
+              </a:rPr>
+              <a:t>D. hormone từ rễ lên lá</a:t>
             </a:r>
           </a:p>
         </p:txBody>
@@ -4235,14 +4276,14 @@
         </p:nvSpPr>
         <p:spPr>
           <a:xfrm>
-            <a:off x="10701223" y="457200"/>
-            <a:ext cx="941832" cy="457200"/>
+            <a:off x="10463479" y="457200"/>
+            <a:ext cx="1179576" cy="457200"/>
           </a:xfrm>
           <a:prstGeom prst="roundRect">
             <a:avLst/>
           </a:prstGeom>
           <a:solidFill>
-            <a:srgbClr val="1E40AF"/>
+            <a:srgbClr val="991B1B"/>
           </a:solidFill>
           <a:ln>
             <a:noFill/>
@@ -4275,7 +4316,7 @@
                 </a:solidFill>
                 <a:latin typeface="Arial"/>
               </a:rPr>
-              <a:t>ĐỀ BÀI</a:t>
+              <a:t>LỜI GIẢI</a:t>
             </a:r>
           </a:p>
         </p:txBody>
@@ -4289,7 +4330,7 @@
         <p:spPr>
           <a:xfrm>
             <a:off x="731520" y="274320"/>
-            <a:ext cx="10030968" cy="868680"/>
+            <a:ext cx="9793224" cy="868680"/>
           </a:xfrm>
           <a:prstGeom prst="rect">
             <a:avLst/>
@@ -4309,7 +4350,7 @@
                 </a:solidFill>
                 <a:latin typeface="Arial"/>
               </a:rPr>
-              <a:t>ĐỀ MINH HỌA · PHẦN I · CÂU 4</a:t>
+              <a:t>ĐỀ MINH HỌA · PHẦN I · CÂU 2</a:t>
             </a:r>
           </a:p>
         </p:txBody>
@@ -4415,83 +4456,45 @@
           </a:bodyPr>
           <a:lstStyle/>
           <a:p>
-            <a:pPr algn="l">
+            <a:pPr algn="l" marL="365760" indent="-365760">
               <a:spcAft>
                 <a:spcPts val="800"/>
               </a:spcAft>
+              <a:buClr>
+                <a:srgbClr val="1E40AF"/>
+              </a:buClr>
+              <a:buFont typeface="Arial"/>
+              <a:buChar char="•"/>
             </a:pPr>
             <a:r>
-              <a:rPr sz="2000" b="1">
+              <a:rPr sz="2000">
                 <a:solidFill>
                   <a:srgbClr val="1E293B"/>
                 </a:solidFill>
                 <a:latin typeface="Calibri"/>
               </a:rPr>
-              <a:t>Sắc tố chủ đạo, thiếu nó cây không quang hợp được là</a:t>
-            </a:r>
-          </a:p>
-          <a:p>
-            <a:pPr algn="l">
+              <a:t>Đáp án C.</a:t>
+            </a:r>
+          </a:p>
+          <a:p>
+            <a:pPr algn="l" marL="365760" indent="-365760">
               <a:spcAft>
                 <a:spcPts val="800"/>
               </a:spcAft>
+              <a:buClr>
+                <a:srgbClr val="1E40AF"/>
+              </a:buClr>
+              <a:buFont typeface="Arial"/>
+              <a:buChar char="•"/>
             </a:pPr>
             <a:r>
-              <a:rPr sz="2000" b="1">
+              <a:rPr sz="2000">
                 <a:solidFill>
                   <a:srgbClr val="1E293B"/>
                 </a:solidFill>
                 <a:latin typeface="Calibri"/>
               </a:rPr>
-              <a:t>A. xanthophyll</a:t>
-            </a:r>
-          </a:p>
-          <a:p>
-            <a:pPr algn="l">
-              <a:spcAft>
-                <a:spcPts val="800"/>
-              </a:spcAft>
-            </a:pPr>
-            <a:r>
-              <a:rPr sz="2000" b="1">
-                <a:solidFill>
-                  <a:srgbClr val="1E293B"/>
-                </a:solidFill>
-                <a:latin typeface="Calibri"/>
-              </a:rPr>
-              <a:t>B. diệp lục b</a:t>
-            </a:r>
-          </a:p>
-          <a:p>
-            <a:pPr algn="l">
-              <a:spcAft>
-                <a:spcPts val="800"/>
-              </a:spcAft>
-            </a:pPr>
-            <a:r>
-              <a:rPr sz="2000" b="1">
-                <a:solidFill>
-                  <a:srgbClr val="1E293B"/>
-                </a:solidFill>
-                <a:latin typeface="Calibri"/>
-              </a:rPr>
-              <a:t>C. carotene</a:t>
-            </a:r>
-          </a:p>
-          <a:p>
-            <a:pPr algn="l">
-              <a:spcAft>
-                <a:spcPts val="800"/>
-              </a:spcAft>
-            </a:pPr>
-            <a:r>
-              <a:rPr sz="2000" b="1">
-                <a:solidFill>
-                  <a:srgbClr val="1E293B"/>
-                </a:solidFill>
-                <a:latin typeface="Calibri"/>
-              </a:rPr>
-              <a:t>D. diệp lục a</a:t>
+              <a:t>SGK mục II.2a.</a:t>
             </a:r>
           </a:p>
         </p:txBody>
@@ -4574,14 +4577,14 @@
         </p:nvSpPr>
         <p:spPr>
           <a:xfrm>
-            <a:off x="10463479" y="457200"/>
-            <a:ext cx="1179576" cy="457200"/>
+            <a:off x="10701223" y="457200"/>
+            <a:ext cx="941832" cy="457200"/>
           </a:xfrm>
           <a:prstGeom prst="roundRect">
             <a:avLst/>
           </a:prstGeom>
           <a:solidFill>
-            <a:srgbClr val="991B1B"/>
+            <a:srgbClr val="1E40AF"/>
           </a:solidFill>
           <a:ln>
             <a:noFill/>
@@ -4614,7 +4617,7 @@
                 </a:solidFill>
                 <a:latin typeface="Arial"/>
               </a:rPr>
-              <a:t>LỜI GIẢI</a:t>
+              <a:t>ĐỀ BÀI</a:t>
             </a:r>
           </a:p>
         </p:txBody>
@@ -4628,7 +4631,7 @@
         <p:spPr>
           <a:xfrm>
             <a:off x="731520" y="274320"/>
-            <a:ext cx="9793224" cy="868680"/>
+            <a:ext cx="10030968" cy="868680"/>
           </a:xfrm>
           <a:prstGeom prst="rect">
             <a:avLst/>
@@ -4648,7 +4651,7 @@
                 </a:solidFill>
                 <a:latin typeface="Arial"/>
               </a:rPr>
-              <a:t>ĐỀ MINH HỌA · PHẦN I · CÂU 4</a:t>
+              <a:t>ĐỀ MINH HỌA · PHẦN I · CÂU 3</a:t>
             </a:r>
           </a:p>
         </p:txBody>
@@ -4754,45 +4757,83 @@
           </a:bodyPr>
           <a:lstStyle/>
           <a:p>
-            <a:pPr algn="l" marL="365760" indent="-365760">
+            <a:pPr algn="l">
               <a:spcAft>
                 <a:spcPts val="800"/>
               </a:spcAft>
-              <a:buClr>
-                <a:srgbClr val="1E40AF"/>
-              </a:buClr>
-              <a:buFont typeface="Arial"/>
-              <a:buChar char="•"/>
             </a:pPr>
             <a:r>
-              <a:rPr sz="2000">
+              <a:rPr sz="2000" b="1">
                 <a:solidFill>
                   <a:srgbClr val="1E293B"/>
                 </a:solidFill>
                 <a:latin typeface="Calibri"/>
               </a:rPr>
-              <a:t>Đáp án D.</a:t>
-            </a:r>
-          </a:p>
-          <a:p>
-            <a:pPr algn="l" marL="365760" indent="-365760">
+              <a:t>Giấy tẩm cobalt chloride khô có màu xanh, khi ẩm chuyển sang màu</a:t>
+            </a:r>
+          </a:p>
+          <a:p>
+            <a:pPr algn="l">
               <a:spcAft>
                 <a:spcPts val="800"/>
               </a:spcAft>
-              <a:buClr>
-                <a:srgbClr val="1E40AF"/>
-              </a:buClr>
-              <a:buFont typeface="Arial"/>
-              <a:buChar char="•"/>
             </a:pPr>
             <a:r>
-              <a:rPr sz="2000">
+              <a:rPr sz="2000" b="1">
                 <a:solidFill>
                   <a:srgbClr val="1E293B"/>
                 </a:solidFill>
                 <a:latin typeface="Calibri"/>
               </a:rPr>
-              <a:t>SGK mục I.3a.</a:t>
+              <a:t>A. tím</a:t>
+            </a:r>
+          </a:p>
+          <a:p>
+            <a:pPr algn="l">
+              <a:spcAft>
+                <a:spcPts val="800"/>
+              </a:spcAft>
+            </a:pPr>
+            <a:r>
+              <a:rPr sz="2000" b="1">
+                <a:solidFill>
+                  <a:srgbClr val="1E293B"/>
+                </a:solidFill>
+                <a:latin typeface="Calibri"/>
+              </a:rPr>
+              <a:t>B. vàng</a:t>
+            </a:r>
+          </a:p>
+          <a:p>
+            <a:pPr algn="l">
+              <a:spcAft>
+                <a:spcPts val="800"/>
+              </a:spcAft>
+            </a:pPr>
+            <a:r>
+              <a:rPr sz="2000" b="1">
+                <a:solidFill>
+                  <a:srgbClr val="1E293B"/>
+                </a:solidFill>
+                <a:latin typeface="Calibri"/>
+              </a:rPr>
+              <a:t>C. đen</a:t>
+            </a:r>
+          </a:p>
+          <a:p>
+            <a:pPr algn="l">
+              <a:spcAft>
+                <a:spcPts val="800"/>
+              </a:spcAft>
+            </a:pPr>
+            <a:r>
+              <a:rPr sz="2000" b="1">
+                <a:solidFill>
+                  <a:srgbClr val="1E293B"/>
+                </a:solidFill>
+                <a:latin typeface="Calibri"/>
+              </a:rPr>
+              <a:t>D. hồng</a:t>
             </a:r>
           </a:p>
         </p:txBody>
@@ -4875,14 +4916,14 @@
         </p:nvSpPr>
         <p:spPr>
           <a:xfrm>
-            <a:off x="10701223" y="457200"/>
-            <a:ext cx="941832" cy="457200"/>
+            <a:off x="10463479" y="457200"/>
+            <a:ext cx="1179576" cy="457200"/>
           </a:xfrm>
           <a:prstGeom prst="roundRect">
             <a:avLst/>
           </a:prstGeom>
           <a:solidFill>
-            <a:srgbClr val="1E40AF"/>
+            <a:srgbClr val="991B1B"/>
           </a:solidFill>
           <a:ln>
             <a:noFill/>
@@ -4915,7 +4956,7 @@
                 </a:solidFill>
                 <a:latin typeface="Arial"/>
               </a:rPr>
-              <a:t>ĐỀ BÀI</a:t>
+              <a:t>LỜI GIẢI</a:t>
             </a:r>
           </a:p>
         </p:txBody>
@@ -4929,7 +4970,7 @@
         <p:spPr>
           <a:xfrm>
             <a:off x="731520" y="274320"/>
-            <a:ext cx="10030968" cy="868680"/>
+            <a:ext cx="9793224" cy="868680"/>
           </a:xfrm>
           <a:prstGeom prst="rect">
             <a:avLst/>
@@ -4949,7 +4990,7 @@
                 </a:solidFill>
                 <a:latin typeface="Arial"/>
               </a:rPr>
-              <a:t>ĐỀ MINH HỌA · PHẦN I · CÂU 5</a:t>
+              <a:t>ĐỀ MINH HỌA · PHẦN I · CÂU 3</a:t>
             </a:r>
           </a:p>
         </p:txBody>
@@ -5055,83 +5096,45 @@
           </a:bodyPr>
           <a:lstStyle/>
           <a:p>
-            <a:pPr algn="l">
+            <a:pPr algn="l" marL="365760" indent="-365760">
               <a:spcAft>
                 <a:spcPts val="800"/>
               </a:spcAft>
+              <a:buClr>
+                <a:srgbClr val="1E40AF"/>
+              </a:buClr>
+              <a:buFont typeface="Arial"/>
+              <a:buChar char="•"/>
             </a:pPr>
             <a:r>
-              <a:rPr sz="2000" b="1">
+              <a:rPr sz="2000">
                 <a:solidFill>
                   <a:srgbClr val="1E293B"/>
                 </a:solidFill>
                 <a:latin typeface="Calibri"/>
               </a:rPr>
-              <a:t>Một người bị suy thận, không thải hết urea, uric acid qua nước tiểu. Hậu quả nào sau đây phù hợp?</a:t>
-            </a:r>
-          </a:p>
-          <a:p>
-            <a:pPr algn="l">
+              <a:t>Đáp án D.</a:t>
+            </a:r>
+          </a:p>
+          <a:p>
+            <a:pPr algn="l" marL="365760" indent="-365760">
               <a:spcAft>
                 <a:spcPts val="800"/>
               </a:spcAft>
+              <a:buClr>
+                <a:srgbClr val="1E40AF"/>
+              </a:buClr>
+              <a:buFont typeface="Arial"/>
+              <a:buChar char="•"/>
             </a:pPr>
             <a:r>
-              <a:rPr sz="2000" b="1">
+              <a:rPr sz="2000">
                 <a:solidFill>
                   <a:srgbClr val="1E293B"/>
                 </a:solidFill>
                 <a:latin typeface="Calibri"/>
               </a:rPr>
-              <a:t>A. trao đổi chất của cơ thể diễn ra thuận lợi hơn</a:t>
-            </a:r>
-          </a:p>
-          <a:p>
-            <a:pPr algn="l">
-              <a:spcAft>
-                <a:spcPts val="800"/>
-              </a:spcAft>
-            </a:pPr>
-            <a:r>
-              <a:rPr sz="2000" b="1">
-                <a:solidFill>
-                  <a:srgbClr val="1E293B"/>
-                </a:solidFill>
-                <a:latin typeface="Calibri"/>
-              </a:rPr>
-              <a:t>B. cơ thể tăng tổng hợp protein, phát triển nhanh hơn</a:t>
-            </a:r>
-          </a:p>
-          <a:p>
-            <a:pPr algn="l">
-              <a:spcAft>
-                <a:spcPts val="800"/>
-              </a:spcAft>
-            </a:pPr>
-            <a:r>
-              <a:rPr sz="2000" b="1">
-                <a:solidFill>
-                  <a:srgbClr val="1E293B"/>
-                </a:solidFill>
-                <a:latin typeface="Calibri"/>
-              </a:rPr>
-              <a:t>C. nhu cầu O₂ của cơ thể giảm về 0</a:t>
-            </a:r>
-          </a:p>
-          <a:p>
-            <a:pPr algn="l">
-              <a:spcAft>
-                <a:spcPts val="800"/>
-              </a:spcAft>
-            </a:pPr>
-            <a:r>
-              <a:rPr sz="2000" b="1">
-                <a:solidFill>
-                  <a:srgbClr val="1E293B"/>
-                </a:solidFill>
-                <a:latin typeface="Calibri"/>
-              </a:rPr>
-              <a:t>D. áp suất thẩm thấu, huyết áp tăng; hoạt động tế bào, cơ quan bị rối loạn</a:t>
+              <a:t>SGK mục III.1c.</a:t>
             </a:r>
           </a:p>
         </p:txBody>
@@ -5214,14 +5217,14 @@
         </p:nvSpPr>
         <p:spPr>
           <a:xfrm>
-            <a:off x="10463479" y="457200"/>
-            <a:ext cx="1179576" cy="457200"/>
+            <a:off x="10701223" y="457200"/>
+            <a:ext cx="941832" cy="457200"/>
           </a:xfrm>
           <a:prstGeom prst="roundRect">
             <a:avLst/>
           </a:prstGeom>
           <a:solidFill>
-            <a:srgbClr val="991B1B"/>
+            <a:srgbClr val="1E40AF"/>
           </a:solidFill>
           <a:ln>
             <a:noFill/>
@@ -5254,7 +5257,7 @@
                 </a:solidFill>
                 <a:latin typeface="Arial"/>
               </a:rPr>
-              <a:t>LỜI GIẢI</a:t>
+              <a:t>ĐỀ BÀI</a:t>
             </a:r>
           </a:p>
         </p:txBody>
@@ -5268,7 +5271,7 @@
         <p:spPr>
           <a:xfrm>
             <a:off x="731520" y="274320"/>
-            <a:ext cx="9793224" cy="868680"/>
+            <a:ext cx="10030968" cy="868680"/>
           </a:xfrm>
           <a:prstGeom prst="rect">
             <a:avLst/>
@@ -5288,7 +5291,7 @@
                 </a:solidFill>
                 <a:latin typeface="Arial"/>
               </a:rPr>
-              <a:t>ĐỀ MINH HỌA · PHẦN I · CÂU 5</a:t>
+              <a:t>ĐỀ MINH HỌA · PHẦN I · CÂU 4</a:t>
             </a:r>
           </a:p>
         </p:txBody>
@@ -5394,45 +5397,83 @@
           </a:bodyPr>
           <a:lstStyle/>
           <a:p>
-            <a:pPr algn="l" marL="365760" indent="-365760">
+            <a:pPr algn="l">
               <a:spcAft>
                 <a:spcPts val="800"/>
               </a:spcAft>
-              <a:buClr>
-                <a:srgbClr val="1E40AF"/>
-              </a:buClr>
-              <a:buFont typeface="Arial"/>
-              <a:buChar char="•"/>
             </a:pPr>
             <a:r>
-              <a:rPr sz="2000">
+              <a:rPr sz="2000" b="1">
                 <a:solidFill>
                   <a:srgbClr val="1E293B"/>
                 </a:solidFill>
                 <a:latin typeface="Calibri"/>
               </a:rPr>
-              <a:t>Đáp án D.</a:t>
-            </a:r>
-          </a:p>
-          <a:p>
-            <a:pPr algn="l" marL="365760" indent="-365760">
+              <a:t>Sắc tố chủ đạo, thiếu nó cây không quang hợp được là</a:t>
+            </a:r>
+          </a:p>
+          <a:p>
+            <a:pPr algn="l">
               <a:spcAft>
                 <a:spcPts val="800"/>
               </a:spcAft>
-              <a:buClr>
-                <a:srgbClr val="1E40AF"/>
-              </a:buClr>
-              <a:buFont typeface="Arial"/>
-              <a:buChar char="•"/>
             </a:pPr>
             <a:r>
-              <a:rPr sz="2000">
+              <a:rPr sz="2000" b="1">
                 <a:solidFill>
                   <a:srgbClr val="1E293B"/>
                 </a:solidFill>
                 <a:latin typeface="Calibri"/>
               </a:rPr>
-              <a:t>SGV tr.17: chất thải ứ đọng làm rối loạn trao đổi chất giữa cơ thể và môi trường.</a:t>
+              <a:t>A. xanthophyll</a:t>
+            </a:r>
+          </a:p>
+          <a:p>
+            <a:pPr algn="l">
+              <a:spcAft>
+                <a:spcPts val="800"/>
+              </a:spcAft>
+            </a:pPr>
+            <a:r>
+              <a:rPr sz="2000" b="1">
+                <a:solidFill>
+                  <a:srgbClr val="1E293B"/>
+                </a:solidFill>
+                <a:latin typeface="Calibri"/>
+              </a:rPr>
+              <a:t>B. diệp lục b</a:t>
+            </a:r>
+          </a:p>
+          <a:p>
+            <a:pPr algn="l">
+              <a:spcAft>
+                <a:spcPts val="800"/>
+              </a:spcAft>
+            </a:pPr>
+            <a:r>
+              <a:rPr sz="2000" b="1">
+                <a:solidFill>
+                  <a:srgbClr val="1E293B"/>
+                </a:solidFill>
+                <a:latin typeface="Calibri"/>
+              </a:rPr>
+              <a:t>C. carotene</a:t>
+            </a:r>
+          </a:p>
+          <a:p>
+            <a:pPr algn="l">
+              <a:spcAft>
+                <a:spcPts val="800"/>
+              </a:spcAft>
+            </a:pPr>
+            <a:r>
+              <a:rPr sz="2000" b="1">
+                <a:solidFill>
+                  <a:srgbClr val="1E293B"/>
+                </a:solidFill>
+                <a:latin typeface="Calibri"/>
+              </a:rPr>
+              <a:t>D. diệp lục a</a:t>
             </a:r>
           </a:p>
         </p:txBody>
@@ -5515,14 +5556,14 @@
         </p:nvSpPr>
         <p:spPr>
           <a:xfrm>
-            <a:off x="10701223" y="457200"/>
-            <a:ext cx="941832" cy="457200"/>
+            <a:off x="10463479" y="457200"/>
+            <a:ext cx="1179576" cy="457200"/>
           </a:xfrm>
           <a:prstGeom prst="roundRect">
             <a:avLst/>
           </a:prstGeom>
           <a:solidFill>
-            <a:srgbClr val="1E40AF"/>
+            <a:srgbClr val="991B1B"/>
           </a:solidFill>
           <a:ln>
             <a:noFill/>
@@ -5555,7 +5596,7 @@
                 </a:solidFill>
                 <a:latin typeface="Arial"/>
               </a:rPr>
-              <a:t>ĐỀ BÀI</a:t>
+              <a:t>LỜI GIẢI</a:t>
             </a:r>
           </a:p>
         </p:txBody>
@@ -5569,7 +5610,7 @@
         <p:spPr>
           <a:xfrm>
             <a:off x="731520" y="274320"/>
-            <a:ext cx="10030968" cy="868680"/>
+            <a:ext cx="9793224" cy="868680"/>
           </a:xfrm>
           <a:prstGeom prst="rect">
             <a:avLst/>
@@ -5589,7 +5630,7 @@
                 </a:solidFill>
                 <a:latin typeface="Arial"/>
               </a:rPr>
-              <a:t>ĐỀ MINH HỌA · PHẦN I · CÂU 6</a:t>
+              <a:t>ĐỀ MINH HỌA · PHẦN I · CÂU 4</a:t>
             </a:r>
           </a:p>
         </p:txBody>
@@ -5695,83 +5736,45 @@
           </a:bodyPr>
           <a:lstStyle/>
           <a:p>
-            <a:pPr algn="l">
+            <a:pPr algn="l" marL="365760" indent="-365760">
               <a:spcAft>
                 <a:spcPts val="800"/>
               </a:spcAft>
+              <a:buClr>
+                <a:srgbClr val="1E40AF"/>
+              </a:buClr>
+              <a:buFont typeface="Arial"/>
+              <a:buChar char="•"/>
             </a:pPr>
             <a:r>
-              <a:rPr sz="2000" b="1">
+              <a:rPr sz="2000">
                 <a:solidFill>
                   <a:srgbClr val="1E293B"/>
                 </a:solidFill>
                 <a:latin typeface="Calibri"/>
               </a:rPr>
-              <a:t>Động lực nào sau đây không phải động lực của dòng mạch gỗ?</a:t>
-            </a:r>
-          </a:p>
-          <a:p>
-            <a:pPr algn="l">
+              <a:t>Đáp án D.</a:t>
+            </a:r>
+          </a:p>
+          <a:p>
+            <a:pPr algn="l" marL="365760" indent="-365760">
               <a:spcAft>
                 <a:spcPts val="800"/>
               </a:spcAft>
+              <a:buClr>
+                <a:srgbClr val="1E40AF"/>
+              </a:buClr>
+              <a:buFont typeface="Arial"/>
+              <a:buChar char="•"/>
             </a:pPr>
             <a:r>
-              <a:rPr sz="2000" b="1">
+              <a:rPr sz="2000">
                 <a:solidFill>
                   <a:srgbClr val="1E293B"/>
                 </a:solidFill>
                 <a:latin typeface="Calibri"/>
               </a:rPr>
-              <a:t>A. Lực liên kết giữa các phân tử nước và lực bám vào thành mạch</a:t>
-            </a:r>
-          </a:p>
-          <a:p>
-            <a:pPr algn="l">
-              <a:spcAft>
-                <a:spcPts val="800"/>
-              </a:spcAft>
-            </a:pPr>
-            <a:r>
-              <a:rPr sz="2000" b="1">
-                <a:solidFill>
-                  <a:srgbClr val="1E293B"/>
-                </a:solidFill>
-                <a:latin typeface="Calibri"/>
-              </a:rPr>
-              <a:t>B. Lực đẩy của áp suất rễ</a:t>
-            </a:r>
-          </a:p>
-          <a:p>
-            <a:pPr algn="l">
-              <a:spcAft>
-                <a:spcPts val="800"/>
-              </a:spcAft>
-            </a:pPr>
-            <a:r>
-              <a:rPr sz="2000" b="1">
-                <a:solidFill>
-                  <a:srgbClr val="1E293B"/>
-                </a:solidFill>
-                <a:latin typeface="Calibri"/>
-              </a:rPr>
-              <a:t>C. Sự chênh lệch nồng độ sucrose giữa cơ quan nguồn và cơ quan đích</a:t>
-            </a:r>
-          </a:p>
-          <a:p>
-            <a:pPr algn="l">
-              <a:spcAft>
-                <a:spcPts val="800"/>
-              </a:spcAft>
-            </a:pPr>
-            <a:r>
-              <a:rPr sz="2000" b="1">
-                <a:solidFill>
-                  <a:srgbClr val="1E293B"/>
-                </a:solidFill>
-                <a:latin typeface="Calibri"/>
-              </a:rPr>
-              <a:t>D. Lực kéo do thoát hơi nước ở lá</a:t>
+              <a:t>SGK mục I.3a.</a:t>
             </a:r>
           </a:p>
         </p:txBody>
@@ -5854,14 +5857,14 @@
         </p:nvSpPr>
         <p:spPr>
           <a:xfrm>
-            <a:off x="10463479" y="457200"/>
-            <a:ext cx="1179576" cy="457200"/>
+            <a:off x="10701223" y="457200"/>
+            <a:ext cx="941832" cy="457200"/>
           </a:xfrm>
           <a:prstGeom prst="roundRect">
             <a:avLst/>
           </a:prstGeom>
           <a:solidFill>
-            <a:srgbClr val="991B1B"/>
+            <a:srgbClr val="1E40AF"/>
           </a:solidFill>
           <a:ln>
             <a:noFill/>
@@ -5894,7 +5897,7 @@
                 </a:solidFill>
                 <a:latin typeface="Arial"/>
               </a:rPr>
-              <a:t>LỜI GIẢI</a:t>
+              <a:t>ĐỀ BÀI</a:t>
             </a:r>
           </a:p>
         </p:txBody>
@@ -5908,7 +5911,7 @@
         <p:spPr>
           <a:xfrm>
             <a:off x="731520" y="274320"/>
-            <a:ext cx="9793224" cy="868680"/>
+            <a:ext cx="10030968" cy="868680"/>
           </a:xfrm>
           <a:prstGeom prst="rect">
             <a:avLst/>
@@ -5928,7 +5931,7 @@
                 </a:solidFill>
                 <a:latin typeface="Arial"/>
               </a:rPr>
-              <a:t>ĐỀ MINH HỌA · PHẦN I · CÂU 6</a:t>
+              <a:t>ĐỀ MINH HỌA · PHẦN I · CÂU 5</a:t>
             </a:r>
           </a:p>
         </p:txBody>
@@ -6034,45 +6037,83 @@
           </a:bodyPr>
           <a:lstStyle/>
           <a:p>
-            <a:pPr algn="l" marL="365760" indent="-365760">
+            <a:pPr algn="l">
               <a:spcAft>
                 <a:spcPts val="800"/>
               </a:spcAft>
-              <a:buClr>
-                <a:srgbClr val="1E40AF"/>
-              </a:buClr>
-              <a:buFont typeface="Arial"/>
-              <a:buChar char="•"/>
             </a:pPr>
             <a:r>
-              <a:rPr sz="2000">
+              <a:rPr sz="2000" b="1">
                 <a:solidFill>
                   <a:srgbClr val="1E293B"/>
                 </a:solidFill>
                 <a:latin typeface="Calibri"/>
               </a:rPr>
-              <a:t>Đáp án C.</a:t>
-            </a:r>
-          </a:p>
-          <a:p>
-            <a:pPr algn="l" marL="365760" indent="-365760">
+              <a:t>Bằng phương pháp sắc kí giấy, sắc tố trong lá được tách thành</a:t>
+            </a:r>
+          </a:p>
+          <a:p>
+            <a:pPr algn="l">
               <a:spcAft>
                 <a:spcPts val="800"/>
               </a:spcAft>
-              <a:buClr>
-                <a:srgbClr val="1E40AF"/>
-              </a:buClr>
-              <a:buFont typeface="Arial"/>
-              <a:buChar char="•"/>
             </a:pPr>
             <a:r>
-              <a:rPr sz="2000">
+              <a:rPr sz="2000" b="1">
                 <a:solidFill>
                   <a:srgbClr val="1E293B"/>
                 </a:solidFill>
                 <a:latin typeface="Calibri"/>
               </a:rPr>
-              <a:t>Chênh lệch nồng độ là động lực của dòng mạch rây.</a:t>
+              <a:t>A. 1 vệt màu xanh lục</a:t>
+            </a:r>
+          </a:p>
+          <a:p>
+            <a:pPr algn="l">
+              <a:spcAft>
+                <a:spcPts val="800"/>
+              </a:spcAft>
+            </a:pPr>
+            <a:r>
+              <a:rPr sz="2000" b="1">
+                <a:solidFill>
+                  <a:srgbClr val="1E293B"/>
+                </a:solidFill>
+                <a:latin typeface="Calibri"/>
+              </a:rPr>
+              <a:t>B. 2 vệt: diệp lục và carotenoid</a:t>
+            </a:r>
+          </a:p>
+          <a:p>
+            <a:pPr algn="l">
+              <a:spcAft>
+                <a:spcPts val="800"/>
+              </a:spcAft>
+            </a:pPr>
+            <a:r>
+              <a:rPr sz="2000" b="1">
+                <a:solidFill>
+                  <a:srgbClr val="1E293B"/>
+                </a:solidFill>
+                <a:latin typeface="Calibri"/>
+              </a:rPr>
+              <a:t>C. 4 vệt: carotene, xanthophyll, diệp lục a, diệp lục b</a:t>
+            </a:r>
+          </a:p>
+          <a:p>
+            <a:pPr algn="l">
+              <a:spcAft>
+                <a:spcPts val="800"/>
+              </a:spcAft>
+            </a:pPr>
+            <a:r>
+              <a:rPr sz="2000" b="1">
+                <a:solidFill>
+                  <a:srgbClr val="1E293B"/>
+                </a:solidFill>
+                <a:latin typeface="Calibri"/>
+              </a:rPr>
+              <a:t>D. 3 vệt: diệp lục a, diệp lục b, chlorophyll c</a:t>
             </a:r>
           </a:p>
         </p:txBody>
@@ -6155,14 +6196,14 @@
         </p:nvSpPr>
         <p:spPr>
           <a:xfrm>
-            <a:off x="10701223" y="457200"/>
-            <a:ext cx="941832" cy="457200"/>
+            <a:off x="10463479" y="457200"/>
+            <a:ext cx="1179576" cy="457200"/>
           </a:xfrm>
           <a:prstGeom prst="roundRect">
             <a:avLst/>
           </a:prstGeom>
           <a:solidFill>
-            <a:srgbClr val="1E40AF"/>
+            <a:srgbClr val="991B1B"/>
           </a:solidFill>
           <a:ln>
             <a:noFill/>
@@ -6195,7 +6236,7 @@
                 </a:solidFill>
                 <a:latin typeface="Arial"/>
               </a:rPr>
-              <a:t>ĐỀ BÀI</a:t>
+              <a:t>LỜI GIẢI</a:t>
             </a:r>
           </a:p>
         </p:txBody>
@@ -6209,7 +6250,7 @@
         <p:spPr>
           <a:xfrm>
             <a:off x="731520" y="274320"/>
-            <a:ext cx="10030968" cy="868680"/>
+            <a:ext cx="9793224" cy="868680"/>
           </a:xfrm>
           <a:prstGeom prst="rect">
             <a:avLst/>
@@ -6229,7 +6270,7 @@
                 </a:solidFill>
                 <a:latin typeface="Arial"/>
               </a:rPr>
-              <a:t>ĐỀ MINH HỌA · PHẦN I · CÂU 7</a:t>
+              <a:t>ĐỀ MINH HỌA · PHẦN I · CÂU 5</a:t>
             </a:r>
           </a:p>
         </p:txBody>
@@ -6335,83 +6376,45 @@
           </a:bodyPr>
           <a:lstStyle/>
           <a:p>
-            <a:pPr algn="l">
+            <a:pPr algn="l" marL="365760" indent="-365760">
               <a:spcAft>
                 <a:spcPts val="800"/>
               </a:spcAft>
+              <a:buClr>
+                <a:srgbClr val="1E40AF"/>
+              </a:buClr>
+              <a:buFont typeface="Arial"/>
+              <a:buChar char="•"/>
             </a:pPr>
             <a:r>
-              <a:rPr sz="2000" b="1">
+              <a:rPr sz="2000">
                 <a:solidFill>
                   <a:srgbClr val="1E293B"/>
                 </a:solidFill>
                 <a:latin typeface="Calibri"/>
               </a:rPr>
-              <a:t>Trong thí nghiệm chứng minh hấp thụ nước ở rễ, nhỏ một giọt dầu vào ống nghiệm nhằm</a:t>
-            </a:r>
-          </a:p>
-          <a:p>
-            <a:pPr algn="l">
+              <a:t>Đáp án C.</a:t>
+            </a:r>
+          </a:p>
+          <a:p>
+            <a:pPr algn="l" marL="365760" indent="-365760">
               <a:spcAft>
                 <a:spcPts val="800"/>
               </a:spcAft>
+              <a:buClr>
+                <a:srgbClr val="1E40AF"/>
+              </a:buClr>
+              <a:buFont typeface="Arial"/>
+              <a:buChar char="•"/>
             </a:pPr>
             <a:r>
-              <a:rPr sz="2000" b="1">
+              <a:rPr sz="2000">
                 <a:solidFill>
                   <a:srgbClr val="1E293B"/>
                 </a:solidFill>
                 <a:latin typeface="Calibri"/>
               </a:rPr>
-              <a:t>A. cung cấp dinh dưỡng cho cây</a:t>
-            </a:r>
-          </a:p>
-          <a:p>
-            <a:pPr algn="l">
-              <a:spcAft>
-                <a:spcPts val="800"/>
-              </a:spcAft>
-            </a:pPr>
-            <a:r>
-              <a:rPr sz="2000" b="1">
-                <a:solidFill>
-                  <a:srgbClr val="1E293B"/>
-                </a:solidFill>
-                <a:latin typeface="Calibri"/>
-              </a:rPr>
-              <a:t>B. tránh nước bốc hơi trực tiếp từ bề mặt ống</a:t>
-            </a:r>
-          </a:p>
-          <a:p>
-            <a:pPr algn="l">
-              <a:spcAft>
-                <a:spcPts val="800"/>
-              </a:spcAft>
-            </a:pPr>
-            <a:r>
-              <a:rPr sz="2000" b="1">
-                <a:solidFill>
-                  <a:srgbClr val="1E293B"/>
-                </a:solidFill>
-                <a:latin typeface="Calibri"/>
-              </a:rPr>
-              <a:t>C. nhuộm màu nước</a:t>
-            </a:r>
-          </a:p>
-          <a:p>
-            <a:pPr algn="l">
-              <a:spcAft>
-                <a:spcPts val="800"/>
-              </a:spcAft>
-            </a:pPr>
-            <a:r>
-              <a:rPr sz="2000" b="1">
-                <a:solidFill>
-                  <a:srgbClr val="1E293B"/>
-                </a:solidFill>
-                <a:latin typeface="Calibri"/>
-              </a:rPr>
-              <a:t>D. diệt vi khuẩn</a:t>
+              <a:t>SGK: để các sắc tố tách riêng thành 4 loại trong khoảng 10 phút.</a:t>
             </a:r>
           </a:p>
         </p:txBody>
@@ -6691,7 +6694,7 @@
                 </a:solidFill>
                 <a:latin typeface="Calibri"/>
               </a:rPr>
-              <a:t>Phần 1. Tóm tắt lý thuyết – Bài 1: Khái quát về trao đổi chất và chuyển hoá năng lượng, Bài 2: Trao đổi nước và khoáng ở thực vật, Bài 3: Thực hành trao đổi nước và khoáng ở thực vật, Bài 4: Quang hợp ở thực vật</a:t>
+              <a:t>Phần 1. Tóm tắt lý thuyết – Bài 1: Khái quát về trao đổi chất và chuyển hoá năng lượng, Bài 2: Trao đổi nước và khoáng ở thực vật, Bài 3: Thực hành trao đổi nước và khoáng ở thực vật, Bài 4: Quang hợp ở thực vật, Bài 5: Thực hành: Quang hợp ở thực vật, Bài 6: Hô hấp ở thực vật, Bài 7: Thực hành: Hô hấp ở thực vật</a:t>
             </a:r>
           </a:p>
           <a:p>
@@ -6816,14 +6819,14 @@
         </p:nvSpPr>
         <p:spPr>
           <a:xfrm>
-            <a:off x="10463479" y="457200"/>
-            <a:ext cx="1179576" cy="457200"/>
+            <a:off x="10701223" y="457200"/>
+            <a:ext cx="941832" cy="457200"/>
           </a:xfrm>
           <a:prstGeom prst="roundRect">
             <a:avLst/>
           </a:prstGeom>
           <a:solidFill>
-            <a:srgbClr val="991B1B"/>
+            <a:srgbClr val="1E40AF"/>
           </a:solidFill>
           <a:ln>
             <a:noFill/>
@@ -6856,7 +6859,7 @@
                 </a:solidFill>
                 <a:latin typeface="Arial"/>
               </a:rPr>
-              <a:t>LỜI GIẢI</a:t>
+              <a:t>ĐỀ BÀI</a:t>
             </a:r>
           </a:p>
         </p:txBody>
@@ -6870,7 +6873,7 @@
         <p:spPr>
           <a:xfrm>
             <a:off x="731520" y="274320"/>
-            <a:ext cx="9793224" cy="868680"/>
+            <a:ext cx="10030968" cy="868680"/>
           </a:xfrm>
           <a:prstGeom prst="rect">
             <a:avLst/>
@@ -6890,7 +6893,7 @@
                 </a:solidFill>
                 <a:latin typeface="Arial"/>
               </a:rPr>
-              <a:t>ĐỀ MINH HỌA · PHẦN I · CÂU 7</a:t>
+              <a:t>ĐỀ MINH HỌA · PHẦN I · CÂU 6</a:t>
             </a:r>
           </a:p>
         </p:txBody>
@@ -6996,45 +6999,83 @@
           </a:bodyPr>
           <a:lstStyle/>
           <a:p>
-            <a:pPr algn="l" marL="365760" indent="-365760">
+            <a:pPr algn="l">
               <a:spcAft>
                 <a:spcPts val="800"/>
               </a:spcAft>
-              <a:buClr>
-                <a:srgbClr val="1E40AF"/>
-              </a:buClr>
-              <a:buFont typeface="Arial"/>
-              <a:buChar char="•"/>
             </a:pPr>
             <a:r>
-              <a:rPr sz="2000">
+              <a:rPr sz="2000" b="1">
                 <a:solidFill>
                   <a:srgbClr val="1E293B"/>
                 </a:solidFill>
                 <a:latin typeface="Calibri"/>
               </a:rPr>
-              <a:t>Đáp án B.</a:t>
-            </a:r>
-          </a:p>
-          <a:p>
-            <a:pPr algn="l" marL="365760" indent="-365760">
+              <a:t>Giai đoạn tạo ra nhiều ATP nhất trong hô hấp hiếu khí là</a:t>
+            </a:r>
+          </a:p>
+          <a:p>
+            <a:pPr algn="l">
               <a:spcAft>
                 <a:spcPts val="800"/>
               </a:spcAft>
-              <a:buClr>
-                <a:srgbClr val="1E40AF"/>
-              </a:buClr>
-              <a:buFont typeface="Arial"/>
-              <a:buChar char="•"/>
             </a:pPr>
             <a:r>
-              <a:rPr sz="2000">
+              <a:rPr sz="2000" b="1">
                 <a:solidFill>
                   <a:srgbClr val="1E293B"/>
                 </a:solidFill>
                 <a:latin typeface="Calibri"/>
               </a:rPr>
-              <a:t>SGK H 3.1.</a:t>
+              <a:t>A. chu trình Krebs</a:t>
+            </a:r>
+          </a:p>
+          <a:p>
+            <a:pPr algn="l">
+              <a:spcAft>
+                <a:spcPts val="800"/>
+              </a:spcAft>
+            </a:pPr>
+            <a:r>
+              <a:rPr sz="2000" b="1">
+                <a:solidFill>
+                  <a:srgbClr val="1E293B"/>
+                </a:solidFill>
+                <a:latin typeface="Calibri"/>
+              </a:rPr>
+              <a:t>B. đường phân</a:t>
+            </a:r>
+          </a:p>
+          <a:p>
+            <a:pPr algn="l">
+              <a:spcAft>
+                <a:spcPts val="800"/>
+              </a:spcAft>
+            </a:pPr>
+            <a:r>
+              <a:rPr sz="2000" b="1">
+                <a:solidFill>
+                  <a:srgbClr val="1E293B"/>
+                </a:solidFill>
+                <a:latin typeface="Calibri"/>
+              </a:rPr>
+              <a:t>C. chuỗi truyền electron</a:t>
+            </a:r>
+          </a:p>
+          <a:p>
+            <a:pPr algn="l">
+              <a:spcAft>
+                <a:spcPts val="800"/>
+              </a:spcAft>
+            </a:pPr>
+            <a:r>
+              <a:rPr sz="2000" b="1">
+                <a:solidFill>
+                  <a:srgbClr val="1E293B"/>
+                </a:solidFill>
+                <a:latin typeface="Calibri"/>
+              </a:rPr>
+              <a:t>D. oxy hoá pyruvate</a:t>
             </a:r>
           </a:p>
         </p:txBody>
@@ -7117,14 +7158,14 @@
         </p:nvSpPr>
         <p:spPr>
           <a:xfrm>
-            <a:off x="10701223" y="457200"/>
-            <a:ext cx="941832" cy="457200"/>
+            <a:off x="10463479" y="457200"/>
+            <a:ext cx="1179576" cy="457200"/>
           </a:xfrm>
           <a:prstGeom prst="roundRect">
             <a:avLst/>
           </a:prstGeom>
           <a:solidFill>
-            <a:srgbClr val="1E40AF"/>
+            <a:srgbClr val="991B1B"/>
           </a:solidFill>
           <a:ln>
             <a:noFill/>
@@ -7157,7 +7198,7 @@
                 </a:solidFill>
                 <a:latin typeface="Arial"/>
               </a:rPr>
-              <a:t>ĐỀ BÀI</a:t>
+              <a:t>LỜI GIẢI</a:t>
             </a:r>
           </a:p>
         </p:txBody>
@@ -7171,7 +7212,7 @@
         <p:spPr>
           <a:xfrm>
             <a:off x="731520" y="274320"/>
-            <a:ext cx="10030968" cy="868680"/>
+            <a:ext cx="9793224" cy="868680"/>
           </a:xfrm>
           <a:prstGeom prst="rect">
             <a:avLst/>
@@ -7191,7 +7232,7 @@
                 </a:solidFill>
                 <a:latin typeface="Arial"/>
               </a:rPr>
-              <a:t>ĐỀ MINH HỌA · PHẦN I · CÂU 8</a:t>
+              <a:t>ĐỀ MINH HỌA · PHẦN I · CÂU 6</a:t>
             </a:r>
           </a:p>
         </p:txBody>
@@ -7297,83 +7338,45 @@
           </a:bodyPr>
           <a:lstStyle/>
           <a:p>
-            <a:pPr algn="l">
+            <a:pPr algn="l" marL="365760" indent="-365760">
               <a:spcAft>
                 <a:spcPts val="800"/>
               </a:spcAft>
+              <a:buClr>
+                <a:srgbClr val="1E40AF"/>
+              </a:buClr>
+              <a:buFont typeface="Arial"/>
+              <a:buChar char="•"/>
             </a:pPr>
             <a:r>
-              <a:rPr sz="2000" b="1">
+              <a:rPr sz="2000">
                 <a:solidFill>
                   <a:srgbClr val="1E293B"/>
                 </a:solidFill>
                 <a:latin typeface="Calibri"/>
               </a:rPr>
-              <a:t>Nhóm thực vật nào sau đây là thực vật C₄?</a:t>
-            </a:r>
-          </a:p>
-          <a:p>
-            <a:pPr algn="l">
+              <a:t>Đáp án C.</a:t>
+            </a:r>
+          </a:p>
+          <a:p>
+            <a:pPr algn="l" marL="365760" indent="-365760">
               <a:spcAft>
                 <a:spcPts val="800"/>
               </a:spcAft>
+              <a:buClr>
+                <a:srgbClr val="1E40AF"/>
+              </a:buClr>
+              <a:buFont typeface="Arial"/>
+              <a:buChar char="•"/>
             </a:pPr>
             <a:r>
-              <a:rPr sz="2000" b="1">
+              <a:rPr sz="2000">
                 <a:solidFill>
                   <a:srgbClr val="1E293B"/>
                 </a:solidFill>
                 <a:latin typeface="Calibri"/>
               </a:rPr>
-              <a:t>A. Lúa, khoai, sắn</a:t>
-            </a:r>
-          </a:p>
-          <a:p>
-            <a:pPr algn="l">
-              <a:spcAft>
-                <a:spcPts val="800"/>
-              </a:spcAft>
-            </a:pPr>
-            <a:r>
-              <a:rPr sz="2000" b="1">
-                <a:solidFill>
-                  <a:srgbClr val="1E293B"/>
-                </a:solidFill>
-                <a:latin typeface="Calibri"/>
-              </a:rPr>
-              <a:t>B. Mía, ngô, rau dền</a:t>
-            </a:r>
-          </a:p>
-          <a:p>
-            <a:pPr algn="l">
-              <a:spcAft>
-                <a:spcPts val="800"/>
-              </a:spcAft>
-            </a:pPr>
-            <a:r>
-              <a:rPr sz="2000" b="1">
-                <a:solidFill>
-                  <a:srgbClr val="1E293B"/>
-                </a:solidFill>
-                <a:latin typeface="Calibri"/>
-              </a:rPr>
-              <a:t>C. Dứa, xương rồng, thuốc bỏng</a:t>
-            </a:r>
-          </a:p>
-          <a:p>
-            <a:pPr algn="l">
-              <a:spcAft>
-                <a:spcPts val="800"/>
-              </a:spcAft>
-            </a:pPr>
-            <a:r>
-              <a:rPr sz="2000" b="1">
-                <a:solidFill>
-                  <a:srgbClr val="1E293B"/>
-                </a:solidFill>
-                <a:latin typeface="Calibri"/>
-              </a:rPr>
-              <a:t>D. Đậu, cà chua, rau cải</a:t>
+              <a:t>Chuỗi truyền electron tạo khoảng 26 – 28 ATP.</a:t>
             </a:r>
           </a:p>
         </p:txBody>
@@ -7456,14 +7459,14 @@
         </p:nvSpPr>
         <p:spPr>
           <a:xfrm>
-            <a:off x="10463479" y="457200"/>
-            <a:ext cx="1179576" cy="457200"/>
+            <a:off x="10701223" y="457200"/>
+            <a:ext cx="941832" cy="457200"/>
           </a:xfrm>
           <a:prstGeom prst="roundRect">
             <a:avLst/>
           </a:prstGeom>
           <a:solidFill>
-            <a:srgbClr val="991B1B"/>
+            <a:srgbClr val="1E40AF"/>
           </a:solidFill>
           <a:ln>
             <a:noFill/>
@@ -7496,7 +7499,7 @@
                 </a:solidFill>
                 <a:latin typeface="Arial"/>
               </a:rPr>
-              <a:t>LỜI GIẢI</a:t>
+              <a:t>ĐỀ BÀI</a:t>
             </a:r>
           </a:p>
         </p:txBody>
@@ -7510,7 +7513,7 @@
         <p:spPr>
           <a:xfrm>
             <a:off x="731520" y="274320"/>
-            <a:ext cx="9793224" cy="868680"/>
+            <a:ext cx="10030968" cy="868680"/>
           </a:xfrm>
           <a:prstGeom prst="rect">
             <a:avLst/>
@@ -7530,7 +7533,7 @@
                 </a:solidFill>
                 <a:latin typeface="Arial"/>
               </a:rPr>
-              <a:t>ĐỀ MINH HỌA · PHẦN I · CÂU 8</a:t>
+              <a:t>ĐỀ MINH HỌA · PHẦN I · CÂU 7</a:t>
             </a:r>
           </a:p>
         </p:txBody>
@@ -7636,45 +7639,83 @@
           </a:bodyPr>
           <a:lstStyle/>
           <a:p>
-            <a:pPr algn="l" marL="365760" indent="-365760">
+            <a:pPr algn="l">
               <a:spcAft>
                 <a:spcPts val="800"/>
               </a:spcAft>
-              <a:buClr>
-                <a:srgbClr val="1E40AF"/>
-              </a:buClr>
-              <a:buFont typeface="Arial"/>
-              <a:buChar char="•"/>
             </a:pPr>
             <a:r>
-              <a:rPr sz="2000">
+              <a:rPr sz="2000" b="1">
                 <a:solidFill>
                   <a:srgbClr val="1E293B"/>
                 </a:solidFill>
                 <a:latin typeface="Calibri"/>
               </a:rPr>
-              <a:t>Đáp án B.</a:t>
-            </a:r>
-          </a:p>
-          <a:p>
-            <a:pPr algn="l" marL="365760" indent="-365760">
+              <a:t>Dùng hạt nảy mầm làm mẫu vật vì hạt nảy mầm</a:t>
+            </a:r>
+          </a:p>
+          <a:p>
+            <a:pPr algn="l">
               <a:spcAft>
                 <a:spcPts val="800"/>
               </a:spcAft>
-              <a:buClr>
-                <a:srgbClr val="1E40AF"/>
-              </a:buClr>
-              <a:buFont typeface="Arial"/>
-              <a:buChar char="•"/>
             </a:pPr>
             <a:r>
-              <a:rPr sz="2000">
+              <a:rPr sz="2000" b="1">
                 <a:solidFill>
                   <a:srgbClr val="1E293B"/>
                 </a:solidFill>
                 <a:latin typeface="Calibri"/>
               </a:rPr>
-              <a:t>SGK mục II.2b.</a:t>
+              <a:t>A. có cường độ hô hấp mạnh, thải nhiều CO₂</a:t>
+            </a:r>
+          </a:p>
+          <a:p>
+            <a:pPr algn="l">
+              <a:spcAft>
+                <a:spcPts val="800"/>
+              </a:spcAft>
+            </a:pPr>
+            <a:r>
+              <a:rPr sz="2000" b="1">
+                <a:solidFill>
+                  <a:srgbClr val="1E293B"/>
+                </a:solidFill>
+                <a:latin typeface="Calibri"/>
+              </a:rPr>
+              <a:t>B. quang hợp mạnh</a:t>
+            </a:r>
+          </a:p>
+          <a:p>
+            <a:pPr algn="l">
+              <a:spcAft>
+                <a:spcPts val="800"/>
+              </a:spcAft>
+            </a:pPr>
+            <a:r>
+              <a:rPr sz="2000" b="1">
+                <a:solidFill>
+                  <a:srgbClr val="1E293B"/>
+                </a:solidFill>
+                <a:latin typeface="Calibri"/>
+              </a:rPr>
+              <a:t>C. không hô hấp</a:t>
+            </a:r>
+          </a:p>
+          <a:p>
+            <a:pPr algn="l">
+              <a:spcAft>
+                <a:spcPts val="800"/>
+              </a:spcAft>
+            </a:pPr>
+            <a:r>
+              <a:rPr sz="2000" b="1">
+                <a:solidFill>
+                  <a:srgbClr val="1E293B"/>
+                </a:solidFill>
+                <a:latin typeface="Calibri"/>
+              </a:rPr>
+              <a:t>D. hấp thụ nhiều CO₂</a:t>
             </a:r>
           </a:p>
         </p:txBody>
@@ -7757,14 +7798,14 @@
         </p:nvSpPr>
         <p:spPr>
           <a:xfrm>
-            <a:off x="10701223" y="457200"/>
-            <a:ext cx="941832" cy="457200"/>
+            <a:off x="10463479" y="457200"/>
+            <a:ext cx="1179576" cy="457200"/>
           </a:xfrm>
           <a:prstGeom prst="roundRect">
             <a:avLst/>
           </a:prstGeom>
           <a:solidFill>
-            <a:srgbClr val="1E40AF"/>
+            <a:srgbClr val="991B1B"/>
           </a:solidFill>
           <a:ln>
             <a:noFill/>
@@ -7797,7 +7838,7 @@
                 </a:solidFill>
                 <a:latin typeface="Arial"/>
               </a:rPr>
-              <a:t>ĐỀ BÀI</a:t>
+              <a:t>LỜI GIẢI</a:t>
             </a:r>
           </a:p>
         </p:txBody>
@@ -7811,7 +7852,7 @@
         <p:spPr>
           <a:xfrm>
             <a:off x="731520" y="274320"/>
-            <a:ext cx="10030968" cy="868680"/>
+            <a:ext cx="9793224" cy="868680"/>
           </a:xfrm>
           <a:prstGeom prst="rect">
             <a:avLst/>
@@ -7831,7 +7872,7 @@
                 </a:solidFill>
                 <a:latin typeface="Arial"/>
               </a:rPr>
-              <a:t>ĐỀ MINH HỌA · PHẦN I · CÂU 9</a:t>
+              <a:t>ĐỀ MINH HỌA · PHẦN I · CÂU 7</a:t>
             </a:r>
           </a:p>
         </p:txBody>
@@ -7937,83 +7978,45 @@
           </a:bodyPr>
           <a:lstStyle/>
           <a:p>
-            <a:pPr algn="l">
+            <a:pPr algn="l" marL="365760" indent="-365760">
               <a:spcAft>
                 <a:spcPts val="800"/>
               </a:spcAft>
+              <a:buClr>
+                <a:srgbClr val="1E40AF"/>
+              </a:buClr>
+              <a:buFont typeface="Arial"/>
+              <a:buChar char="•"/>
             </a:pPr>
             <a:r>
-              <a:rPr sz="2000" b="1">
+              <a:rPr sz="2000">
                 <a:solidFill>
                   <a:srgbClr val="1E293B"/>
                 </a:solidFill>
                 <a:latin typeface="Calibri"/>
               </a:rPr>
-              <a:t>Nguồn năng lượng khởi đầu trong sinh giới là</a:t>
-            </a:r>
-          </a:p>
-          <a:p>
-            <a:pPr algn="l">
+              <a:t>Đáp án A.</a:t>
+            </a:r>
+          </a:p>
+          <a:p>
+            <a:pPr algn="l" marL="365760" indent="-365760">
               <a:spcAft>
                 <a:spcPts val="800"/>
               </a:spcAft>
+              <a:buClr>
+                <a:srgbClr val="1E40AF"/>
+              </a:buClr>
+              <a:buFont typeface="Arial"/>
+              <a:buChar char="•"/>
             </a:pPr>
             <a:r>
-              <a:rPr sz="2000" b="1">
+              <a:rPr sz="2000">
                 <a:solidFill>
                   <a:srgbClr val="1E293B"/>
                 </a:solidFill>
                 <a:latin typeface="Calibri"/>
               </a:rPr>
-              <a:t>A. năng lượng điện của vi khuẩn</a:t>
-            </a:r>
-          </a:p>
-          <a:p>
-            <a:pPr algn="l">
-              <a:spcAft>
-                <a:spcPts val="800"/>
-              </a:spcAft>
-            </a:pPr>
-            <a:r>
-              <a:rPr sz="2000" b="1">
-                <a:solidFill>
-                  <a:srgbClr val="1E293B"/>
-                </a:solidFill>
-                <a:latin typeface="Calibri"/>
-              </a:rPr>
-              <a:t>B. nhiệt năng từ lòng đất</a:t>
-            </a:r>
-          </a:p>
-          <a:p>
-            <a:pPr algn="l">
-              <a:spcAft>
-                <a:spcPts val="800"/>
-              </a:spcAft>
-            </a:pPr>
-            <a:r>
-              <a:rPr sz="2000" b="1">
-                <a:solidFill>
-                  <a:srgbClr val="1E293B"/>
-                </a:solidFill>
-                <a:latin typeface="Calibri"/>
-              </a:rPr>
-              <a:t>C. hoá năng trong thức ăn của động vật</a:t>
-            </a:r>
-          </a:p>
-          <a:p>
-            <a:pPr algn="l">
-              <a:spcAft>
-                <a:spcPts val="800"/>
-              </a:spcAft>
-            </a:pPr>
-            <a:r>
-              <a:rPr sz="2000" b="1">
-                <a:solidFill>
-                  <a:srgbClr val="1E293B"/>
-                </a:solidFill>
-                <a:latin typeface="Calibri"/>
-              </a:rPr>
-              <a:t>D. năng lượng ánh sáng mặt trời (quang năng)</a:t>
+              <a:t>Hô hấp mạnh nên kết quả rõ trong thời gian ngắn.</a:t>
             </a:r>
           </a:p>
         </p:txBody>
@@ -8096,14 +8099,14 @@
         </p:nvSpPr>
         <p:spPr>
           <a:xfrm>
-            <a:off x="10463479" y="457200"/>
-            <a:ext cx="1179576" cy="457200"/>
+            <a:off x="10701223" y="457200"/>
+            <a:ext cx="941832" cy="457200"/>
           </a:xfrm>
           <a:prstGeom prst="roundRect">
             <a:avLst/>
           </a:prstGeom>
           <a:solidFill>
-            <a:srgbClr val="991B1B"/>
+            <a:srgbClr val="1E40AF"/>
           </a:solidFill>
           <a:ln>
             <a:noFill/>
@@ -8136,7 +8139,7 @@
                 </a:solidFill>
                 <a:latin typeface="Arial"/>
               </a:rPr>
-              <a:t>LỜI GIẢI</a:t>
+              <a:t>ĐỀ BÀI</a:t>
             </a:r>
           </a:p>
         </p:txBody>
@@ -8150,7 +8153,7 @@
         <p:spPr>
           <a:xfrm>
             <a:off x="731520" y="274320"/>
-            <a:ext cx="9793224" cy="868680"/>
+            <a:ext cx="10030968" cy="868680"/>
           </a:xfrm>
           <a:prstGeom prst="rect">
             <a:avLst/>
@@ -8170,7 +8173,7 @@
                 </a:solidFill>
                 <a:latin typeface="Arial"/>
               </a:rPr>
-              <a:t>ĐỀ MINH HỌA · PHẦN I · CÂU 9</a:t>
+              <a:t>ĐỀ MINH HỌA · PHẦN I · CÂU 8</a:t>
             </a:r>
           </a:p>
         </p:txBody>
@@ -8276,45 +8279,83 @@
           </a:bodyPr>
           <a:lstStyle/>
           <a:p>
-            <a:pPr algn="l" marL="365760" indent="-365760">
+            <a:pPr algn="l">
               <a:spcAft>
                 <a:spcPts val="800"/>
               </a:spcAft>
-              <a:buClr>
-                <a:srgbClr val="1E40AF"/>
-              </a:buClr>
-              <a:buFont typeface="Arial"/>
-              <a:buChar char="•"/>
             </a:pPr>
             <a:r>
-              <a:rPr sz="2000">
+              <a:rPr sz="2000" b="1">
                 <a:solidFill>
                   <a:srgbClr val="1E293B"/>
                 </a:solidFill>
                 <a:latin typeface="Calibri"/>
               </a:rPr>
-              <a:t>Đáp án D.</a:t>
-            </a:r>
-          </a:p>
-          <a:p>
-            <a:pPr algn="l" marL="365760" indent="-365760">
+              <a:t>Một người bị suy thận, không thải hết urea, uric acid qua nước tiểu. Hậu quả nào sau đây phù hợp?</a:t>
+            </a:r>
+          </a:p>
+          <a:p>
+            <a:pPr algn="l">
               <a:spcAft>
                 <a:spcPts val="800"/>
               </a:spcAft>
-              <a:buClr>
-                <a:srgbClr val="1E40AF"/>
-              </a:buClr>
-              <a:buFont typeface="Arial"/>
-              <a:buChar char="•"/>
             </a:pPr>
             <a:r>
-              <a:rPr sz="2000">
+              <a:rPr sz="2000" b="1">
                 <a:solidFill>
                   <a:srgbClr val="1E293B"/>
                 </a:solidFill>
                 <a:latin typeface="Calibri"/>
               </a:rPr>
-              <a:t>SGK: chất diệp lục của cây xanh thu nhận quang năng để tổng hợp chất hữu cơ từ CO₂ và nước.</a:t>
+              <a:t>A. trao đổi chất của cơ thể diễn ra thuận lợi hơn</a:t>
+            </a:r>
+          </a:p>
+          <a:p>
+            <a:pPr algn="l">
+              <a:spcAft>
+                <a:spcPts val="800"/>
+              </a:spcAft>
+            </a:pPr>
+            <a:r>
+              <a:rPr sz="2000" b="1">
+                <a:solidFill>
+                  <a:srgbClr val="1E293B"/>
+                </a:solidFill>
+                <a:latin typeface="Calibri"/>
+              </a:rPr>
+              <a:t>B. cơ thể tăng tổng hợp protein, phát triển nhanh hơn</a:t>
+            </a:r>
+          </a:p>
+          <a:p>
+            <a:pPr algn="l">
+              <a:spcAft>
+                <a:spcPts val="800"/>
+              </a:spcAft>
+            </a:pPr>
+            <a:r>
+              <a:rPr sz="2000" b="1">
+                <a:solidFill>
+                  <a:srgbClr val="1E293B"/>
+                </a:solidFill>
+                <a:latin typeface="Calibri"/>
+              </a:rPr>
+              <a:t>C. nhu cầu O₂ của cơ thể giảm về 0</a:t>
+            </a:r>
+          </a:p>
+          <a:p>
+            <a:pPr algn="l">
+              <a:spcAft>
+                <a:spcPts val="800"/>
+              </a:spcAft>
+            </a:pPr>
+            <a:r>
+              <a:rPr sz="2000" b="1">
+                <a:solidFill>
+                  <a:srgbClr val="1E293B"/>
+                </a:solidFill>
+                <a:latin typeface="Calibri"/>
+              </a:rPr>
+              <a:t>D. áp suất thẩm thấu, huyết áp tăng; hoạt động tế bào, cơ quan bị rối loạn</a:t>
             </a:r>
           </a:p>
         </p:txBody>
@@ -8397,14 +8438,14 @@
         </p:nvSpPr>
         <p:spPr>
           <a:xfrm>
-            <a:off x="10701223" y="457200"/>
-            <a:ext cx="941832" cy="457200"/>
+            <a:off x="10463479" y="457200"/>
+            <a:ext cx="1179576" cy="457200"/>
           </a:xfrm>
           <a:prstGeom prst="roundRect">
             <a:avLst/>
           </a:prstGeom>
           <a:solidFill>
-            <a:srgbClr val="1E40AF"/>
+            <a:srgbClr val="991B1B"/>
           </a:solidFill>
           <a:ln>
             <a:noFill/>
@@ -8437,7 +8478,7 @@
                 </a:solidFill>
                 <a:latin typeface="Arial"/>
               </a:rPr>
-              <a:t>ĐỀ BÀI</a:t>
+              <a:t>LỜI GIẢI</a:t>
             </a:r>
           </a:p>
         </p:txBody>
@@ -8451,7 +8492,7 @@
         <p:spPr>
           <a:xfrm>
             <a:off x="731520" y="274320"/>
-            <a:ext cx="10030968" cy="868680"/>
+            <a:ext cx="9793224" cy="868680"/>
           </a:xfrm>
           <a:prstGeom prst="rect">
             <a:avLst/>
@@ -8471,7 +8512,7 @@
                 </a:solidFill>
                 <a:latin typeface="Arial"/>
               </a:rPr>
-              <a:t>ĐỀ MINH HỌA · PHẦN I · CÂU 10</a:t>
+              <a:t>ĐỀ MINH HỌA · PHẦN I · CÂU 8</a:t>
             </a:r>
           </a:p>
         </p:txBody>
@@ -8577,83 +8618,45 @@
           </a:bodyPr>
           <a:lstStyle/>
           <a:p>
-            <a:pPr algn="l">
+            <a:pPr algn="l" marL="365760" indent="-365760">
               <a:spcAft>
                 <a:spcPts val="800"/>
               </a:spcAft>
+              <a:buClr>
+                <a:srgbClr val="1E40AF"/>
+              </a:buClr>
+              <a:buFont typeface="Arial"/>
+              <a:buChar char="•"/>
             </a:pPr>
             <a:r>
-              <a:rPr sz="2000" b="1">
+              <a:rPr sz="2000">
                 <a:solidFill>
                   <a:srgbClr val="1E293B"/>
                 </a:solidFill>
                 <a:latin typeface="Calibri"/>
               </a:rPr>
-              <a:t>Phân hữu cơ thường được dùng để bón lót vì</a:t>
-            </a:r>
-          </a:p>
-          <a:p>
-            <a:pPr algn="l">
+              <a:t>Đáp án D.</a:t>
+            </a:r>
+          </a:p>
+          <a:p>
+            <a:pPr algn="l" marL="365760" indent="-365760">
               <a:spcAft>
                 <a:spcPts val="800"/>
               </a:spcAft>
+              <a:buClr>
+                <a:srgbClr val="1E40AF"/>
+              </a:buClr>
+              <a:buFont typeface="Arial"/>
+              <a:buChar char="•"/>
             </a:pPr>
             <a:r>
-              <a:rPr sz="2000" b="1">
+              <a:rPr sz="2000">
                 <a:solidFill>
                   <a:srgbClr val="1E293B"/>
                 </a:solidFill>
                 <a:latin typeface="Calibri"/>
               </a:rPr>
-              <a:t>A. tác dụng chậm, khó tan, giàu mùn, giữ ẩm, tạo giá thể tơi xốp cho cây</a:t>
-            </a:r>
-          </a:p>
-          <a:p>
-            <a:pPr algn="l">
-              <a:spcAft>
-                <a:spcPts val="800"/>
-              </a:spcAft>
-            </a:pPr>
-            <a:r>
-              <a:rPr sz="2000" b="1">
-                <a:solidFill>
-                  <a:srgbClr val="1E293B"/>
-                </a:solidFill>
-                <a:latin typeface="Calibri"/>
-              </a:rPr>
-              <a:t>B. dễ tan, tác dụng nhanh</a:t>
-            </a:r>
-          </a:p>
-          <a:p>
-            <a:pPr algn="l">
-              <a:spcAft>
-                <a:spcPts val="800"/>
-              </a:spcAft>
-            </a:pPr>
-            <a:r>
-              <a:rPr sz="2000" b="1">
-                <a:solidFill>
-                  <a:srgbClr val="1E293B"/>
-                </a:solidFill>
-                <a:latin typeface="Calibri"/>
-              </a:rPr>
-              <a:t>C. chứa ít dinh dưỡng</a:t>
-            </a:r>
-          </a:p>
-          <a:p>
-            <a:pPr algn="l">
-              <a:spcAft>
-                <a:spcPts val="800"/>
-              </a:spcAft>
-            </a:pPr>
-            <a:r>
-              <a:rPr sz="2000" b="1">
-                <a:solidFill>
-                  <a:srgbClr val="1E293B"/>
-                </a:solidFill>
-                <a:latin typeface="Calibri"/>
-              </a:rPr>
-              <a:t>D. chỉ dùng được cho cây non</a:t>
+              <a:t>SGV tr.17: chất thải ứ đọng làm rối loạn trao đổi chất giữa cơ thể và môi trường.</a:t>
             </a:r>
           </a:p>
         </p:txBody>
@@ -8736,14 +8739,14 @@
         </p:nvSpPr>
         <p:spPr>
           <a:xfrm>
-            <a:off x="10463479" y="457200"/>
-            <a:ext cx="1179576" cy="457200"/>
+            <a:off x="10701223" y="457200"/>
+            <a:ext cx="941832" cy="457200"/>
           </a:xfrm>
           <a:prstGeom prst="roundRect">
             <a:avLst/>
           </a:prstGeom>
           <a:solidFill>
-            <a:srgbClr val="991B1B"/>
+            <a:srgbClr val="1E40AF"/>
           </a:solidFill>
           <a:ln>
             <a:noFill/>
@@ -8776,7 +8779,7 @@
                 </a:solidFill>
                 <a:latin typeface="Arial"/>
               </a:rPr>
-              <a:t>LỜI GIẢI</a:t>
+              <a:t>ĐỀ BÀI</a:t>
             </a:r>
           </a:p>
         </p:txBody>
@@ -8790,7 +8793,7 @@
         <p:spPr>
           <a:xfrm>
             <a:off x="731520" y="274320"/>
-            <a:ext cx="9793224" cy="868680"/>
+            <a:ext cx="10030968" cy="868680"/>
           </a:xfrm>
           <a:prstGeom prst="rect">
             <a:avLst/>
@@ -8810,7 +8813,7 @@
                 </a:solidFill>
                 <a:latin typeface="Arial"/>
               </a:rPr>
-              <a:t>ĐỀ MINH HỌA · PHẦN I · CÂU 10</a:t>
+              <a:t>ĐỀ MINH HỌA · PHẦN I · CÂU 9</a:t>
             </a:r>
           </a:p>
         </p:txBody>
@@ -8916,45 +8919,83 @@
           </a:bodyPr>
           <a:lstStyle/>
           <a:p>
-            <a:pPr algn="l" marL="365760" indent="-365760">
+            <a:pPr algn="l">
               <a:spcAft>
                 <a:spcPts val="800"/>
               </a:spcAft>
-              <a:buClr>
-                <a:srgbClr val="1E40AF"/>
-              </a:buClr>
-              <a:buFont typeface="Arial"/>
-              <a:buChar char="•"/>
             </a:pPr>
             <a:r>
-              <a:rPr sz="2000">
+              <a:rPr sz="2000" b="1">
                 <a:solidFill>
                   <a:srgbClr val="1E293B"/>
                 </a:solidFill>
                 <a:latin typeface="Calibri"/>
               </a:rPr>
-              <a:t>Đáp án A.</a:t>
-            </a:r>
-          </a:p>
-          <a:p>
-            <a:pPr algn="l" marL="365760" indent="-365760">
+              <a:t>Động lực nào sau đây không phải động lực của dòng mạch gỗ?</a:t>
+            </a:r>
+          </a:p>
+          <a:p>
+            <a:pPr algn="l">
               <a:spcAft>
                 <a:spcPts val="800"/>
               </a:spcAft>
-              <a:buClr>
-                <a:srgbClr val="1E40AF"/>
-              </a:buClr>
-              <a:buFont typeface="Arial"/>
-              <a:buChar char="•"/>
             </a:pPr>
             <a:r>
-              <a:rPr sz="2000">
+              <a:rPr sz="2000" b="1">
                 <a:solidFill>
                   <a:srgbClr val="1E293B"/>
                 </a:solidFill>
                 <a:latin typeface="Calibri"/>
               </a:rPr>
-              <a:t>Luyện tập và vận dụng câu 3.</a:t>
+              <a:t>A. Lực liên kết giữa các phân tử nước và lực bám vào thành mạch</a:t>
+            </a:r>
+          </a:p>
+          <a:p>
+            <a:pPr algn="l">
+              <a:spcAft>
+                <a:spcPts val="800"/>
+              </a:spcAft>
+            </a:pPr>
+            <a:r>
+              <a:rPr sz="2000" b="1">
+                <a:solidFill>
+                  <a:srgbClr val="1E293B"/>
+                </a:solidFill>
+                <a:latin typeface="Calibri"/>
+              </a:rPr>
+              <a:t>B. Lực đẩy của áp suất rễ</a:t>
+            </a:r>
+          </a:p>
+          <a:p>
+            <a:pPr algn="l">
+              <a:spcAft>
+                <a:spcPts val="800"/>
+              </a:spcAft>
+            </a:pPr>
+            <a:r>
+              <a:rPr sz="2000" b="1">
+                <a:solidFill>
+                  <a:srgbClr val="1E293B"/>
+                </a:solidFill>
+                <a:latin typeface="Calibri"/>
+              </a:rPr>
+              <a:t>C. Sự chênh lệch nồng độ sucrose giữa cơ quan nguồn và cơ quan đích</a:t>
+            </a:r>
+          </a:p>
+          <a:p>
+            <a:pPr algn="l">
+              <a:spcAft>
+                <a:spcPts val="800"/>
+              </a:spcAft>
+            </a:pPr>
+            <a:r>
+              <a:rPr sz="2000" b="1">
+                <a:solidFill>
+                  <a:srgbClr val="1E293B"/>
+                </a:solidFill>
+                <a:latin typeface="Calibri"/>
+              </a:rPr>
+              <a:t>D. Lực kéo do thoát hơi nước ở lá</a:t>
             </a:r>
           </a:p>
         </p:txBody>
@@ -9037,14 +9078,14 @@
         </p:nvSpPr>
         <p:spPr>
           <a:xfrm>
-            <a:off x="10701223" y="457200"/>
-            <a:ext cx="941832" cy="457200"/>
+            <a:off x="10463479" y="457200"/>
+            <a:ext cx="1179576" cy="457200"/>
           </a:xfrm>
           <a:prstGeom prst="roundRect">
             <a:avLst/>
           </a:prstGeom>
           <a:solidFill>
-            <a:srgbClr val="1E40AF"/>
+            <a:srgbClr val="991B1B"/>
           </a:solidFill>
           <a:ln>
             <a:noFill/>
@@ -9077,7 +9118,7 @@
                 </a:solidFill>
                 <a:latin typeface="Arial"/>
               </a:rPr>
-              <a:t>ĐỀ BÀI</a:t>
+              <a:t>LỜI GIẢI</a:t>
             </a:r>
           </a:p>
         </p:txBody>
@@ -9091,7 +9132,7 @@
         <p:spPr>
           <a:xfrm>
             <a:off x="731520" y="274320"/>
-            <a:ext cx="10030968" cy="868680"/>
+            <a:ext cx="9793224" cy="868680"/>
           </a:xfrm>
           <a:prstGeom prst="rect">
             <a:avLst/>
@@ -9111,7 +9152,7 @@
                 </a:solidFill>
                 <a:latin typeface="Arial"/>
               </a:rPr>
-              <a:t>ĐỀ MINH HỌA · PHẦN I · CÂU 11</a:t>
+              <a:t>ĐỀ MINH HỌA · PHẦN I · CÂU 9</a:t>
             </a:r>
           </a:p>
         </p:txBody>
@@ -9217,83 +9258,45 @@
           </a:bodyPr>
           <a:lstStyle/>
           <a:p>
-            <a:pPr algn="l">
+            <a:pPr algn="l" marL="365760" indent="-365760">
               <a:spcAft>
                 <a:spcPts val="800"/>
               </a:spcAft>
+              <a:buClr>
+                <a:srgbClr val="1E40AF"/>
+              </a:buClr>
+              <a:buFont typeface="Arial"/>
+              <a:buChar char="•"/>
             </a:pPr>
             <a:r>
-              <a:rPr sz="2000" b="1">
+              <a:rPr sz="2000">
                 <a:solidFill>
                   <a:srgbClr val="1E293B"/>
                 </a:solidFill>
                 <a:latin typeface="Calibri"/>
               </a:rPr>
-              <a:t>Để một bông hoa hồng trắng có cánh mang 2 – 3 màu, cách làm hợp lí là</a:t>
-            </a:r>
-          </a:p>
-          <a:p>
-            <a:pPr algn="l">
+              <a:t>Đáp án C.</a:t>
+            </a:r>
+          </a:p>
+          <a:p>
+            <a:pPr algn="l" marL="365760" indent="-365760">
               <a:spcAft>
                 <a:spcPts val="800"/>
               </a:spcAft>
+              <a:buClr>
+                <a:srgbClr val="1E40AF"/>
+              </a:buClr>
+              <a:buFont typeface="Arial"/>
+              <a:buChar char="•"/>
             </a:pPr>
             <a:r>
-              <a:rPr sz="2000" b="1">
+              <a:rPr sz="2000">
                 <a:solidFill>
                   <a:srgbClr val="1E293B"/>
                 </a:solidFill>
                 <a:latin typeface="Calibri"/>
               </a:rPr>
-              <a:t>A. để hoa trong tủ lạnh tối</a:t>
-            </a:r>
-          </a:p>
-          <a:p>
-            <a:pPr algn="l">
-              <a:spcAft>
-                <a:spcPts val="800"/>
-              </a:spcAft>
-            </a:pPr>
-            <a:r>
-              <a:rPr sz="2000" b="1">
-                <a:solidFill>
-                  <a:srgbClr val="1E293B"/>
-                </a:solidFill>
-                <a:latin typeface="Calibri"/>
-              </a:rPr>
-              <a:t>B. phun màu lên cánh hoa</a:t>
-            </a:r>
-          </a:p>
-          <a:p>
-            <a:pPr algn="l">
-              <a:spcAft>
-                <a:spcPts val="800"/>
-              </a:spcAft>
-            </a:pPr>
-            <a:r>
-              <a:rPr sz="2000" b="1">
-                <a:solidFill>
-                  <a:srgbClr val="1E293B"/>
-                </a:solidFill>
-                <a:latin typeface="Calibri"/>
-              </a:rPr>
-              <a:t>C. cắm cả cành vào hỗn hợp nhiều màu</a:t>
-            </a:r>
-          </a:p>
-          <a:p>
-            <a:pPr algn="l">
-              <a:spcAft>
-                <a:spcPts val="800"/>
-              </a:spcAft>
-            </a:pPr>
-            <a:r>
-              <a:rPr sz="2000" b="1">
-                <a:solidFill>
-                  <a:srgbClr val="1E293B"/>
-                </a:solidFill>
-                <a:latin typeface="Calibri"/>
-              </a:rPr>
-              <a:t>D. chẻ dọc cuống thành 2 – 3 nhánh, mỗi nhánh cắm vào một dung dịch màu khác nhau</a:t>
+              <a:t>Chênh lệch nồng độ là động lực của dòng mạch rây.</a:t>
             </a:r>
           </a:p>
         </p:txBody>
@@ -9376,14 +9379,14 @@
         </p:nvSpPr>
         <p:spPr>
           <a:xfrm>
-            <a:off x="10463479" y="457200"/>
-            <a:ext cx="1179576" cy="457200"/>
+            <a:off x="10701223" y="457200"/>
+            <a:ext cx="941832" cy="457200"/>
           </a:xfrm>
           <a:prstGeom prst="roundRect">
             <a:avLst/>
           </a:prstGeom>
           <a:solidFill>
-            <a:srgbClr val="991B1B"/>
+            <a:srgbClr val="1E40AF"/>
           </a:solidFill>
           <a:ln>
             <a:noFill/>
@@ -9416,7 +9419,7 @@
                 </a:solidFill>
                 <a:latin typeface="Arial"/>
               </a:rPr>
-              <a:t>LỜI GIẢI</a:t>
+              <a:t>ĐỀ BÀI</a:t>
             </a:r>
           </a:p>
         </p:txBody>
@@ -9430,7 +9433,7 @@
         <p:spPr>
           <a:xfrm>
             <a:off x="731520" y="274320"/>
-            <a:ext cx="9793224" cy="868680"/>
+            <a:ext cx="10030968" cy="868680"/>
           </a:xfrm>
           <a:prstGeom prst="rect">
             <a:avLst/>
@@ -9450,7 +9453,7 @@
                 </a:solidFill>
                 <a:latin typeface="Arial"/>
               </a:rPr>
-              <a:t>ĐỀ MINH HỌA · PHẦN I · CÂU 11</a:t>
+              <a:t>ĐỀ MINH HỌA · PHẦN I · CÂU 10</a:t>
             </a:r>
           </a:p>
         </p:txBody>
@@ -9556,45 +9559,83 @@
           </a:bodyPr>
           <a:lstStyle/>
           <a:p>
-            <a:pPr algn="l" marL="365760" indent="-365760">
+            <a:pPr algn="l">
               <a:spcAft>
                 <a:spcPts val="800"/>
               </a:spcAft>
-              <a:buClr>
-                <a:srgbClr val="1E40AF"/>
-              </a:buClr>
-              <a:buFont typeface="Arial"/>
-              <a:buChar char="•"/>
             </a:pPr>
             <a:r>
-              <a:rPr sz="2000">
+              <a:rPr sz="2000" b="1">
                 <a:solidFill>
                   <a:srgbClr val="1E293B"/>
                 </a:solidFill>
                 <a:latin typeface="Calibri"/>
               </a:rPr>
-              <a:t>Đáp án D.</a:t>
-            </a:r>
-          </a:p>
-          <a:p>
-            <a:pPr algn="l" marL="365760" indent="-365760">
+              <a:t>Trong thí nghiệm chứng minh hấp thụ nước ở rễ, nhỏ một giọt dầu vào ống nghiệm nhằm</a:t>
+            </a:r>
+          </a:p>
+          <a:p>
+            <a:pPr algn="l">
               <a:spcAft>
                 <a:spcPts val="800"/>
               </a:spcAft>
-              <a:buClr>
-                <a:srgbClr val="1E40AF"/>
-              </a:buClr>
-              <a:buFont typeface="Arial"/>
-              <a:buChar char="•"/>
             </a:pPr>
             <a:r>
-              <a:rPr sz="2000">
+              <a:rPr sz="2000" b="1">
                 <a:solidFill>
                   <a:srgbClr val="1E293B"/>
                 </a:solidFill>
                 <a:latin typeface="Calibri"/>
               </a:rPr>
-              <a:t>Mỗi nhánh mạch gỗ dẫn màu lên một phần cánh.</a:t>
+              <a:t>A. cung cấp dinh dưỡng cho cây</a:t>
+            </a:r>
+          </a:p>
+          <a:p>
+            <a:pPr algn="l">
+              <a:spcAft>
+                <a:spcPts val="800"/>
+              </a:spcAft>
+            </a:pPr>
+            <a:r>
+              <a:rPr sz="2000" b="1">
+                <a:solidFill>
+                  <a:srgbClr val="1E293B"/>
+                </a:solidFill>
+                <a:latin typeface="Calibri"/>
+              </a:rPr>
+              <a:t>B. tránh nước bốc hơi trực tiếp từ bề mặt ống</a:t>
+            </a:r>
+          </a:p>
+          <a:p>
+            <a:pPr algn="l">
+              <a:spcAft>
+                <a:spcPts val="800"/>
+              </a:spcAft>
+            </a:pPr>
+            <a:r>
+              <a:rPr sz="2000" b="1">
+                <a:solidFill>
+                  <a:srgbClr val="1E293B"/>
+                </a:solidFill>
+                <a:latin typeface="Calibri"/>
+              </a:rPr>
+              <a:t>C. nhuộm màu nước</a:t>
+            </a:r>
+          </a:p>
+          <a:p>
+            <a:pPr algn="l">
+              <a:spcAft>
+                <a:spcPts val="800"/>
+              </a:spcAft>
+            </a:pPr>
+            <a:r>
+              <a:rPr sz="2000" b="1">
+                <a:solidFill>
+                  <a:srgbClr val="1E293B"/>
+                </a:solidFill>
+                <a:latin typeface="Calibri"/>
+              </a:rPr>
+              <a:t>D. diệt vi khuẩn</a:t>
             </a:r>
           </a:p>
         </p:txBody>
@@ -9677,14 +9718,14 @@
         </p:nvSpPr>
         <p:spPr>
           <a:xfrm>
-            <a:off x="10701223" y="457200"/>
-            <a:ext cx="941832" cy="457200"/>
+            <a:off x="10463479" y="457200"/>
+            <a:ext cx="1179576" cy="457200"/>
           </a:xfrm>
           <a:prstGeom prst="roundRect">
             <a:avLst/>
           </a:prstGeom>
           <a:solidFill>
-            <a:srgbClr val="1E40AF"/>
+            <a:srgbClr val="991B1B"/>
           </a:solidFill>
           <a:ln>
             <a:noFill/>
@@ -9717,7 +9758,7 @@
                 </a:solidFill>
                 <a:latin typeface="Arial"/>
               </a:rPr>
-              <a:t>ĐỀ BÀI</a:t>
+              <a:t>LỜI GIẢI</a:t>
             </a:r>
           </a:p>
         </p:txBody>
@@ -9731,7 +9772,7 @@
         <p:spPr>
           <a:xfrm>
             <a:off x="731520" y="274320"/>
-            <a:ext cx="10030968" cy="868680"/>
+            <a:ext cx="9793224" cy="868680"/>
           </a:xfrm>
           <a:prstGeom prst="rect">
             <a:avLst/>
@@ -9751,7 +9792,7 @@
                 </a:solidFill>
                 <a:latin typeface="Arial"/>
               </a:rPr>
-              <a:t>ĐỀ MINH HỌA · PHẦN I · CÂU 12</a:t>
+              <a:t>ĐỀ MINH HỌA · PHẦN I · CÂU 10</a:t>
             </a:r>
           </a:p>
         </p:txBody>
@@ -9857,83 +9898,45 @@
           </a:bodyPr>
           <a:lstStyle/>
           <a:p>
-            <a:pPr algn="l">
+            <a:pPr algn="l" marL="365760" indent="-365760">
               <a:spcAft>
                 <a:spcPts val="800"/>
               </a:spcAft>
+              <a:buClr>
+                <a:srgbClr val="1E40AF"/>
+              </a:buClr>
+              <a:buFont typeface="Arial"/>
+              <a:buChar char="•"/>
             </a:pPr>
             <a:r>
-              <a:rPr sz="2000" b="1">
+              <a:rPr sz="2000">
                 <a:solidFill>
                   <a:srgbClr val="1E293B"/>
                 </a:solidFill>
                 <a:latin typeface="Calibri"/>
               </a:rPr>
-              <a:t>Quang hợp ở thực vật diễn ra tại bào quan</a:t>
-            </a:r>
-          </a:p>
-          <a:p>
-            <a:pPr algn="l">
+              <a:t>Đáp án B.</a:t>
+            </a:r>
+          </a:p>
+          <a:p>
+            <a:pPr algn="l" marL="365760" indent="-365760">
               <a:spcAft>
                 <a:spcPts val="800"/>
               </a:spcAft>
+              <a:buClr>
+                <a:srgbClr val="1E40AF"/>
+              </a:buClr>
+              <a:buFont typeface="Arial"/>
+              <a:buChar char="•"/>
             </a:pPr>
             <a:r>
-              <a:rPr sz="2000" b="1">
+              <a:rPr sz="2000">
                 <a:solidFill>
                   <a:srgbClr val="1E293B"/>
                 </a:solidFill>
                 <a:latin typeface="Calibri"/>
               </a:rPr>
-              <a:t>A. ti thể</a:t>
-            </a:r>
-          </a:p>
-          <a:p>
-            <a:pPr algn="l">
-              <a:spcAft>
-                <a:spcPts val="800"/>
-              </a:spcAft>
-            </a:pPr>
-            <a:r>
-              <a:rPr sz="2000" b="1">
-                <a:solidFill>
-                  <a:srgbClr val="1E293B"/>
-                </a:solidFill>
-                <a:latin typeface="Calibri"/>
-              </a:rPr>
-              <a:t>B. lục lạp</a:t>
-            </a:r>
-          </a:p>
-          <a:p>
-            <a:pPr algn="l">
-              <a:spcAft>
-                <a:spcPts val="800"/>
-              </a:spcAft>
-            </a:pPr>
-            <a:r>
-              <a:rPr sz="2000" b="1">
-                <a:solidFill>
-                  <a:srgbClr val="1E293B"/>
-                </a:solidFill>
-                <a:latin typeface="Calibri"/>
-              </a:rPr>
-              <a:t>C. ribosome</a:t>
-            </a:r>
-          </a:p>
-          <a:p>
-            <a:pPr algn="l">
-              <a:spcAft>
-                <a:spcPts val="800"/>
-              </a:spcAft>
-            </a:pPr>
-            <a:r>
-              <a:rPr sz="2000" b="1">
-                <a:solidFill>
-                  <a:srgbClr val="1E293B"/>
-                </a:solidFill>
-                <a:latin typeface="Calibri"/>
-              </a:rPr>
-              <a:t>D. không bào</a:t>
+              <a:t>SGK H 3.1.</a:t>
             </a:r>
           </a:p>
         </p:txBody>
@@ -10276,14 +10279,14 @@
         </p:nvSpPr>
         <p:spPr>
           <a:xfrm>
-            <a:off x="10463479" y="457200"/>
-            <a:ext cx="1179576" cy="457200"/>
+            <a:off x="10701223" y="457200"/>
+            <a:ext cx="941832" cy="457200"/>
           </a:xfrm>
           <a:prstGeom prst="roundRect">
             <a:avLst/>
           </a:prstGeom>
           <a:solidFill>
-            <a:srgbClr val="991B1B"/>
+            <a:srgbClr val="1E40AF"/>
           </a:solidFill>
           <a:ln>
             <a:noFill/>
@@ -10316,7 +10319,7 @@
                 </a:solidFill>
                 <a:latin typeface="Arial"/>
               </a:rPr>
-              <a:t>LỜI GIẢI</a:t>
+              <a:t>ĐỀ BÀI</a:t>
             </a:r>
           </a:p>
         </p:txBody>
@@ -10330,7 +10333,7 @@
         <p:spPr>
           <a:xfrm>
             <a:off x="731520" y="274320"/>
-            <a:ext cx="9793224" cy="868680"/>
+            <a:ext cx="10030968" cy="868680"/>
           </a:xfrm>
           <a:prstGeom prst="rect">
             <a:avLst/>
@@ -10350,7 +10353,7 @@
                 </a:solidFill>
                 <a:latin typeface="Arial"/>
               </a:rPr>
-              <a:t>ĐỀ MINH HỌA · PHẦN I · CÂU 12</a:t>
+              <a:t>ĐỀ MINH HỌA · PHẦN I · CÂU 11</a:t>
             </a:r>
           </a:p>
         </p:txBody>
@@ -10456,45 +10459,83 @@
           </a:bodyPr>
           <a:lstStyle/>
           <a:p>
-            <a:pPr algn="l" marL="365760" indent="-365760">
+            <a:pPr algn="l">
               <a:spcAft>
                 <a:spcPts val="800"/>
               </a:spcAft>
-              <a:buClr>
-                <a:srgbClr val="1E40AF"/>
-              </a:buClr>
-              <a:buFont typeface="Arial"/>
-              <a:buChar char="•"/>
             </a:pPr>
             <a:r>
-              <a:rPr sz="2000">
+              <a:rPr sz="2000" b="1">
                 <a:solidFill>
                   <a:srgbClr val="1E293B"/>
                 </a:solidFill>
                 <a:latin typeface="Calibri"/>
               </a:rPr>
-              <a:t>Đáp án B.</a:t>
-            </a:r>
-          </a:p>
-          <a:p>
-            <a:pPr algn="l" marL="365760" indent="-365760">
+              <a:t>Nhóm thực vật nào sau đây là thực vật C₄?</a:t>
+            </a:r>
+          </a:p>
+          <a:p>
+            <a:pPr algn="l">
               <a:spcAft>
                 <a:spcPts val="800"/>
               </a:spcAft>
-              <a:buClr>
-                <a:srgbClr val="1E40AF"/>
-              </a:buClr>
-              <a:buFont typeface="Arial"/>
-              <a:buChar char="•"/>
             </a:pPr>
             <a:r>
-              <a:rPr sz="2000">
+              <a:rPr sz="2000" b="1">
                 <a:solidFill>
                   <a:srgbClr val="1E293B"/>
                 </a:solidFill>
                 <a:latin typeface="Calibri"/>
               </a:rPr>
-              <a:t>SGK mục I.1.</a:t>
+              <a:t>A. Lúa, khoai, sắn</a:t>
+            </a:r>
+          </a:p>
+          <a:p>
+            <a:pPr algn="l">
+              <a:spcAft>
+                <a:spcPts val="800"/>
+              </a:spcAft>
+            </a:pPr>
+            <a:r>
+              <a:rPr sz="2000" b="1">
+                <a:solidFill>
+                  <a:srgbClr val="1E293B"/>
+                </a:solidFill>
+                <a:latin typeface="Calibri"/>
+              </a:rPr>
+              <a:t>B. Mía, ngô, rau dền</a:t>
+            </a:r>
+          </a:p>
+          <a:p>
+            <a:pPr algn="l">
+              <a:spcAft>
+                <a:spcPts val="800"/>
+              </a:spcAft>
+            </a:pPr>
+            <a:r>
+              <a:rPr sz="2000" b="1">
+                <a:solidFill>
+                  <a:srgbClr val="1E293B"/>
+                </a:solidFill>
+                <a:latin typeface="Calibri"/>
+              </a:rPr>
+              <a:t>C. Dứa, xương rồng, thuốc bỏng</a:t>
+            </a:r>
+          </a:p>
+          <a:p>
+            <a:pPr algn="l">
+              <a:spcAft>
+                <a:spcPts val="800"/>
+              </a:spcAft>
+            </a:pPr>
+            <a:r>
+              <a:rPr sz="2000" b="1">
+                <a:solidFill>
+                  <a:srgbClr val="1E293B"/>
+                </a:solidFill>
+                <a:latin typeface="Calibri"/>
+              </a:rPr>
+              <a:t>D. Đậu, cà chua, rau cải</a:t>
             </a:r>
           </a:p>
         </p:txBody>
@@ -10577,14 +10618,14 @@
         </p:nvSpPr>
         <p:spPr>
           <a:xfrm>
-            <a:off x="10701223" y="457200"/>
-            <a:ext cx="941832" cy="457200"/>
+            <a:off x="10463479" y="457200"/>
+            <a:ext cx="1179576" cy="457200"/>
           </a:xfrm>
           <a:prstGeom prst="roundRect">
             <a:avLst/>
           </a:prstGeom>
           <a:solidFill>
-            <a:srgbClr val="1E40AF"/>
+            <a:srgbClr val="991B1B"/>
           </a:solidFill>
           <a:ln>
             <a:noFill/>
@@ -10617,7 +10658,7 @@
                 </a:solidFill>
                 <a:latin typeface="Arial"/>
               </a:rPr>
-              <a:t>ĐỀ BÀI</a:t>
+              <a:t>LỜI GIẢI</a:t>
             </a:r>
           </a:p>
         </p:txBody>
@@ -10631,7 +10672,7 @@
         <p:spPr>
           <a:xfrm>
             <a:off x="731520" y="274320"/>
-            <a:ext cx="10030968" cy="868680"/>
+            <a:ext cx="9793224" cy="868680"/>
           </a:xfrm>
           <a:prstGeom prst="rect">
             <a:avLst/>
@@ -10651,7 +10692,7 @@
                 </a:solidFill>
                 <a:latin typeface="Arial"/>
               </a:rPr>
-              <a:t>ĐỀ MINH HỌA · PHẦN I · CÂU 13</a:t>
+              <a:t>ĐỀ MINH HỌA · PHẦN I · CÂU 11</a:t>
             </a:r>
           </a:p>
         </p:txBody>
@@ -10757,83 +10798,45 @@
           </a:bodyPr>
           <a:lstStyle/>
           <a:p>
-            <a:pPr algn="l">
+            <a:pPr algn="l" marL="365760" indent="-365760">
               <a:spcAft>
                 <a:spcPts val="800"/>
               </a:spcAft>
+              <a:buClr>
+                <a:srgbClr val="1E40AF"/>
+              </a:buClr>
+              <a:buFont typeface="Arial"/>
+              <a:buChar char="•"/>
             </a:pPr>
             <a:r>
-              <a:rPr sz="2000" b="1">
+              <a:rPr sz="2000">
                 <a:solidFill>
                   <a:srgbClr val="1E293B"/>
                 </a:solidFill>
                 <a:latin typeface="Calibri"/>
               </a:rPr>
-              <a:t>Quá trình trao đổi chất và chuyển hoá năng lượng ở động vật được điều hoà bởi</a:t>
-            </a:r>
-          </a:p>
-          <a:p>
-            <a:pPr algn="l">
+              <a:t>Đáp án B.</a:t>
+            </a:r>
+          </a:p>
+          <a:p>
+            <a:pPr algn="l" marL="365760" indent="-365760">
               <a:spcAft>
                 <a:spcPts val="800"/>
               </a:spcAft>
+              <a:buClr>
+                <a:srgbClr val="1E40AF"/>
+              </a:buClr>
+              <a:buFont typeface="Arial"/>
+              <a:buChar char="•"/>
             </a:pPr>
             <a:r>
-              <a:rPr sz="2000" b="1">
+              <a:rPr sz="2000">
                 <a:solidFill>
                   <a:srgbClr val="1E293B"/>
                 </a:solidFill>
                 <a:latin typeface="Calibri"/>
               </a:rPr>
-              <a:t>A. hormone và hệ thần kinh</a:t>
-            </a:r>
-          </a:p>
-          <a:p>
-            <a:pPr algn="l">
-              <a:spcAft>
-                <a:spcPts val="800"/>
-              </a:spcAft>
-            </a:pPr>
-            <a:r>
-              <a:rPr sz="2000" b="1">
-                <a:solidFill>
-                  <a:srgbClr val="1E293B"/>
-                </a:solidFill>
-                <a:latin typeface="Calibri"/>
-              </a:rPr>
-              <a:t>B. chỉ hormone</a:t>
-            </a:r>
-          </a:p>
-          <a:p>
-            <a:pPr algn="l">
-              <a:spcAft>
-                <a:spcPts val="800"/>
-              </a:spcAft>
-            </a:pPr>
-            <a:r>
-              <a:rPr sz="2000" b="1">
-                <a:solidFill>
-                  <a:srgbClr val="1E293B"/>
-                </a:solidFill>
-                <a:latin typeface="Calibri"/>
-              </a:rPr>
-              <a:t>C. chỉ enzyme tiêu hoá</a:t>
-            </a:r>
-          </a:p>
-          <a:p>
-            <a:pPr algn="l">
-              <a:spcAft>
-                <a:spcPts val="800"/>
-              </a:spcAft>
-            </a:pPr>
-            <a:r>
-              <a:rPr sz="2000" b="1">
-                <a:solidFill>
-                  <a:srgbClr val="1E293B"/>
-                </a:solidFill>
-                <a:latin typeface="Calibri"/>
-              </a:rPr>
-              <a:t>D. ánh sáng mặt trời</a:t>
+              <a:t>SGK mục II.2b.</a:t>
             </a:r>
           </a:p>
         </p:txBody>
@@ -10916,14 +10919,14 @@
         </p:nvSpPr>
         <p:spPr>
           <a:xfrm>
-            <a:off x="10463479" y="457200"/>
-            <a:ext cx="1179576" cy="457200"/>
+            <a:off x="10701223" y="457200"/>
+            <a:ext cx="941832" cy="457200"/>
           </a:xfrm>
           <a:prstGeom prst="roundRect">
             <a:avLst/>
           </a:prstGeom>
           <a:solidFill>
-            <a:srgbClr val="991B1B"/>
+            <a:srgbClr val="1E40AF"/>
           </a:solidFill>
           <a:ln>
             <a:noFill/>
@@ -10956,7 +10959,7 @@
                 </a:solidFill>
                 <a:latin typeface="Arial"/>
               </a:rPr>
-              <a:t>LỜI GIẢI</a:t>
+              <a:t>ĐỀ BÀI</a:t>
             </a:r>
           </a:p>
         </p:txBody>
@@ -10970,7 +10973,7 @@
         <p:spPr>
           <a:xfrm>
             <a:off x="731520" y="274320"/>
-            <a:ext cx="9793224" cy="868680"/>
+            <a:ext cx="10030968" cy="868680"/>
           </a:xfrm>
           <a:prstGeom prst="rect">
             <a:avLst/>
@@ -10990,7 +10993,7 @@
                 </a:solidFill>
                 <a:latin typeface="Arial"/>
               </a:rPr>
-              <a:t>ĐỀ MINH HỌA · PHẦN I · CÂU 13</a:t>
+              <a:t>ĐỀ MINH HỌA · PHẦN I · CÂU 12</a:t>
             </a:r>
           </a:p>
         </p:txBody>
@@ -11096,45 +11099,83 @@
           </a:bodyPr>
           <a:lstStyle/>
           <a:p>
-            <a:pPr algn="l" marL="365760" indent="-365760">
+            <a:pPr algn="l">
               <a:spcAft>
                 <a:spcPts val="800"/>
               </a:spcAft>
-              <a:buClr>
-                <a:srgbClr val="1E40AF"/>
-              </a:buClr>
-              <a:buFont typeface="Arial"/>
-              <a:buChar char="•"/>
             </a:pPr>
             <a:r>
-              <a:rPr sz="2000">
+              <a:rPr sz="2000" b="1">
                 <a:solidFill>
                   <a:srgbClr val="1E293B"/>
                 </a:solidFill>
                 <a:latin typeface="Calibri"/>
               </a:rPr>
-              <a:t>Đáp án A.</a:t>
-            </a:r>
-          </a:p>
-          <a:p>
-            <a:pPr algn="l" marL="365760" indent="-365760">
+              <a:t>Trong thí nghiệm với cành rong đuôi chó, bọt khí thoát ra ở cốc để ngoài sáng là khí</a:t>
+            </a:r>
+          </a:p>
+          <a:p>
+            <a:pPr algn="l">
               <a:spcAft>
                 <a:spcPts val="800"/>
               </a:spcAft>
-              <a:buClr>
-                <a:srgbClr val="1E40AF"/>
-              </a:buClr>
-              <a:buFont typeface="Arial"/>
-              <a:buChar char="•"/>
             </a:pPr>
             <a:r>
-              <a:rPr sz="2000">
+              <a:rPr sz="2000" b="1">
                 <a:solidFill>
                   <a:srgbClr val="1E293B"/>
                 </a:solidFill>
                 <a:latin typeface="Calibri"/>
               </a:rPr>
-              <a:t>SGK mục II.4: điều hoà thông qua hormone ở thực vật, hormone và hệ thần kinh ở động vật.</a:t>
+              <a:t>A. hơi nước</a:t>
+            </a:r>
+          </a:p>
+          <a:p>
+            <a:pPr algn="l">
+              <a:spcAft>
+                <a:spcPts val="800"/>
+              </a:spcAft>
+            </a:pPr>
+            <a:r>
+              <a:rPr sz="2000" b="1">
+                <a:solidFill>
+                  <a:srgbClr val="1E293B"/>
+                </a:solidFill>
+                <a:latin typeface="Calibri"/>
+              </a:rPr>
+              <a:t>B. carbon dioxide</a:t>
+            </a:r>
+          </a:p>
+          <a:p>
+            <a:pPr algn="l">
+              <a:spcAft>
+                <a:spcPts val="800"/>
+              </a:spcAft>
+            </a:pPr>
+            <a:r>
+              <a:rPr sz="2000" b="1">
+                <a:solidFill>
+                  <a:srgbClr val="1E293B"/>
+                </a:solidFill>
+                <a:latin typeface="Calibri"/>
+              </a:rPr>
+              <a:t>C. nitrogen</a:t>
+            </a:r>
+          </a:p>
+          <a:p>
+            <a:pPr algn="l">
+              <a:spcAft>
+                <a:spcPts val="800"/>
+              </a:spcAft>
+            </a:pPr>
+            <a:r>
+              <a:rPr sz="2000" b="1">
+                <a:solidFill>
+                  <a:srgbClr val="1E293B"/>
+                </a:solidFill>
+                <a:latin typeface="Calibri"/>
+              </a:rPr>
+              <a:t>D. oxygen</a:t>
             </a:r>
           </a:p>
         </p:txBody>
@@ -11217,14 +11258,14 @@
         </p:nvSpPr>
         <p:spPr>
           <a:xfrm>
-            <a:off x="10701223" y="457200"/>
-            <a:ext cx="941832" cy="457200"/>
+            <a:off x="10463479" y="457200"/>
+            <a:ext cx="1179576" cy="457200"/>
           </a:xfrm>
           <a:prstGeom prst="roundRect">
             <a:avLst/>
           </a:prstGeom>
           <a:solidFill>
-            <a:srgbClr val="1E40AF"/>
+            <a:srgbClr val="991B1B"/>
           </a:solidFill>
           <a:ln>
             <a:noFill/>
@@ -11257,7 +11298,7 @@
                 </a:solidFill>
                 <a:latin typeface="Arial"/>
               </a:rPr>
-              <a:t>ĐỀ BÀI</a:t>
+              <a:t>LỜI GIẢI</a:t>
             </a:r>
           </a:p>
         </p:txBody>
@@ -11271,7 +11312,7 @@
         <p:spPr>
           <a:xfrm>
             <a:off x="731520" y="274320"/>
-            <a:ext cx="10030968" cy="868680"/>
+            <a:ext cx="9793224" cy="868680"/>
           </a:xfrm>
           <a:prstGeom prst="rect">
             <a:avLst/>
@@ -11291,7 +11332,7 @@
                 </a:solidFill>
                 <a:latin typeface="Arial"/>
               </a:rPr>
-              <a:t>ĐỀ MINH HỌA · PHẦN I · CÂU 14</a:t>
+              <a:t>ĐỀ MINH HỌA · PHẦN I · CÂU 12</a:t>
             </a:r>
           </a:p>
         </p:txBody>
@@ -11397,83 +11438,45 @@
           </a:bodyPr>
           <a:lstStyle/>
           <a:p>
-            <a:pPr algn="l">
+            <a:pPr algn="l" marL="365760" indent="-365760">
               <a:spcAft>
                 <a:spcPts val="800"/>
               </a:spcAft>
+              <a:buClr>
+                <a:srgbClr val="1E40AF"/>
+              </a:buClr>
+              <a:buFont typeface="Arial"/>
+              <a:buChar char="•"/>
             </a:pPr>
             <a:r>
-              <a:rPr sz="2000" b="1">
+              <a:rPr sz="2000">
                 <a:solidFill>
                   <a:srgbClr val="1E293B"/>
                 </a:solidFill>
                 <a:latin typeface="Calibri"/>
               </a:rPr>
-              <a:t>Bón quá nhiều phân đạm cho lúa, ngô thường dẫn đến hiện tượng</a:t>
-            </a:r>
-          </a:p>
-          <a:p>
-            <a:pPr algn="l">
+              <a:t>Đáp án D.</a:t>
+            </a:r>
+          </a:p>
+          <a:p>
+            <a:pPr algn="l" marL="365760" indent="-365760">
               <a:spcAft>
                 <a:spcPts val="800"/>
               </a:spcAft>
+              <a:buClr>
+                <a:srgbClr val="1E40AF"/>
+              </a:buClr>
+              <a:buFont typeface="Arial"/>
+              <a:buChar char="•"/>
             </a:pPr>
             <a:r>
-              <a:rPr sz="2000" b="1">
+              <a:rPr sz="2000">
                 <a:solidFill>
                   <a:srgbClr val="1E293B"/>
                 </a:solidFill>
                 <a:latin typeface="Calibri"/>
               </a:rPr>
-              <a:t>A. cây ra hoa sớm</a:t>
-            </a:r>
-          </a:p>
-          <a:p>
-            <a:pPr algn="l">
-              <a:spcAft>
-                <a:spcPts val="800"/>
-              </a:spcAft>
-            </a:pPr>
-            <a:r>
-              <a:rPr sz="2000" b="1">
-                <a:solidFill>
-                  <a:srgbClr val="1E293B"/>
-                </a:solidFill>
-                <a:latin typeface="Calibri"/>
-              </a:rPr>
-              <a:t>B. lá vàng ở lá non</a:t>
-            </a:r>
-          </a:p>
-          <a:p>
-            <a:pPr algn="l">
-              <a:spcAft>
-                <a:spcPts val="800"/>
-              </a:spcAft>
-            </a:pPr>
-            <a:r>
-              <a:rPr sz="2000" b="1">
-                <a:solidFill>
-                  <a:srgbClr val="1E293B"/>
-                </a:solidFill>
-                <a:latin typeface="Calibri"/>
-              </a:rPr>
-              <a:t>C. rễ phát triển quá mạnh</a:t>
-            </a:r>
-          </a:p>
-          <a:p>
-            <a:pPr algn="l">
-              <a:spcAft>
-                <a:spcPts val="800"/>
-              </a:spcAft>
-            </a:pPr>
-            <a:r>
-              <a:rPr sz="2000" b="1">
-                <a:solidFill>
-                  <a:srgbClr val="1E293B"/>
-                </a:solidFill>
-                <a:latin typeface="Calibri"/>
-              </a:rPr>
-              <a:t>D. đổ lốp – bộ lá phát triển mạnh, thân không đủ cứng, cây đổ rạp</a:t>
+              <a:t>Oxygen giải phóng trong quang hợp tạo thành các bọt khí; que đóm còn tàn đỏ bùng cháy.</a:t>
             </a:r>
           </a:p>
         </p:txBody>
@@ -11556,14 +11559,14 @@
         </p:nvSpPr>
         <p:spPr>
           <a:xfrm>
-            <a:off x="10463479" y="457200"/>
-            <a:ext cx="1179576" cy="457200"/>
+            <a:off x="10701223" y="457200"/>
+            <a:ext cx="941832" cy="457200"/>
           </a:xfrm>
           <a:prstGeom prst="roundRect">
             <a:avLst/>
           </a:prstGeom>
           <a:solidFill>
-            <a:srgbClr val="991B1B"/>
+            <a:srgbClr val="1E40AF"/>
           </a:solidFill>
           <a:ln>
             <a:noFill/>
@@ -11596,7 +11599,7 @@
                 </a:solidFill>
                 <a:latin typeface="Arial"/>
               </a:rPr>
-              <a:t>LỜI GIẢI</a:t>
+              <a:t>ĐỀ BÀI</a:t>
             </a:r>
           </a:p>
         </p:txBody>
@@ -11610,7 +11613,7 @@
         <p:spPr>
           <a:xfrm>
             <a:off x="731520" y="274320"/>
-            <a:ext cx="9793224" cy="868680"/>
+            <a:ext cx="10030968" cy="868680"/>
           </a:xfrm>
           <a:prstGeom prst="rect">
             <a:avLst/>
@@ -11630,7 +11633,7 @@
                 </a:solidFill>
                 <a:latin typeface="Arial"/>
               </a:rPr>
-              <a:t>ĐỀ MINH HỌA · PHẦN I · CÂU 14</a:t>
+              <a:t>ĐỀ MINH HỌA · PHẦN I · CÂU 13</a:t>
             </a:r>
           </a:p>
         </p:txBody>
@@ -11736,45 +11739,83 @@
           </a:bodyPr>
           <a:lstStyle/>
           <a:p>
-            <a:pPr algn="l" marL="365760" indent="-365760">
+            <a:pPr algn="l">
               <a:spcAft>
                 <a:spcPts val="800"/>
               </a:spcAft>
-              <a:buClr>
-                <a:srgbClr val="1E40AF"/>
-              </a:buClr>
-              <a:buFont typeface="Arial"/>
-              <a:buChar char="•"/>
             </a:pPr>
             <a:r>
-              <a:rPr sz="2000">
+              <a:rPr sz="2000" b="1">
                 <a:solidFill>
                   <a:srgbClr val="1E293B"/>
                 </a:solidFill>
                 <a:latin typeface="Calibri"/>
               </a:rPr>
-              <a:t>Đáp án D.</a:t>
-            </a:r>
-          </a:p>
-          <a:p>
-            <a:pPr algn="l" marL="365760" indent="-365760">
+              <a:t>Làm đất tơi xốp, vun gốc, chống ngập úng có tác dụng</a:t>
+            </a:r>
+          </a:p>
+          <a:p>
+            <a:pPr algn="l">
               <a:spcAft>
                 <a:spcPts val="800"/>
               </a:spcAft>
-              <a:buClr>
-                <a:srgbClr val="1E40AF"/>
-              </a:buClr>
-              <a:buFont typeface="Arial"/>
-              <a:buChar char="•"/>
             </a:pPr>
             <a:r>
-              <a:rPr sz="2000">
+              <a:rPr sz="2000" b="1">
                 <a:solidFill>
                   <a:srgbClr val="1E293B"/>
                 </a:solidFill>
                 <a:latin typeface="Calibri"/>
               </a:rPr>
-              <a:t>SGV tr.22.</a:t>
+              <a:t>A. cung cấp O₂ cho rễ hô hấp hiếu khí, tạo năng lượng hút nước và khoáng</a:t>
+            </a:r>
+          </a:p>
+          <a:p>
+            <a:pPr algn="l">
+              <a:spcAft>
+                <a:spcPts val="800"/>
+              </a:spcAft>
+            </a:pPr>
+            <a:r>
+              <a:rPr sz="2000" b="1">
+                <a:solidFill>
+                  <a:srgbClr val="1E293B"/>
+                </a:solidFill>
+                <a:latin typeface="Calibri"/>
+              </a:rPr>
+              <a:t>B. tăng lượng CO₂ trong đất</a:t>
+            </a:r>
+          </a:p>
+          <a:p>
+            <a:pPr algn="l">
+              <a:spcAft>
+                <a:spcPts val="800"/>
+              </a:spcAft>
+            </a:pPr>
+            <a:r>
+              <a:rPr sz="2000" b="1">
+                <a:solidFill>
+                  <a:srgbClr val="1E293B"/>
+                </a:solidFill>
+                <a:latin typeface="Calibri"/>
+              </a:rPr>
+              <a:t>C. giảm hô hấp của rễ</a:t>
+            </a:r>
+          </a:p>
+          <a:p>
+            <a:pPr algn="l">
+              <a:spcAft>
+                <a:spcPts val="800"/>
+              </a:spcAft>
+            </a:pPr>
+            <a:r>
+              <a:rPr sz="2000" b="1">
+                <a:solidFill>
+                  <a:srgbClr val="1E293B"/>
+                </a:solidFill>
+                <a:latin typeface="Calibri"/>
+              </a:rPr>
+              <a:t>D. giúp rễ quang hợp</a:t>
             </a:r>
           </a:p>
         </p:txBody>
@@ -11857,14 +11898,14 @@
         </p:nvSpPr>
         <p:spPr>
           <a:xfrm>
-            <a:off x="10701223" y="457200"/>
-            <a:ext cx="941832" cy="457200"/>
+            <a:off x="10463479" y="457200"/>
+            <a:ext cx="1179576" cy="457200"/>
           </a:xfrm>
           <a:prstGeom prst="roundRect">
             <a:avLst/>
           </a:prstGeom>
           <a:solidFill>
-            <a:srgbClr val="1E40AF"/>
+            <a:srgbClr val="991B1B"/>
           </a:solidFill>
           <a:ln>
             <a:noFill/>
@@ -11897,7 +11938,7 @@
                 </a:solidFill>
                 <a:latin typeface="Arial"/>
               </a:rPr>
-              <a:t>ĐỀ BÀI</a:t>
+              <a:t>LỜI GIẢI</a:t>
             </a:r>
           </a:p>
         </p:txBody>
@@ -11911,7 +11952,7 @@
         <p:spPr>
           <a:xfrm>
             <a:off x="731520" y="274320"/>
-            <a:ext cx="10030968" cy="868680"/>
+            <a:ext cx="9793224" cy="868680"/>
           </a:xfrm>
           <a:prstGeom prst="rect">
             <a:avLst/>
@@ -11931,7 +11972,7 @@
                 </a:solidFill>
                 <a:latin typeface="Arial"/>
               </a:rPr>
-              <a:t>ĐỀ MINH HỌA · PHẦN I · CÂU 15</a:t>
+              <a:t>ĐỀ MINH HỌA · PHẦN I · CÂU 13</a:t>
             </a:r>
           </a:p>
         </p:txBody>
@@ -12037,83 +12078,45 @@
           </a:bodyPr>
           <a:lstStyle/>
           <a:p>
-            <a:pPr algn="l">
+            <a:pPr algn="l" marL="365760" indent="-365760">
               <a:spcAft>
                 <a:spcPts val="800"/>
               </a:spcAft>
+              <a:buClr>
+                <a:srgbClr val="1E40AF"/>
+              </a:buClr>
+              <a:buFont typeface="Arial"/>
+              <a:buChar char="•"/>
             </a:pPr>
             <a:r>
-              <a:rPr sz="2000" b="1">
+              <a:rPr sz="2000">
                 <a:solidFill>
                   <a:srgbClr val="1E293B"/>
                 </a:solidFill>
                 <a:latin typeface="Calibri"/>
               </a:rPr>
-              <a:t>Trong hệ thống khí canh, dung dịch dinh dưỡng được cung cấp cho cây dưới dạng</a:t>
-            </a:r>
-          </a:p>
-          <a:p>
-            <a:pPr algn="l">
+              <a:t>Đáp án A.</a:t>
+            </a:r>
+          </a:p>
+          <a:p>
+            <a:pPr algn="l" marL="365760" indent="-365760">
               <a:spcAft>
                 <a:spcPts val="800"/>
               </a:spcAft>
+              <a:buClr>
+                <a:srgbClr val="1E40AF"/>
+              </a:buClr>
+              <a:buFont typeface="Arial"/>
+              <a:buChar char="•"/>
             </a:pPr>
             <a:r>
-              <a:rPr sz="2000" b="1">
+              <a:rPr sz="2000">
                 <a:solidFill>
                   <a:srgbClr val="1E293B"/>
                 </a:solidFill>
                 <a:latin typeface="Calibri"/>
               </a:rPr>
-              <a:t>A. phân bón rắn</a:t>
-            </a:r>
-          </a:p>
-          <a:p>
-            <a:pPr algn="l">
-              <a:spcAft>
-                <a:spcPts val="800"/>
-              </a:spcAft>
-            </a:pPr>
-            <a:r>
-              <a:rPr sz="2000" b="1">
-                <a:solidFill>
-                  <a:srgbClr val="1E293B"/>
-                </a:solidFill>
-                <a:latin typeface="Calibri"/>
-              </a:rPr>
-              <a:t>B. giá thể đất</a:t>
-            </a:r>
-          </a:p>
-          <a:p>
-            <a:pPr algn="l">
-              <a:spcAft>
-                <a:spcPts val="800"/>
-              </a:spcAft>
-            </a:pPr>
-            <a:r>
-              <a:rPr sz="2000" b="1">
-                <a:solidFill>
-                  <a:srgbClr val="1E293B"/>
-                </a:solidFill>
-                <a:latin typeface="Calibri"/>
-              </a:rPr>
-              <a:t>C. dung dịch ngập toàn bộ rễ</a:t>
-            </a:r>
-          </a:p>
-          <a:p>
-            <a:pPr algn="l">
-              <a:spcAft>
-                <a:spcPts val="800"/>
-              </a:spcAft>
-            </a:pPr>
-            <a:r>
-              <a:rPr sz="2000" b="1">
-                <a:solidFill>
-                  <a:srgbClr val="1E293B"/>
-                </a:solidFill>
-                <a:latin typeface="Calibri"/>
-              </a:rPr>
-              <a:t>D. sương nhờ máy bơm</a:t>
+              <a:t>Rễ hô hấp hiếu khí cung cấp ATP và chất trung gian làm tăng áp suất thẩm thấu, giúp hút nước, khoáng.</a:t>
             </a:r>
           </a:p>
         </p:txBody>
@@ -12196,14 +12199,14 @@
         </p:nvSpPr>
         <p:spPr>
           <a:xfrm>
-            <a:off x="10463479" y="457200"/>
-            <a:ext cx="1179576" cy="457200"/>
+            <a:off x="10701223" y="457200"/>
+            <a:ext cx="941832" cy="457200"/>
           </a:xfrm>
           <a:prstGeom prst="roundRect">
             <a:avLst/>
           </a:prstGeom>
           <a:solidFill>
-            <a:srgbClr val="991B1B"/>
+            <a:srgbClr val="1E40AF"/>
           </a:solidFill>
           <a:ln>
             <a:noFill/>
@@ -12236,7 +12239,7 @@
                 </a:solidFill>
                 <a:latin typeface="Arial"/>
               </a:rPr>
-              <a:t>LỜI GIẢI</a:t>
+              <a:t>ĐỀ BÀI</a:t>
             </a:r>
           </a:p>
         </p:txBody>
@@ -12250,7 +12253,7 @@
         <p:spPr>
           <a:xfrm>
             <a:off x="731520" y="274320"/>
-            <a:ext cx="9793224" cy="868680"/>
+            <a:ext cx="10030968" cy="868680"/>
           </a:xfrm>
           <a:prstGeom prst="rect">
             <a:avLst/>
@@ -12270,7 +12273,7 @@
                 </a:solidFill>
                 <a:latin typeface="Arial"/>
               </a:rPr>
-              <a:t>ĐỀ MINH HỌA · PHẦN I · CÂU 15</a:t>
+              <a:t>ĐỀ MINH HỌA · PHẦN I · CÂU 14</a:t>
             </a:r>
           </a:p>
         </p:txBody>
@@ -12376,45 +12379,83 @@
           </a:bodyPr>
           <a:lstStyle/>
           <a:p>
-            <a:pPr algn="l" marL="365760" indent="-365760">
+            <a:pPr algn="l">
               <a:spcAft>
                 <a:spcPts val="800"/>
               </a:spcAft>
-              <a:buClr>
-                <a:srgbClr val="1E40AF"/>
-              </a:buClr>
-              <a:buFont typeface="Arial"/>
-              <a:buChar char="•"/>
             </a:pPr>
             <a:r>
-              <a:rPr sz="2000">
+              <a:rPr sz="2000" b="1">
                 <a:solidFill>
                   <a:srgbClr val="1E293B"/>
                 </a:solidFill>
                 <a:latin typeface="Calibri"/>
               </a:rPr>
-              <a:t>Đáp án D.</a:t>
-            </a:r>
-          </a:p>
-          <a:p>
-            <a:pPr algn="l" marL="365760" indent="-365760">
+              <a:t>Phương trình phản ứng giữa CO₂ và nước vôi trong là</a:t>
+            </a:r>
+          </a:p>
+          <a:p>
+            <a:pPr algn="l">
               <a:spcAft>
                 <a:spcPts val="800"/>
               </a:spcAft>
-              <a:buClr>
-                <a:srgbClr val="1E40AF"/>
-              </a:buClr>
-              <a:buFont typeface="Arial"/>
-              <a:buChar char="•"/>
             </a:pPr>
             <a:r>
-              <a:rPr sz="2000">
+              <a:rPr sz="2000" b="1">
                 <a:solidFill>
                   <a:srgbClr val="1E293B"/>
                 </a:solidFill>
                 <a:latin typeface="Calibri"/>
               </a:rPr>
-              <a:t>SGK mục III.2a.</a:t>
+              <a:t>A. CaCO₃ → CaO + CO₂</a:t>
+            </a:r>
+          </a:p>
+          <a:p>
+            <a:pPr algn="l">
+              <a:spcAft>
+                <a:spcPts val="800"/>
+              </a:spcAft>
+            </a:pPr>
+            <a:r>
+              <a:rPr sz="2000" b="1">
+                <a:solidFill>
+                  <a:srgbClr val="1E293B"/>
+                </a:solidFill>
+                <a:latin typeface="Calibri"/>
+              </a:rPr>
+              <a:t>B. CO₂ + H₂O → C₆H₁₂O₆ + O₂</a:t>
+            </a:r>
+          </a:p>
+          <a:p>
+            <a:pPr algn="l">
+              <a:spcAft>
+                <a:spcPts val="800"/>
+              </a:spcAft>
+            </a:pPr>
+            <a:r>
+              <a:rPr sz="2000" b="1">
+                <a:solidFill>
+                  <a:srgbClr val="1E293B"/>
+                </a:solidFill>
+                <a:latin typeface="Calibri"/>
+              </a:rPr>
+              <a:t>C. CO₂ + Ca(OH)₂ → CaCO₃ + H₂O</a:t>
+            </a:r>
+          </a:p>
+          <a:p>
+            <a:pPr algn="l">
+              <a:spcAft>
+                <a:spcPts val="800"/>
+              </a:spcAft>
+            </a:pPr>
+            <a:r>
+              <a:rPr sz="2000" b="1">
+                <a:solidFill>
+                  <a:srgbClr val="1E293B"/>
+                </a:solidFill>
+                <a:latin typeface="Calibri"/>
+              </a:rPr>
+              <a:t>D. CO₂ + O₂ → CO₃</a:t>
             </a:r>
           </a:p>
         </p:txBody>
@@ -12497,14 +12538,14 @@
         </p:nvSpPr>
         <p:spPr>
           <a:xfrm>
-            <a:off x="10701223" y="457200"/>
-            <a:ext cx="941832" cy="457200"/>
+            <a:off x="10463479" y="457200"/>
+            <a:ext cx="1179576" cy="457200"/>
           </a:xfrm>
           <a:prstGeom prst="roundRect">
             <a:avLst/>
           </a:prstGeom>
           <a:solidFill>
-            <a:srgbClr val="1E40AF"/>
+            <a:srgbClr val="991B1B"/>
           </a:solidFill>
           <a:ln>
             <a:noFill/>
@@ -12537,7 +12578,7 @@
                 </a:solidFill>
                 <a:latin typeface="Arial"/>
               </a:rPr>
-              <a:t>ĐỀ BÀI</a:t>
+              <a:t>LỜI GIẢI</a:t>
             </a:r>
           </a:p>
         </p:txBody>
@@ -12551,7 +12592,7 @@
         <p:spPr>
           <a:xfrm>
             <a:off x="731520" y="274320"/>
-            <a:ext cx="10030968" cy="868680"/>
+            <a:ext cx="9793224" cy="868680"/>
           </a:xfrm>
           <a:prstGeom prst="rect">
             <a:avLst/>
@@ -12571,7 +12612,7 @@
                 </a:solidFill>
                 <a:latin typeface="Arial"/>
               </a:rPr>
-              <a:t>ĐỀ MINH HỌA · PHẦN I · CÂU 16</a:t>
+              <a:t>ĐỀ MINH HỌA · PHẦN I · CÂU 14</a:t>
             </a:r>
           </a:p>
         </p:txBody>
@@ -12677,83 +12718,45 @@
           </a:bodyPr>
           <a:lstStyle/>
           <a:p>
-            <a:pPr algn="l">
+            <a:pPr algn="l" marL="365760" indent="-365760">
               <a:spcAft>
                 <a:spcPts val="800"/>
               </a:spcAft>
+              <a:buClr>
+                <a:srgbClr val="1E40AF"/>
+              </a:buClr>
+              <a:buFont typeface="Arial"/>
+              <a:buChar char="•"/>
             </a:pPr>
             <a:r>
-              <a:rPr sz="2000" b="1">
+              <a:rPr sz="2000">
                 <a:solidFill>
                   <a:srgbClr val="1E293B"/>
                 </a:solidFill>
                 <a:latin typeface="Calibri"/>
               </a:rPr>
-              <a:t>Không nên trồng cây với mật độ quá dày vì</a:t>
-            </a:r>
-          </a:p>
-          <a:p>
-            <a:pPr algn="l">
+              <a:t>Đáp án C.</a:t>
+            </a:r>
+          </a:p>
+          <a:p>
+            <a:pPr algn="l" marL="365760" indent="-365760">
               <a:spcAft>
                 <a:spcPts val="800"/>
               </a:spcAft>
+              <a:buClr>
+                <a:srgbClr val="1E40AF"/>
+              </a:buClr>
+              <a:buFont typeface="Arial"/>
+              <a:buChar char="•"/>
             </a:pPr>
             <a:r>
-              <a:rPr sz="2000" b="1">
+              <a:rPr sz="2000">
                 <a:solidFill>
                   <a:srgbClr val="1E293B"/>
                 </a:solidFill>
                 <a:latin typeface="Calibri"/>
               </a:rPr>
-              <a:t>A. cây cạnh tranh ánh sáng, nước, dinh dưỡng, bộ lá kém phát triển, năng suất thấp</a:t>
-            </a:r>
-          </a:p>
-          <a:p>
-            <a:pPr algn="l">
-              <a:spcAft>
-                <a:spcPts val="800"/>
-              </a:spcAft>
-            </a:pPr>
-            <a:r>
-              <a:rPr sz="2000" b="1">
-                <a:solidFill>
-                  <a:srgbClr val="1E293B"/>
-                </a:solidFill>
-                <a:latin typeface="Calibri"/>
-              </a:rPr>
-              <a:t>B. cây hấp thụ quá nhiều CO₂</a:t>
-            </a:r>
-          </a:p>
-          <a:p>
-            <a:pPr algn="l">
-              <a:spcAft>
-                <a:spcPts val="800"/>
-              </a:spcAft>
-            </a:pPr>
-            <a:r>
-              <a:rPr sz="2000" b="1">
-                <a:solidFill>
-                  <a:srgbClr val="1E293B"/>
-                </a:solidFill>
-                <a:latin typeface="Calibri"/>
-              </a:rPr>
-              <a:t>C. nhiệt độ ruộng giảm quá mức</a:t>
-            </a:r>
-          </a:p>
-          <a:p>
-            <a:pPr algn="l">
-              <a:spcAft>
-                <a:spcPts val="800"/>
-              </a:spcAft>
-            </a:pPr>
-            <a:r>
-              <a:rPr sz="2000" b="1">
-                <a:solidFill>
-                  <a:srgbClr val="1E293B"/>
-                </a:solidFill>
-                <a:latin typeface="Calibri"/>
-              </a:rPr>
-              <a:t>D. cây quang hợp quá mạnh</a:t>
+              <a:t>CaCO₃ là kết tủa trắng.</a:t>
             </a:r>
           </a:p>
         </p:txBody>
@@ -12836,14 +12839,14 @@
         </p:nvSpPr>
         <p:spPr>
           <a:xfrm>
-            <a:off x="10463479" y="457200"/>
-            <a:ext cx="1179576" cy="457200"/>
+            <a:off x="10701223" y="457200"/>
+            <a:ext cx="941832" cy="457200"/>
           </a:xfrm>
           <a:prstGeom prst="roundRect">
             <a:avLst/>
           </a:prstGeom>
           <a:solidFill>
-            <a:srgbClr val="991B1B"/>
+            <a:srgbClr val="1E40AF"/>
           </a:solidFill>
           <a:ln>
             <a:noFill/>
@@ -12876,7 +12879,7 @@
                 </a:solidFill>
                 <a:latin typeface="Arial"/>
               </a:rPr>
-              <a:t>LỜI GIẢI</a:t>
+              <a:t>ĐỀ BÀI</a:t>
             </a:r>
           </a:p>
         </p:txBody>
@@ -12890,7 +12893,7 @@
         <p:spPr>
           <a:xfrm>
             <a:off x="731520" y="274320"/>
-            <a:ext cx="9793224" cy="868680"/>
+            <a:ext cx="10030968" cy="868680"/>
           </a:xfrm>
           <a:prstGeom prst="rect">
             <a:avLst/>
@@ -12910,7 +12913,7 @@
                 </a:solidFill>
                 <a:latin typeface="Arial"/>
               </a:rPr>
-              <a:t>ĐỀ MINH HỌA · PHẦN I · CÂU 16</a:t>
+              <a:t>ĐỀ MINH HỌA · PHẦN I · CÂU 15</a:t>
             </a:r>
           </a:p>
         </p:txBody>
@@ -13016,45 +13019,83 @@
           </a:bodyPr>
           <a:lstStyle/>
           <a:p>
-            <a:pPr algn="l" marL="365760" indent="-365760">
+            <a:pPr algn="l">
               <a:spcAft>
                 <a:spcPts val="800"/>
               </a:spcAft>
-              <a:buClr>
-                <a:srgbClr val="1E40AF"/>
-              </a:buClr>
-              <a:buFont typeface="Arial"/>
-              <a:buChar char="•"/>
             </a:pPr>
             <a:r>
-              <a:rPr sz="2000">
+              <a:rPr sz="2000" b="1">
                 <a:solidFill>
                   <a:srgbClr val="1E293B"/>
                 </a:solidFill>
                 <a:latin typeface="Calibri"/>
               </a:rPr>
-              <a:t>Đáp án A.</a:t>
-            </a:r>
-          </a:p>
-          <a:p>
-            <a:pPr algn="l" marL="365760" indent="-365760">
+              <a:t>Nguồn năng lượng khởi đầu trong sinh giới là</a:t>
+            </a:r>
+          </a:p>
+          <a:p>
+            <a:pPr algn="l">
               <a:spcAft>
                 <a:spcPts val="800"/>
               </a:spcAft>
-              <a:buClr>
-                <a:srgbClr val="1E40AF"/>
-              </a:buClr>
-              <a:buFont typeface="Arial"/>
-              <a:buChar char="•"/>
             </a:pPr>
             <a:r>
-              <a:rPr sz="2000">
+              <a:rPr sz="2000" b="1">
                 <a:solidFill>
                   <a:srgbClr val="1E293B"/>
                 </a:solidFill>
                 <a:latin typeface="Calibri"/>
               </a:rPr>
-              <a:t>SGV tr.35.</a:t>
+              <a:t>A. năng lượng điện của vi khuẩn</a:t>
+            </a:r>
+          </a:p>
+          <a:p>
+            <a:pPr algn="l">
+              <a:spcAft>
+                <a:spcPts val="800"/>
+              </a:spcAft>
+            </a:pPr>
+            <a:r>
+              <a:rPr sz="2000" b="1">
+                <a:solidFill>
+                  <a:srgbClr val="1E293B"/>
+                </a:solidFill>
+                <a:latin typeface="Calibri"/>
+              </a:rPr>
+              <a:t>B. nhiệt năng từ lòng đất</a:t>
+            </a:r>
+          </a:p>
+          <a:p>
+            <a:pPr algn="l">
+              <a:spcAft>
+                <a:spcPts val="800"/>
+              </a:spcAft>
+            </a:pPr>
+            <a:r>
+              <a:rPr sz="2000" b="1">
+                <a:solidFill>
+                  <a:srgbClr val="1E293B"/>
+                </a:solidFill>
+                <a:latin typeface="Calibri"/>
+              </a:rPr>
+              <a:t>C. hoá năng trong thức ăn của động vật</a:t>
+            </a:r>
+          </a:p>
+          <a:p>
+            <a:pPr algn="l">
+              <a:spcAft>
+                <a:spcPts val="800"/>
+              </a:spcAft>
+            </a:pPr>
+            <a:r>
+              <a:rPr sz="2000" b="1">
+                <a:solidFill>
+                  <a:srgbClr val="1E293B"/>
+                </a:solidFill>
+                <a:latin typeface="Calibri"/>
+              </a:rPr>
+              <a:t>D. năng lượng ánh sáng mặt trời (quang năng)</a:t>
             </a:r>
           </a:p>
         </p:txBody>
@@ -13137,14 +13178,14 @@
         </p:nvSpPr>
         <p:spPr>
           <a:xfrm>
-            <a:off x="10701223" y="457200"/>
-            <a:ext cx="941832" cy="457200"/>
+            <a:off x="10463479" y="457200"/>
+            <a:ext cx="1179576" cy="457200"/>
           </a:xfrm>
           <a:prstGeom prst="roundRect">
             <a:avLst/>
           </a:prstGeom>
           <a:solidFill>
-            <a:srgbClr val="1E40AF"/>
+            <a:srgbClr val="991B1B"/>
           </a:solidFill>
           <a:ln>
             <a:noFill/>
@@ -13177,7 +13218,7 @@
                 </a:solidFill>
                 <a:latin typeface="Arial"/>
               </a:rPr>
-              <a:t>ĐỀ BÀI</a:t>
+              <a:t>LỜI GIẢI</a:t>
             </a:r>
           </a:p>
         </p:txBody>
@@ -13191,7 +13232,7 @@
         <p:spPr>
           <a:xfrm>
             <a:off x="731520" y="274320"/>
-            <a:ext cx="10030968" cy="868680"/>
+            <a:ext cx="9793224" cy="868680"/>
           </a:xfrm>
           <a:prstGeom prst="rect">
             <a:avLst/>
@@ -13211,7 +13252,7 @@
                 </a:solidFill>
                 <a:latin typeface="Arial"/>
               </a:rPr>
-              <a:t>ĐỀ MINH HỌA · PHẦN I · CÂU 17</a:t>
+              <a:t>ĐỀ MINH HỌA · PHẦN I · CÂU 15</a:t>
             </a:r>
           </a:p>
         </p:txBody>
@@ -13317,83 +13358,45 @@
           </a:bodyPr>
           <a:lstStyle/>
           <a:p>
-            <a:pPr algn="l">
+            <a:pPr algn="l" marL="365760" indent="-365760">
               <a:spcAft>
                 <a:spcPts val="800"/>
               </a:spcAft>
+              <a:buClr>
+                <a:srgbClr val="1E40AF"/>
+              </a:buClr>
+              <a:buFont typeface="Arial"/>
+              <a:buChar char="•"/>
             </a:pPr>
             <a:r>
-              <a:rPr sz="2000" b="1">
+              <a:rPr sz="2000">
                 <a:solidFill>
                   <a:srgbClr val="1E293B"/>
                 </a:solidFill>
                 <a:latin typeface="Calibri"/>
               </a:rPr>
-              <a:t>Quá trình tổng hợp chất hữu cơ phức tạp từ các chất đơn giản, kèm theo tích luỹ năng lượng được gọi là</a:t>
-            </a:r>
-          </a:p>
-          <a:p>
-            <a:pPr algn="l">
+              <a:t>Đáp án D.</a:t>
+            </a:r>
+          </a:p>
+          <a:p>
+            <a:pPr algn="l" marL="365760" indent="-365760">
               <a:spcAft>
                 <a:spcPts val="800"/>
               </a:spcAft>
+              <a:buClr>
+                <a:srgbClr val="1E40AF"/>
+              </a:buClr>
+              <a:buFont typeface="Arial"/>
+              <a:buChar char="•"/>
             </a:pPr>
             <a:r>
-              <a:rPr sz="2000" b="1">
+              <a:rPr sz="2000">
                 <a:solidFill>
                   <a:srgbClr val="1E293B"/>
                 </a:solidFill>
                 <a:latin typeface="Calibri"/>
               </a:rPr>
-              <a:t>A. đồng hoá</a:t>
-            </a:r>
-          </a:p>
-          <a:p>
-            <a:pPr algn="l">
-              <a:spcAft>
-                <a:spcPts val="800"/>
-              </a:spcAft>
-            </a:pPr>
-            <a:r>
-              <a:rPr sz="2000" b="1">
-                <a:solidFill>
-                  <a:srgbClr val="1E293B"/>
-                </a:solidFill>
-                <a:latin typeface="Calibri"/>
-              </a:rPr>
-              <a:t>B. dị hoá</a:t>
-            </a:r>
-          </a:p>
-          <a:p>
-            <a:pPr algn="l">
-              <a:spcAft>
-                <a:spcPts val="800"/>
-              </a:spcAft>
-            </a:pPr>
-            <a:r>
-              <a:rPr sz="2000" b="1">
-                <a:solidFill>
-                  <a:srgbClr val="1E293B"/>
-                </a:solidFill>
-                <a:latin typeface="Calibri"/>
-              </a:rPr>
-              <a:t>C. bài tiết</a:t>
-            </a:r>
-          </a:p>
-          <a:p>
-            <a:pPr algn="l">
-              <a:spcAft>
-                <a:spcPts val="800"/>
-              </a:spcAft>
-            </a:pPr>
-            <a:r>
-              <a:rPr sz="2000" b="1">
-                <a:solidFill>
-                  <a:srgbClr val="1E293B"/>
-                </a:solidFill>
-                <a:latin typeface="Calibri"/>
-              </a:rPr>
-              <a:t>D. hô hấp</a:t>
+              <a:t>SGK: chất diệp lục của cây xanh thu nhận quang năng để tổng hợp chất hữu cơ từ CO₂ và nước.</a:t>
             </a:r>
           </a:p>
         </p:txBody>
@@ -13736,14 +13739,14 @@
         </p:nvSpPr>
         <p:spPr>
           <a:xfrm>
-            <a:off x="10463479" y="457200"/>
-            <a:ext cx="1179576" cy="457200"/>
+            <a:off x="10701223" y="457200"/>
+            <a:ext cx="941832" cy="457200"/>
           </a:xfrm>
           <a:prstGeom prst="roundRect">
             <a:avLst/>
           </a:prstGeom>
           <a:solidFill>
-            <a:srgbClr val="991B1B"/>
+            <a:srgbClr val="1E40AF"/>
           </a:solidFill>
           <a:ln>
             <a:noFill/>
@@ -13776,7 +13779,7 @@
                 </a:solidFill>
                 <a:latin typeface="Arial"/>
               </a:rPr>
-              <a:t>LỜI GIẢI</a:t>
+              <a:t>ĐỀ BÀI</a:t>
             </a:r>
           </a:p>
         </p:txBody>
@@ -13790,7 +13793,7 @@
         <p:spPr>
           <a:xfrm>
             <a:off x="731520" y="274320"/>
-            <a:ext cx="9793224" cy="868680"/>
+            <a:ext cx="10030968" cy="868680"/>
           </a:xfrm>
           <a:prstGeom prst="rect">
             <a:avLst/>
@@ -13810,7 +13813,7 @@
                 </a:solidFill>
                 <a:latin typeface="Arial"/>
               </a:rPr>
-              <a:t>ĐỀ MINH HỌA · PHẦN I · CÂU 17</a:t>
+              <a:t>ĐỀ MINH HỌA · PHẦN I · CÂU 16</a:t>
             </a:r>
           </a:p>
         </p:txBody>
@@ -13916,45 +13919,83 @@
           </a:bodyPr>
           <a:lstStyle/>
           <a:p>
-            <a:pPr algn="l" marL="365760" indent="-365760">
+            <a:pPr algn="l">
               <a:spcAft>
                 <a:spcPts val="800"/>
               </a:spcAft>
-              <a:buClr>
-                <a:srgbClr val="1E40AF"/>
-              </a:buClr>
-              <a:buFont typeface="Arial"/>
-              <a:buChar char="•"/>
             </a:pPr>
             <a:r>
-              <a:rPr sz="2000">
+              <a:rPr sz="2000" b="1">
                 <a:solidFill>
                   <a:srgbClr val="1E293B"/>
                 </a:solidFill>
                 <a:latin typeface="Calibri"/>
               </a:rPr>
-              <a:t>Đáp án A.</a:t>
-            </a:r>
-          </a:p>
-          <a:p>
-            <a:pPr algn="l" marL="365760" indent="-365760">
+              <a:t>Phân hữu cơ thường được dùng để bón lót vì</a:t>
+            </a:r>
+          </a:p>
+          <a:p>
+            <a:pPr algn="l">
               <a:spcAft>
                 <a:spcPts val="800"/>
               </a:spcAft>
-              <a:buClr>
-                <a:srgbClr val="1E40AF"/>
-              </a:buClr>
-              <a:buFont typeface="Arial"/>
-              <a:buChar char="•"/>
             </a:pPr>
             <a:r>
-              <a:rPr sz="2000">
+              <a:rPr sz="2000" b="1">
                 <a:solidFill>
                   <a:srgbClr val="1E293B"/>
                 </a:solidFill>
                 <a:latin typeface="Calibri"/>
               </a:rPr>
-              <a:t>SGK mục II.2: đồng hoá tổng hợp chất, tích luỹ năng lượng; dị hoá phân giải chất, giải phóng năng lượng.</a:t>
+              <a:t>A. tác dụng chậm, khó tan, giàu mùn, giữ ẩm, tạo giá thể tơi xốp cho cây</a:t>
+            </a:r>
+          </a:p>
+          <a:p>
+            <a:pPr algn="l">
+              <a:spcAft>
+                <a:spcPts val="800"/>
+              </a:spcAft>
+            </a:pPr>
+            <a:r>
+              <a:rPr sz="2000" b="1">
+                <a:solidFill>
+                  <a:srgbClr val="1E293B"/>
+                </a:solidFill>
+                <a:latin typeface="Calibri"/>
+              </a:rPr>
+              <a:t>B. dễ tan, tác dụng nhanh</a:t>
+            </a:r>
+          </a:p>
+          <a:p>
+            <a:pPr algn="l">
+              <a:spcAft>
+                <a:spcPts val="800"/>
+              </a:spcAft>
+            </a:pPr>
+            <a:r>
+              <a:rPr sz="2000" b="1">
+                <a:solidFill>
+                  <a:srgbClr val="1E293B"/>
+                </a:solidFill>
+                <a:latin typeface="Calibri"/>
+              </a:rPr>
+              <a:t>C. chứa ít dinh dưỡng</a:t>
+            </a:r>
+          </a:p>
+          <a:p>
+            <a:pPr algn="l">
+              <a:spcAft>
+                <a:spcPts val="800"/>
+              </a:spcAft>
+            </a:pPr>
+            <a:r>
+              <a:rPr sz="2000" b="1">
+                <a:solidFill>
+                  <a:srgbClr val="1E293B"/>
+                </a:solidFill>
+                <a:latin typeface="Calibri"/>
+              </a:rPr>
+              <a:t>D. chỉ dùng được cho cây non</a:t>
             </a:r>
           </a:p>
         </p:txBody>
@@ -14037,14 +14078,14 @@
         </p:nvSpPr>
         <p:spPr>
           <a:xfrm>
-            <a:off x="10701223" y="457200"/>
-            <a:ext cx="941832" cy="457200"/>
+            <a:off x="10463479" y="457200"/>
+            <a:ext cx="1179576" cy="457200"/>
           </a:xfrm>
           <a:prstGeom prst="roundRect">
             <a:avLst/>
           </a:prstGeom>
           <a:solidFill>
-            <a:srgbClr val="1E40AF"/>
+            <a:srgbClr val="991B1B"/>
           </a:solidFill>
           <a:ln>
             <a:noFill/>
@@ -14077,7 +14118,7 @@
                 </a:solidFill>
                 <a:latin typeface="Arial"/>
               </a:rPr>
-              <a:t>ĐỀ BÀI</a:t>
+              <a:t>LỜI GIẢI</a:t>
             </a:r>
           </a:p>
         </p:txBody>
@@ -14091,7 +14132,7 @@
         <p:spPr>
           <a:xfrm>
             <a:off x="731520" y="274320"/>
-            <a:ext cx="10030968" cy="868680"/>
+            <a:ext cx="9793224" cy="868680"/>
           </a:xfrm>
           <a:prstGeom prst="rect">
             <a:avLst/>
@@ -14111,7 +14152,7 @@
                 </a:solidFill>
                 <a:latin typeface="Arial"/>
               </a:rPr>
-              <a:t>ĐỀ MINH HỌA · PHẦN I · CÂU 18</a:t>
+              <a:t>ĐỀ MINH HỌA · PHẦN I · CÂU 16</a:t>
             </a:r>
           </a:p>
         </p:txBody>
@@ -14217,83 +14258,45 @@
           </a:bodyPr>
           <a:lstStyle/>
           <a:p>
-            <a:pPr algn="l">
+            <a:pPr algn="l" marL="365760" indent="-365760">
               <a:spcAft>
                 <a:spcPts val="800"/>
               </a:spcAft>
+              <a:buClr>
+                <a:srgbClr val="1E40AF"/>
+              </a:buClr>
+              <a:buFont typeface="Arial"/>
+              <a:buChar char="•"/>
             </a:pPr>
             <a:r>
-              <a:rPr sz="2000" b="1">
+              <a:rPr sz="2000">
                 <a:solidFill>
                   <a:srgbClr val="1E293B"/>
                 </a:solidFill>
                 <a:latin typeface="Calibri"/>
               </a:rPr>
-              <a:t>Thực vật hấp thụ nitrogen ở dạng</a:t>
-            </a:r>
-          </a:p>
-          <a:p>
-            <a:pPr algn="l">
+              <a:t>Đáp án A.</a:t>
+            </a:r>
+          </a:p>
+          <a:p>
+            <a:pPr algn="l" marL="365760" indent="-365760">
               <a:spcAft>
                 <a:spcPts val="800"/>
               </a:spcAft>
+              <a:buClr>
+                <a:srgbClr val="1E40AF"/>
+              </a:buClr>
+              <a:buFont typeface="Arial"/>
+              <a:buChar char="•"/>
             </a:pPr>
             <a:r>
-              <a:rPr sz="2000" b="1">
+              <a:rPr sz="2000">
                 <a:solidFill>
                   <a:srgbClr val="1E293B"/>
                 </a:solidFill>
                 <a:latin typeface="Calibri"/>
               </a:rPr>
-              <a:t>A. N₂ trong không khí</a:t>
-            </a:r>
-          </a:p>
-          <a:p>
-            <a:pPr algn="l">
-              <a:spcAft>
-                <a:spcPts val="800"/>
-              </a:spcAft>
-            </a:pPr>
-            <a:r>
-              <a:rPr sz="2000" b="1">
-                <a:solidFill>
-                  <a:srgbClr val="1E293B"/>
-                </a:solidFill>
-                <a:latin typeface="Calibri"/>
-              </a:rPr>
-              <a:t>B. NH₄⁺ và NO₃⁻</a:t>
-            </a:r>
-          </a:p>
-          <a:p>
-            <a:pPr algn="l">
-              <a:spcAft>
-                <a:spcPts val="800"/>
-              </a:spcAft>
-            </a:pPr>
-            <a:r>
-              <a:rPr sz="2000" b="1">
-                <a:solidFill>
-                  <a:srgbClr val="1E293B"/>
-                </a:solidFill>
-                <a:latin typeface="Calibri"/>
-              </a:rPr>
-              <a:t>C. NO₂ và N₂O</a:t>
-            </a:r>
-          </a:p>
-          <a:p>
-            <a:pPr algn="l">
-              <a:spcAft>
-                <a:spcPts val="800"/>
-              </a:spcAft>
-            </a:pPr>
-            <a:r>
-              <a:rPr sz="2000" b="1">
-                <a:solidFill>
-                  <a:srgbClr val="1E293B"/>
-                </a:solidFill>
-                <a:latin typeface="Calibri"/>
-              </a:rPr>
-              <a:t>D. protein trong đất</a:t>
+              <a:t>Luyện tập và vận dụng câu 3.</a:t>
             </a:r>
           </a:p>
         </p:txBody>
@@ -14376,14 +14379,14 @@
         </p:nvSpPr>
         <p:spPr>
           <a:xfrm>
-            <a:off x="10463479" y="457200"/>
-            <a:ext cx="1179576" cy="457200"/>
+            <a:off x="10701223" y="457200"/>
+            <a:ext cx="941832" cy="457200"/>
           </a:xfrm>
           <a:prstGeom prst="roundRect">
             <a:avLst/>
           </a:prstGeom>
           <a:solidFill>
-            <a:srgbClr val="991B1B"/>
+            <a:srgbClr val="1E40AF"/>
           </a:solidFill>
           <a:ln>
             <a:noFill/>
@@ -14416,7 +14419,7 @@
                 </a:solidFill>
                 <a:latin typeface="Arial"/>
               </a:rPr>
-              <a:t>LỜI GIẢI</a:t>
+              <a:t>ĐỀ BÀI</a:t>
             </a:r>
           </a:p>
         </p:txBody>
@@ -14430,7 +14433,7 @@
         <p:spPr>
           <a:xfrm>
             <a:off x="731520" y="274320"/>
-            <a:ext cx="9793224" cy="868680"/>
+            <a:ext cx="10030968" cy="868680"/>
           </a:xfrm>
           <a:prstGeom prst="rect">
             <a:avLst/>
@@ -14450,7 +14453,7 @@
                 </a:solidFill>
                 <a:latin typeface="Arial"/>
               </a:rPr>
-              <a:t>ĐỀ MINH HỌA · PHẦN I · CÂU 18</a:t>
+              <a:t>ĐỀ MINH HỌA · PHẦN I · CÂU 17</a:t>
             </a:r>
           </a:p>
         </p:txBody>
@@ -14556,45 +14559,83 @@
           </a:bodyPr>
           <a:lstStyle/>
           <a:p>
-            <a:pPr algn="l" marL="365760" indent="-365760">
+            <a:pPr algn="l">
               <a:spcAft>
                 <a:spcPts val="800"/>
               </a:spcAft>
-              <a:buClr>
-                <a:srgbClr val="1E40AF"/>
-              </a:buClr>
-              <a:buFont typeface="Arial"/>
-              <a:buChar char="•"/>
             </a:pPr>
             <a:r>
-              <a:rPr sz="2000">
+              <a:rPr sz="2000" b="1">
                 <a:solidFill>
                   <a:srgbClr val="1E293B"/>
                 </a:solidFill>
                 <a:latin typeface="Calibri"/>
               </a:rPr>
-              <a:t>Đáp án B.</a:t>
-            </a:r>
-          </a:p>
-          <a:p>
-            <a:pPr algn="l" marL="365760" indent="-365760">
+              <a:t>Để một bông hoa hồng trắng có cánh mang 2 – 3 màu, cách làm hợp lí là</a:t>
+            </a:r>
+          </a:p>
+          <a:p>
+            <a:pPr algn="l">
               <a:spcAft>
                 <a:spcPts val="800"/>
               </a:spcAft>
-              <a:buClr>
-                <a:srgbClr val="1E40AF"/>
-              </a:buClr>
-              <a:buFont typeface="Arial"/>
-              <a:buChar char="•"/>
             </a:pPr>
             <a:r>
-              <a:rPr sz="2000">
+              <a:rPr sz="2000" b="1">
                 <a:solidFill>
                   <a:srgbClr val="1E293B"/>
                 </a:solidFill>
                 <a:latin typeface="Calibri"/>
               </a:rPr>
-              <a:t>SGK mục III.2.</a:t>
+              <a:t>A. để hoa trong tủ lạnh tối</a:t>
+            </a:r>
+          </a:p>
+          <a:p>
+            <a:pPr algn="l">
+              <a:spcAft>
+                <a:spcPts val="800"/>
+              </a:spcAft>
+            </a:pPr>
+            <a:r>
+              <a:rPr sz="2000" b="1">
+                <a:solidFill>
+                  <a:srgbClr val="1E293B"/>
+                </a:solidFill>
+                <a:latin typeface="Calibri"/>
+              </a:rPr>
+              <a:t>B. phun màu lên cánh hoa</a:t>
+            </a:r>
+          </a:p>
+          <a:p>
+            <a:pPr algn="l">
+              <a:spcAft>
+                <a:spcPts val="800"/>
+              </a:spcAft>
+            </a:pPr>
+            <a:r>
+              <a:rPr sz="2000" b="1">
+                <a:solidFill>
+                  <a:srgbClr val="1E293B"/>
+                </a:solidFill>
+                <a:latin typeface="Calibri"/>
+              </a:rPr>
+              <a:t>C. cắm cả cành vào hỗn hợp nhiều màu</a:t>
+            </a:r>
+          </a:p>
+          <a:p>
+            <a:pPr algn="l">
+              <a:spcAft>
+                <a:spcPts val="800"/>
+              </a:spcAft>
+            </a:pPr>
+            <a:r>
+              <a:rPr sz="2000" b="1">
+                <a:solidFill>
+                  <a:srgbClr val="1E293B"/>
+                </a:solidFill>
+                <a:latin typeface="Calibri"/>
+              </a:rPr>
+              <a:t>D. chẻ dọc cuống thành 2 – 3 nhánh, mỗi nhánh cắm vào một dung dịch màu khác nhau</a:t>
             </a:r>
           </a:p>
         </p:txBody>
@@ -14677,14 +14718,14 @@
         </p:nvSpPr>
         <p:spPr>
           <a:xfrm>
-            <a:off x="10701223" y="457200"/>
-            <a:ext cx="941832" cy="457200"/>
+            <a:off x="10463479" y="457200"/>
+            <a:ext cx="1179576" cy="457200"/>
           </a:xfrm>
           <a:prstGeom prst="roundRect">
             <a:avLst/>
           </a:prstGeom>
           <a:solidFill>
-            <a:srgbClr val="1E40AF"/>
+            <a:srgbClr val="991B1B"/>
           </a:solidFill>
           <a:ln>
             <a:noFill/>
@@ -14717,7 +14758,7 @@
                 </a:solidFill>
                 <a:latin typeface="Arial"/>
               </a:rPr>
-              <a:t>ĐỀ BÀI</a:t>
+              <a:t>LỜI GIẢI</a:t>
             </a:r>
           </a:p>
         </p:txBody>
@@ -14731,7 +14772,7 @@
         <p:spPr>
           <a:xfrm>
             <a:off x="731520" y="274320"/>
-            <a:ext cx="10030968" cy="868680"/>
+            <a:ext cx="9793224" cy="868680"/>
           </a:xfrm>
           <a:prstGeom prst="rect">
             <a:avLst/>
@@ -14751,7 +14792,7 @@
                 </a:solidFill>
                 <a:latin typeface="Arial"/>
               </a:rPr>
-              <a:t>ĐỀ MINH HỌA · PHẦN II · CÂU 1</a:t>
+              <a:t>ĐỀ MINH HỌA · PHẦN I · CÂU 17</a:t>
             </a:r>
           </a:p>
         </p:txBody>
@@ -14857,83 +14898,45 @@
           </a:bodyPr>
           <a:lstStyle/>
           <a:p>
-            <a:pPr algn="l">
+            <a:pPr algn="l" marL="365760" indent="-365760">
               <a:spcAft>
                 <a:spcPts val="800"/>
               </a:spcAft>
+              <a:buClr>
+                <a:srgbClr val="1E40AF"/>
+              </a:buClr>
+              <a:buFont typeface="Arial"/>
+              <a:buChar char="•"/>
             </a:pPr>
             <a:r>
-              <a:rPr sz="2000" b="1">
+              <a:rPr sz="2000">
                 <a:solidFill>
                   <a:srgbClr val="1E293B"/>
                 </a:solidFill>
                 <a:latin typeface="Calibri"/>
               </a:rPr>
-              <a:t>Quan sát sơ đồ chuyển hoá năng lượng trong sinh giới (Hình 1.1 SGK): Năng lượng ánh sáng → (1) giai đoạn tổng hợp → năng lượng hoá học tích luỹ trong chất hữu cơ → (2) giai đoạn phân giải → năng lượng tích luỹ trong ATP → (3) giai đoạn huy động năng lượng → các hoạt động sống. Ở mỗi giai đoạn đều có một phần năng lượng toả ra dưới dạng nhiệt.</a:t>
-            </a:r>
-          </a:p>
-          <a:p>
-            <a:pPr algn="l">
+              <a:t>Đáp án D.</a:t>
+            </a:r>
+          </a:p>
+          <a:p>
+            <a:pPr algn="l" marL="365760" indent="-365760">
               <a:spcAft>
                 <a:spcPts val="800"/>
               </a:spcAft>
+              <a:buClr>
+                <a:srgbClr val="1E40AF"/>
+              </a:buClr>
+              <a:buFont typeface="Arial"/>
+              <a:buChar char="•"/>
             </a:pPr>
             <a:r>
-              <a:rPr sz="2000" b="1">
+              <a:rPr sz="2000">
                 <a:solidFill>
                   <a:srgbClr val="1E293B"/>
                 </a:solidFill>
                 <a:latin typeface="Calibri"/>
               </a:rPr>
-              <a:t>a) Giai đoạn (1) do cây xanh thực hiện nhờ chất diệp lục.</a:t>
-            </a:r>
-          </a:p>
-          <a:p>
-            <a:pPr algn="l">
-              <a:spcAft>
-                <a:spcPts val="800"/>
-              </a:spcAft>
-            </a:pPr>
-            <a:r>
-              <a:rPr sz="2000" b="1">
-                <a:solidFill>
-                  <a:srgbClr val="1E293B"/>
-                </a:solidFill>
-                <a:latin typeface="Calibri"/>
-              </a:rPr>
-              <a:t>b) Giai đoạn (2) chủ yếu nhờ quá trình hô hấp tế bào.</a:t>
-            </a:r>
-          </a:p>
-          <a:p>
-            <a:pPr algn="l">
-              <a:spcAft>
-                <a:spcPts val="800"/>
-              </a:spcAft>
-            </a:pPr>
-            <a:r>
-              <a:rPr sz="2000" b="1">
-                <a:solidFill>
-                  <a:srgbClr val="1E293B"/>
-                </a:solidFill>
-                <a:latin typeface="Calibri"/>
-              </a:rPr>
-              <a:t>c) Động vật thực hiện được cả ba giai đoạn (1), (2), (3).</a:t>
-            </a:r>
-          </a:p>
-          <a:p>
-            <a:pPr algn="l">
-              <a:spcAft>
-                <a:spcPts val="800"/>
-              </a:spcAft>
-            </a:pPr>
-            <a:r>
-              <a:rPr sz="2000" b="1">
-                <a:solidFill>
-                  <a:srgbClr val="1E293B"/>
-                </a:solidFill>
-                <a:latin typeface="Calibri"/>
-              </a:rPr>
-              <a:t>d) Cuối cùng các dạng năng lượng trong cơ thể đều chuyển thành nhiệt năng và toả ra môi trường.</a:t>
+              <a:t>Mỗi nhánh mạch gỗ dẫn màu lên một phần cánh.</a:t>
             </a:r>
           </a:p>
         </p:txBody>
@@ -15016,14 +15019,14 @@
         </p:nvSpPr>
         <p:spPr>
           <a:xfrm>
-            <a:off x="10463479" y="457200"/>
-            <a:ext cx="1179576" cy="457200"/>
+            <a:off x="10701223" y="457200"/>
+            <a:ext cx="941832" cy="457200"/>
           </a:xfrm>
           <a:prstGeom prst="roundRect">
             <a:avLst/>
           </a:prstGeom>
           <a:solidFill>
-            <a:srgbClr val="991B1B"/>
+            <a:srgbClr val="1E40AF"/>
           </a:solidFill>
           <a:ln>
             <a:noFill/>
@@ -15056,7 +15059,7 @@
                 </a:solidFill>
                 <a:latin typeface="Arial"/>
               </a:rPr>
-              <a:t>LỜI GIẢI</a:t>
+              <a:t>ĐỀ BÀI</a:t>
             </a:r>
           </a:p>
         </p:txBody>
@@ -15070,7 +15073,7 @@
         <p:spPr>
           <a:xfrm>
             <a:off x="731520" y="274320"/>
-            <a:ext cx="9793224" cy="868680"/>
+            <a:ext cx="10030968" cy="868680"/>
           </a:xfrm>
           <a:prstGeom prst="rect">
             <a:avLst/>
@@ -15090,7 +15093,7 @@
                 </a:solidFill>
                 <a:latin typeface="Arial"/>
               </a:rPr>
-              <a:t>ĐỀ MINH HỌA · PHẦN II · CÂU 1</a:t>
+              <a:t>ĐỀ MINH HỌA · PHẦN I · CÂU 18</a:t>
             </a:r>
           </a:p>
         </p:txBody>
@@ -15196,87 +15199,83 @@
           </a:bodyPr>
           <a:lstStyle/>
           <a:p>
-            <a:pPr algn="l" marL="365760" indent="-365760">
+            <a:pPr algn="l">
               <a:spcAft>
                 <a:spcPts val="800"/>
               </a:spcAft>
-              <a:buClr>
-                <a:srgbClr val="1E40AF"/>
-              </a:buClr>
-              <a:buFont typeface="Arial"/>
-              <a:buChar char="•"/>
             </a:pPr>
             <a:r>
-              <a:rPr sz="2000">
+              <a:rPr sz="2000" b="1">
                 <a:solidFill>
                   <a:srgbClr val="1E293B"/>
                 </a:solidFill>
                 <a:latin typeface="Calibri"/>
               </a:rPr>
-              <a:t>a) Đúng: Cây xanh chuyển quang năng thành hoá năng tích luỹ trong chất hữu cơ.</a:t>
-            </a:r>
-          </a:p>
-          <a:p>
-            <a:pPr algn="l" marL="365760" indent="-365760">
+              <a:t>Quang hợp ở thực vật diễn ra tại bào quan</a:t>
+            </a:r>
+          </a:p>
+          <a:p>
+            <a:pPr algn="l">
               <a:spcAft>
                 <a:spcPts val="800"/>
               </a:spcAft>
-              <a:buClr>
-                <a:srgbClr val="1E40AF"/>
-              </a:buClr>
-              <a:buFont typeface="Arial"/>
-              <a:buChar char="•"/>
             </a:pPr>
             <a:r>
-              <a:rPr sz="2000">
+              <a:rPr sz="2000" b="1">
                 <a:solidFill>
                   <a:srgbClr val="1E293B"/>
                 </a:solidFill>
                 <a:latin typeface="Calibri"/>
               </a:rPr>
-              <a:t>b) Đúng: Hô hấp biến đổi phân tử lớn thành phân tử nhỏ, tạo ATP.</a:t>
-            </a:r>
-          </a:p>
-          <a:p>
-            <a:pPr algn="l" marL="365760" indent="-365760">
+              <a:t>A. ti thể</a:t>
+            </a:r>
+          </a:p>
+          <a:p>
+            <a:pPr algn="l">
               <a:spcAft>
                 <a:spcPts val="800"/>
               </a:spcAft>
-              <a:buClr>
-                <a:srgbClr val="1E40AF"/>
-              </a:buClr>
-              <a:buFont typeface="Arial"/>
-              <a:buChar char="•"/>
             </a:pPr>
             <a:r>
-              <a:rPr sz="2000">
+              <a:rPr sz="2000" b="1">
                 <a:solidFill>
                   <a:srgbClr val="1E293B"/>
                 </a:solidFill>
                 <a:latin typeface="Calibri"/>
               </a:rPr>
-              <a:t>c) Sai: Động vật không nhận năng lượng trực tiếp từ ánh sáng để tổng hợp chất hữu cơ (không có giai đoạn 1).</a:t>
-            </a:r>
-          </a:p>
-          <a:p>
-            <a:pPr algn="l" marL="365760" indent="-365760">
+              <a:t>B. lục lạp</a:t>
+            </a:r>
+          </a:p>
+          <a:p>
+            <a:pPr algn="l">
               <a:spcAft>
                 <a:spcPts val="800"/>
               </a:spcAft>
-              <a:buClr>
-                <a:srgbClr val="1E40AF"/>
-              </a:buClr>
-              <a:buFont typeface="Arial"/>
-              <a:buChar char="•"/>
             </a:pPr>
             <a:r>
-              <a:rPr sz="2000">
+              <a:rPr sz="2000" b="1">
                 <a:solidFill>
                   <a:srgbClr val="1E293B"/>
                 </a:solidFill>
                 <a:latin typeface="Calibri"/>
               </a:rPr>
-              <a:t>d) Đúng: SGK mục III.3.</a:t>
+              <a:t>C. ribosome</a:t>
+            </a:r>
+          </a:p>
+          <a:p>
+            <a:pPr algn="l">
+              <a:spcAft>
+                <a:spcPts val="800"/>
+              </a:spcAft>
+            </a:pPr>
+            <a:r>
+              <a:rPr sz="2000" b="1">
+                <a:solidFill>
+                  <a:srgbClr val="1E293B"/>
+                </a:solidFill>
+                <a:latin typeface="Calibri"/>
+              </a:rPr>
+              <a:t>D. không bào</a:t>
             </a:r>
           </a:p>
         </p:txBody>
@@ -15359,14 +15358,14 @@
         </p:nvSpPr>
         <p:spPr>
           <a:xfrm>
-            <a:off x="10701223" y="457200"/>
-            <a:ext cx="941832" cy="457200"/>
+            <a:off x="10463479" y="457200"/>
+            <a:ext cx="1179576" cy="457200"/>
           </a:xfrm>
           <a:prstGeom prst="roundRect">
             <a:avLst/>
           </a:prstGeom>
           <a:solidFill>
-            <a:srgbClr val="1E40AF"/>
+            <a:srgbClr val="991B1B"/>
           </a:solidFill>
           <a:ln>
             <a:noFill/>
@@ -15399,7 +15398,7 @@
                 </a:solidFill>
                 <a:latin typeface="Arial"/>
               </a:rPr>
-              <a:t>ĐỀ BÀI</a:t>
+              <a:t>LỜI GIẢI</a:t>
             </a:r>
           </a:p>
         </p:txBody>
@@ -15413,7 +15412,7 @@
         <p:spPr>
           <a:xfrm>
             <a:off x="731520" y="274320"/>
-            <a:ext cx="10030968" cy="868680"/>
+            <a:ext cx="9793224" cy="868680"/>
           </a:xfrm>
           <a:prstGeom prst="rect">
             <a:avLst/>
@@ -15433,7 +15432,7 @@
                 </a:solidFill>
                 <a:latin typeface="Arial"/>
               </a:rPr>
-              <a:t>ĐỀ MINH HỌA · PHẦN II · CÂU 2</a:t>
+              <a:t>ĐỀ MINH HỌA · PHẦN I · CÂU 18</a:t>
             </a:r>
           </a:p>
         </p:txBody>
@@ -15539,83 +15538,45 @@
           </a:bodyPr>
           <a:lstStyle/>
           <a:p>
-            <a:pPr algn="l">
+            <a:pPr algn="l" marL="365760" indent="-365760">
               <a:spcAft>
                 <a:spcPts val="800"/>
               </a:spcAft>
+              <a:buClr>
+                <a:srgbClr val="1E40AF"/>
+              </a:buClr>
+              <a:buFont typeface="Arial"/>
+              <a:buChar char="•"/>
             </a:pPr>
             <a:r>
-              <a:rPr sz="2000" b="1">
+              <a:rPr sz="2000">
                 <a:solidFill>
                   <a:srgbClr val="1E293B"/>
                 </a:solidFill>
                 <a:latin typeface="Calibri"/>
               </a:rPr>
-              <a:t>Bảng 2.2 (SGK): Tổng lượng chất khoáng cây dưa chuột hấp thụ (mg/kg chất khô) – ở 10 °C: N 13,48; K 18,98; P 7,45; ở 20 °C: N 21,47; K 20,97; P 15,23.</a:t>
-            </a:r>
-          </a:p>
-          <a:p>
-            <a:pPr algn="l">
+              <a:t>Đáp án B.</a:t>
+            </a:r>
+          </a:p>
+          <a:p>
+            <a:pPr algn="l" marL="365760" indent="-365760">
               <a:spcAft>
                 <a:spcPts val="800"/>
               </a:spcAft>
+              <a:buClr>
+                <a:srgbClr val="1E40AF"/>
+              </a:buClr>
+              <a:buFont typeface="Arial"/>
+              <a:buChar char="•"/>
             </a:pPr>
             <a:r>
-              <a:rPr sz="2000" b="1">
+              <a:rPr sz="2000">
                 <a:solidFill>
                   <a:srgbClr val="1E293B"/>
                 </a:solidFill>
                 <a:latin typeface="Calibri"/>
               </a:rPr>
-              <a:t>a) Ở 20 °C, cây hấp thụ cả N, K, P nhiều hơn ở 10 °C.</a:t>
-            </a:r>
-          </a:p>
-          <a:p>
-            <a:pPr algn="l">
-              <a:spcAft>
-                <a:spcPts val="800"/>
-              </a:spcAft>
-            </a:pPr>
-            <a:r>
-              <a:rPr sz="2000" b="1">
-                <a:solidFill>
-                  <a:srgbClr val="1E293B"/>
-                </a:solidFill>
-                <a:latin typeface="Calibri"/>
-              </a:rPr>
-              <a:t>b) Lượng P hấp thụ ở 20 °C gấp hơn 2 lần ở 10 °C.</a:t>
-            </a:r>
-          </a:p>
-          <a:p>
-            <a:pPr algn="l">
-              <a:spcAft>
-                <a:spcPts val="800"/>
-              </a:spcAft>
-            </a:pPr>
-            <a:r>
-              <a:rPr sz="2000" b="1">
-                <a:solidFill>
-                  <a:srgbClr val="1E293B"/>
-                </a:solidFill>
-                <a:latin typeface="Calibri"/>
-              </a:rPr>
-              <a:t>c) Nhiệt độ tăng càng cao thì hấp thụ khoáng luôn càng tăng, kể cả trên 45 °C.</a:t>
-            </a:r>
-          </a:p>
-          <a:p>
-            <a:pPr algn="l">
-              <a:spcAft>
-                <a:spcPts val="800"/>
-              </a:spcAft>
-            </a:pPr>
-            <a:r>
-              <a:rPr sz="2000" b="1">
-                <a:solidFill>
-                  <a:srgbClr val="1E293B"/>
-                </a:solidFill>
-                <a:latin typeface="Calibri"/>
-              </a:rPr>
-              <a:t>d) Ủ ấm gốc cây bằng rơm rạ vào mùa lạnh giúp tăng khả năng hút khoáng của rễ.</a:t>
+              <a:t>SGK mục I.1.</a:t>
             </a:r>
           </a:p>
         </p:txBody>
@@ -15698,14 +15659,14 @@
         </p:nvSpPr>
         <p:spPr>
           <a:xfrm>
-            <a:off x="10463479" y="457200"/>
-            <a:ext cx="1179576" cy="457200"/>
+            <a:off x="10701223" y="457200"/>
+            <a:ext cx="941832" cy="457200"/>
           </a:xfrm>
           <a:prstGeom prst="roundRect">
             <a:avLst/>
           </a:prstGeom>
           <a:solidFill>
-            <a:srgbClr val="991B1B"/>
+            <a:srgbClr val="1E40AF"/>
           </a:solidFill>
           <a:ln>
             <a:noFill/>
@@ -15738,7 +15699,7 @@
                 </a:solidFill>
                 <a:latin typeface="Arial"/>
               </a:rPr>
-              <a:t>LỜI GIẢI</a:t>
+              <a:t>ĐỀ BÀI</a:t>
             </a:r>
           </a:p>
         </p:txBody>
@@ -15752,7 +15713,7 @@
         <p:spPr>
           <a:xfrm>
             <a:off x="731520" y="274320"/>
-            <a:ext cx="9793224" cy="868680"/>
+            <a:ext cx="10030968" cy="868680"/>
           </a:xfrm>
           <a:prstGeom prst="rect">
             <a:avLst/>
@@ -15772,7 +15733,7 @@
                 </a:solidFill>
                 <a:latin typeface="Arial"/>
               </a:rPr>
-              <a:t>ĐỀ MINH HỌA · PHẦN II · CÂU 2</a:t>
+              <a:t>ĐỀ MINH HỌA · PHẦN II · CÂU 1</a:t>
             </a:r>
           </a:p>
         </p:txBody>
@@ -15878,87 +15839,83 @@
           </a:bodyPr>
           <a:lstStyle/>
           <a:p>
-            <a:pPr algn="l" marL="365760" indent="-365760">
+            <a:pPr algn="l">
               <a:spcAft>
                 <a:spcPts val="800"/>
               </a:spcAft>
-              <a:buClr>
-                <a:srgbClr val="1E40AF"/>
-              </a:buClr>
-              <a:buFont typeface="Arial"/>
-              <a:buChar char="•"/>
             </a:pPr>
             <a:r>
-              <a:rPr sz="2000">
+              <a:rPr sz="2000" b="1">
                 <a:solidFill>
                   <a:srgbClr val="1E293B"/>
                 </a:solidFill>
                 <a:latin typeface="Calibri"/>
               </a:rPr>
-              <a:t>a) Đúng: Đọc trực tiếp bảng số liệu.</a:t>
-            </a:r>
-          </a:p>
-          <a:p>
-            <a:pPr algn="l" marL="365760" indent="-365760">
+              <a:t>Quan sát sơ đồ chuyển hoá năng lượng trong sinh giới (Hình 1.1 SGK): Năng lượng ánh sáng → (1) giai đoạn tổng hợp → năng lượng hoá học tích luỹ trong chất hữu cơ → (2) giai đoạn phân giải → năng lượng tích luỹ trong ATP → (3) giai đoạn huy động năng lượng → các hoạt động sống. Ở mỗi giai đoạn đều có một phần năng lượng toả ra dưới dạng nhiệt.</a:t>
+            </a:r>
+          </a:p>
+          <a:p>
+            <a:pPr algn="l">
               <a:spcAft>
                 <a:spcPts val="800"/>
               </a:spcAft>
-              <a:buClr>
-                <a:srgbClr val="1E40AF"/>
-              </a:buClr>
-              <a:buFont typeface="Arial"/>
-              <a:buChar char="•"/>
             </a:pPr>
             <a:r>
-              <a:rPr sz="2000">
+              <a:rPr sz="2000" b="1">
                 <a:solidFill>
                   <a:srgbClr val="1E293B"/>
                 </a:solidFill>
                 <a:latin typeface="Calibri"/>
               </a:rPr>
-              <a:t>b) Đúng: 15,23 : 7,45 ≈ 2,04.</a:t>
-            </a:r>
-          </a:p>
-          <a:p>
-            <a:pPr algn="l" marL="365760" indent="-365760">
+              <a:t>a) Giai đoạn (1) do cây xanh thực hiện nhờ chất diệp lục.</a:t>
+            </a:r>
+          </a:p>
+          <a:p>
+            <a:pPr algn="l">
               <a:spcAft>
                 <a:spcPts val="800"/>
               </a:spcAft>
-              <a:buClr>
-                <a:srgbClr val="1E40AF"/>
-              </a:buClr>
-              <a:buFont typeface="Arial"/>
-              <a:buChar char="•"/>
             </a:pPr>
             <a:r>
-              <a:rPr sz="2000">
+              <a:rPr sz="2000" b="1">
                 <a:solidFill>
                   <a:srgbClr val="1E293B"/>
                 </a:solidFill>
                 <a:latin typeface="Calibri"/>
               </a:rPr>
-              <a:t>c) Sai: Trên 45 °C lông hút có thể tổn thương, hấp thụ giảm hoặc dừng.</a:t>
-            </a:r>
-          </a:p>
-          <a:p>
-            <a:pPr algn="l" marL="365760" indent="-365760">
+              <a:t>b) Giai đoạn (2) chủ yếu nhờ quá trình hô hấp tế bào.</a:t>
+            </a:r>
+          </a:p>
+          <a:p>
+            <a:pPr algn="l">
               <a:spcAft>
                 <a:spcPts val="800"/>
               </a:spcAft>
-              <a:buClr>
-                <a:srgbClr val="1E40AF"/>
-              </a:buClr>
-              <a:buFont typeface="Arial"/>
-              <a:buChar char="•"/>
             </a:pPr>
             <a:r>
-              <a:rPr sz="2000">
+              <a:rPr sz="2000" b="1">
                 <a:solidFill>
                   <a:srgbClr val="1E293B"/>
                 </a:solidFill>
                 <a:latin typeface="Calibri"/>
               </a:rPr>
-              <a:t>d) Đúng: SGK mục IV.2.</a:t>
+              <a:t>c) Động vật thực hiện được cả ba giai đoạn (1), (2), (3).</a:t>
+            </a:r>
+          </a:p>
+          <a:p>
+            <a:pPr algn="l">
+              <a:spcAft>
+                <a:spcPts val="800"/>
+              </a:spcAft>
+            </a:pPr>
+            <a:r>
+              <a:rPr sz="2000" b="1">
+                <a:solidFill>
+                  <a:srgbClr val="1E293B"/>
+                </a:solidFill>
+                <a:latin typeface="Calibri"/>
+              </a:rPr>
+              <a:t>d) Cuối cùng các dạng năng lượng trong cơ thể đều chuyển thành nhiệt năng và toả ra môi trường.</a:t>
             </a:r>
           </a:p>
         </p:txBody>
@@ -16041,14 +15998,14 @@
         </p:nvSpPr>
         <p:spPr>
           <a:xfrm>
-            <a:off x="10701223" y="457200"/>
-            <a:ext cx="941832" cy="457200"/>
+            <a:off x="10463479" y="457200"/>
+            <a:ext cx="1179576" cy="457200"/>
           </a:xfrm>
           <a:prstGeom prst="roundRect">
             <a:avLst/>
           </a:prstGeom>
           <a:solidFill>
-            <a:srgbClr val="1E40AF"/>
+            <a:srgbClr val="991B1B"/>
           </a:solidFill>
           <a:ln>
             <a:noFill/>
@@ -16081,7 +16038,7 @@
                 </a:solidFill>
                 <a:latin typeface="Arial"/>
               </a:rPr>
-              <a:t>ĐỀ BÀI</a:t>
+              <a:t>LỜI GIẢI</a:t>
             </a:r>
           </a:p>
         </p:txBody>
@@ -16095,7 +16052,7 @@
         <p:spPr>
           <a:xfrm>
             <a:off x="731520" y="274320"/>
-            <a:ext cx="10030968" cy="868680"/>
+            <a:ext cx="9793224" cy="868680"/>
           </a:xfrm>
           <a:prstGeom prst="rect">
             <a:avLst/>
@@ -16115,7 +16072,7 @@
                 </a:solidFill>
                 <a:latin typeface="Arial"/>
               </a:rPr>
-              <a:t>ĐỀ MINH HỌA · PHẦN II · CÂU 3</a:t>
+              <a:t>ĐỀ MINH HỌA · PHẦN II · CÂU 1</a:t>
             </a:r>
           </a:p>
         </p:txBody>
@@ -16221,83 +16178,87 @@
           </a:bodyPr>
           <a:lstStyle/>
           <a:p>
-            <a:pPr algn="l">
+            <a:pPr algn="l" marL="365760" indent="-365760">
               <a:spcAft>
                 <a:spcPts val="800"/>
               </a:spcAft>
+              <a:buClr>
+                <a:srgbClr val="1E40AF"/>
+              </a:buClr>
+              <a:buFont typeface="Arial"/>
+              <a:buChar char="•"/>
             </a:pPr>
             <a:r>
-              <a:rPr sz="2000" b="1">
+              <a:rPr sz="2000">
                 <a:solidFill>
                   <a:srgbClr val="1E293B"/>
                 </a:solidFill>
                 <a:latin typeface="Calibri"/>
               </a:rPr>
-              <a:t>Bố trí 3 ống nghiệm: ống 1 có cây còn đủ lá, ống 2 có cây đã ngắt hết lá, ống 3 không có cây (cùng mực nước, có giọt dầu). Sau 1 giờ quan sát mực nước.</a:t>
-            </a:r>
-          </a:p>
-          <a:p>
-            <a:pPr algn="l">
+              <a:t>a) Đúng: Cây xanh chuyển quang năng thành hoá năng tích luỹ trong chất hữu cơ.</a:t>
+            </a:r>
+          </a:p>
+          <a:p>
+            <a:pPr algn="l" marL="365760" indent="-365760">
               <a:spcAft>
                 <a:spcPts val="800"/>
               </a:spcAft>
+              <a:buClr>
+                <a:srgbClr val="1E40AF"/>
+              </a:buClr>
+              <a:buFont typeface="Arial"/>
+              <a:buChar char="•"/>
             </a:pPr>
             <a:r>
-              <a:rPr sz="2000" b="1">
+              <a:rPr sz="2000">
                 <a:solidFill>
                   <a:srgbClr val="1E293B"/>
                 </a:solidFill>
                 <a:latin typeface="Calibri"/>
               </a:rPr>
-              <a:t>a) Ống 3 là ống đối chứng.</a:t>
-            </a:r>
-          </a:p>
-          <a:p>
-            <a:pPr algn="l">
+              <a:t>b) Đúng: Hô hấp biến đổi phân tử lớn thành phân tử nhỏ, tạo ATP.</a:t>
+            </a:r>
+          </a:p>
+          <a:p>
+            <a:pPr algn="l" marL="365760" indent="-365760">
               <a:spcAft>
                 <a:spcPts val="800"/>
               </a:spcAft>
+              <a:buClr>
+                <a:srgbClr val="1E40AF"/>
+              </a:buClr>
+              <a:buFont typeface="Arial"/>
+              <a:buChar char="•"/>
             </a:pPr>
             <a:r>
-              <a:rPr sz="2000" b="1">
+              <a:rPr sz="2000">
                 <a:solidFill>
                   <a:srgbClr val="1E293B"/>
                 </a:solidFill>
                 <a:latin typeface="Calibri"/>
               </a:rPr>
-              <a:t>b) Mực nước ở ống 1 giảm nhiều hơn ống 2.</a:t>
-            </a:r>
-          </a:p>
-          <a:p>
-            <a:pPr algn="l">
+              <a:t>c) Sai: Động vật không nhận năng lượng trực tiếp từ ánh sáng để tổng hợp chất hữu cơ (không có giai đoạn 1).</a:t>
+            </a:r>
+          </a:p>
+          <a:p>
+            <a:pPr algn="l" marL="365760" indent="-365760">
               <a:spcAft>
                 <a:spcPts val="800"/>
               </a:spcAft>
+              <a:buClr>
+                <a:srgbClr val="1E40AF"/>
+              </a:buClr>
+              <a:buFont typeface="Arial"/>
+              <a:buChar char="•"/>
             </a:pPr>
             <a:r>
-              <a:rPr sz="2000" b="1">
+              <a:rPr sz="2000">
                 <a:solidFill>
                   <a:srgbClr val="1E293B"/>
                 </a:solidFill>
                 <a:latin typeface="Calibri"/>
               </a:rPr>
-              <a:t>c) Mực nước ở ống 3 giảm nhiều nhất vì nước bay hơi.</a:t>
-            </a:r>
-          </a:p>
-          <a:p>
-            <a:pPr algn="l">
-              <a:spcAft>
-                <a:spcPts val="800"/>
-              </a:spcAft>
-            </a:pPr>
-            <a:r>
-              <a:rPr sz="2000" b="1">
-                <a:solidFill>
-                  <a:srgbClr val="1E293B"/>
-                </a:solidFill>
-                <a:latin typeface="Calibri"/>
-              </a:rPr>
-              <a:t>d) Thí nghiệm chứng minh rễ hấp thụ nước và thoát hơi nước ở lá là động lực của quá trình đó.</a:t>
+              <a:t>d) Đúng: SGK mục III.3.</a:t>
             </a:r>
           </a:p>
         </p:txBody>
@@ -16380,14 +16341,14 @@
         </p:nvSpPr>
         <p:spPr>
           <a:xfrm>
-            <a:off x="10463479" y="457200"/>
-            <a:ext cx="1179576" cy="457200"/>
+            <a:off x="10701223" y="457200"/>
+            <a:ext cx="941832" cy="457200"/>
           </a:xfrm>
           <a:prstGeom prst="roundRect">
             <a:avLst/>
           </a:prstGeom>
           <a:solidFill>
-            <a:srgbClr val="991B1B"/>
+            <a:srgbClr val="1E40AF"/>
           </a:solidFill>
           <a:ln>
             <a:noFill/>
@@ -16420,7 +16381,7 @@
                 </a:solidFill>
                 <a:latin typeface="Arial"/>
               </a:rPr>
-              <a:t>LỜI GIẢI</a:t>
+              <a:t>ĐỀ BÀI</a:t>
             </a:r>
           </a:p>
         </p:txBody>
@@ -16434,7 +16395,7 @@
         <p:spPr>
           <a:xfrm>
             <a:off x="731520" y="274320"/>
-            <a:ext cx="9793224" cy="868680"/>
+            <a:ext cx="10030968" cy="868680"/>
           </a:xfrm>
           <a:prstGeom prst="rect">
             <a:avLst/>
@@ -16454,7 +16415,7 @@
                 </a:solidFill>
                 <a:latin typeface="Arial"/>
               </a:rPr>
-              <a:t>ĐỀ MINH HỌA · PHẦN II · CÂU 3</a:t>
+              <a:t>ĐỀ MINH HỌA · PHẦN II · CÂU 2</a:t>
             </a:r>
           </a:p>
         </p:txBody>
@@ -16560,87 +16521,83 @@
           </a:bodyPr>
           <a:lstStyle/>
           <a:p>
-            <a:pPr algn="l" marL="365760" indent="-365760">
+            <a:pPr algn="l">
               <a:spcAft>
                 <a:spcPts val="800"/>
               </a:spcAft>
-              <a:buClr>
-                <a:srgbClr val="1E40AF"/>
-              </a:buClr>
-              <a:buFont typeface="Arial"/>
-              <a:buChar char="•"/>
             </a:pPr>
             <a:r>
-              <a:rPr sz="2000">
+              <a:rPr sz="2000" b="1">
                 <a:solidFill>
                   <a:srgbClr val="1E293B"/>
                 </a:solidFill>
                 <a:latin typeface="Calibri"/>
               </a:rPr>
-              <a:t>a) Đúng: Không có cây.</a:t>
-            </a:r>
-          </a:p>
-          <a:p>
-            <a:pPr algn="l" marL="365760" indent="-365760">
+              <a:t>Bảng 2.2 (SGK): Tổng lượng chất khoáng cây dưa chuột hấp thụ (mg/kg chất khô) – ở 10 °C: N 13,48; K 18,98; P 7,45; ở 20 °C: N 21,47; K 20,97; P 15,23.</a:t>
+            </a:r>
+          </a:p>
+          <a:p>
+            <a:pPr algn="l">
               <a:spcAft>
                 <a:spcPts val="800"/>
               </a:spcAft>
-              <a:buClr>
-                <a:srgbClr val="1E40AF"/>
-              </a:buClr>
-              <a:buFont typeface="Arial"/>
-              <a:buChar char="•"/>
             </a:pPr>
             <a:r>
-              <a:rPr sz="2000">
+              <a:rPr sz="2000" b="1">
                 <a:solidFill>
                   <a:srgbClr val="1E293B"/>
                 </a:solidFill>
                 <a:latin typeface="Calibri"/>
               </a:rPr>
-              <a:t>b) Đúng: Có thoát hơi nước ở lá tạo lực kéo.</a:t>
-            </a:r>
-          </a:p>
-          <a:p>
-            <a:pPr algn="l" marL="365760" indent="-365760">
+              <a:t>a) Ở 20 °C, cây hấp thụ cả N, K, P nhiều hơn ở 10 °C.</a:t>
+            </a:r>
+          </a:p>
+          <a:p>
+            <a:pPr algn="l">
               <a:spcAft>
                 <a:spcPts val="800"/>
               </a:spcAft>
-              <a:buClr>
-                <a:srgbClr val="1E40AF"/>
-              </a:buClr>
-              <a:buFont typeface="Arial"/>
-              <a:buChar char="•"/>
             </a:pPr>
             <a:r>
-              <a:rPr sz="2000">
+              <a:rPr sz="2000" b="1">
                 <a:solidFill>
                   <a:srgbClr val="1E293B"/>
                 </a:solidFill>
                 <a:latin typeface="Calibri"/>
               </a:rPr>
-              <a:t>c) Sai: Giọt dầu ngăn bay hơi; ống 3 gần như không đổi.</a:t>
-            </a:r>
-          </a:p>
-          <a:p>
-            <a:pPr algn="l" marL="365760" indent="-365760">
+              <a:t>b) Lượng P hấp thụ ở 20 °C gấp hơn 2 lần ở 10 °C.</a:t>
+            </a:r>
+          </a:p>
+          <a:p>
+            <a:pPr algn="l">
               <a:spcAft>
                 <a:spcPts val="800"/>
               </a:spcAft>
-              <a:buClr>
-                <a:srgbClr val="1E40AF"/>
-              </a:buClr>
-              <a:buFont typeface="Arial"/>
-              <a:buChar char="•"/>
             </a:pPr>
             <a:r>
-              <a:rPr sz="2000">
+              <a:rPr sz="2000" b="1">
                 <a:solidFill>
                   <a:srgbClr val="1E293B"/>
                 </a:solidFill>
                 <a:latin typeface="Calibri"/>
               </a:rPr>
-              <a:t>d) Đúng: Kết hợp kết quả 3 ống.</a:t>
+              <a:t>c) Nhiệt độ tăng càng cao thì hấp thụ khoáng luôn càng tăng, kể cả trên 45 °C.</a:t>
+            </a:r>
+          </a:p>
+          <a:p>
+            <a:pPr algn="l">
+              <a:spcAft>
+                <a:spcPts val="800"/>
+              </a:spcAft>
+            </a:pPr>
+            <a:r>
+              <a:rPr sz="2000" b="1">
+                <a:solidFill>
+                  <a:srgbClr val="1E293B"/>
+                </a:solidFill>
+                <a:latin typeface="Calibri"/>
+              </a:rPr>
+              <a:t>d) Ủ ấm gốc cây bằng rơm rạ vào mùa lạnh giúp tăng khả năng hút khoáng của rễ.</a:t>
             </a:r>
           </a:p>
         </p:txBody>
@@ -16723,14 +16680,14 @@
         </p:nvSpPr>
         <p:spPr>
           <a:xfrm>
-            <a:off x="10701223" y="457200"/>
-            <a:ext cx="941832" cy="457200"/>
+            <a:off x="10463479" y="457200"/>
+            <a:ext cx="1179576" cy="457200"/>
           </a:xfrm>
           <a:prstGeom prst="roundRect">
             <a:avLst/>
           </a:prstGeom>
           <a:solidFill>
-            <a:srgbClr val="1E40AF"/>
+            <a:srgbClr val="991B1B"/>
           </a:solidFill>
           <a:ln>
             <a:noFill/>
@@ -16763,7 +16720,7 @@
                 </a:solidFill>
                 <a:latin typeface="Arial"/>
               </a:rPr>
-              <a:t>ĐỀ BÀI</a:t>
+              <a:t>LỜI GIẢI</a:t>
             </a:r>
           </a:p>
         </p:txBody>
@@ -16777,7 +16734,7 @@
         <p:spPr>
           <a:xfrm>
             <a:off x="731520" y="274320"/>
-            <a:ext cx="10030968" cy="868680"/>
+            <a:ext cx="9793224" cy="868680"/>
           </a:xfrm>
           <a:prstGeom prst="rect">
             <a:avLst/>
@@ -16797,7 +16754,7 @@
                 </a:solidFill>
                 <a:latin typeface="Arial"/>
               </a:rPr>
-              <a:t>ĐỀ MINH HỌA · PHẦN II · CÂU 4</a:t>
+              <a:t>ĐỀ MINH HỌA · PHẦN II · CÂU 2</a:t>
             </a:r>
           </a:p>
         </p:txBody>
@@ -16903,83 +16860,87 @@
           </a:bodyPr>
           <a:lstStyle/>
           <a:p>
-            <a:pPr algn="l">
+            <a:pPr algn="l" marL="365760" indent="-365760">
               <a:spcAft>
                 <a:spcPts val="800"/>
               </a:spcAft>
+              <a:buClr>
+                <a:srgbClr val="1E40AF"/>
+              </a:buClr>
+              <a:buFont typeface="Arial"/>
+              <a:buChar char="•"/>
             </a:pPr>
             <a:r>
-              <a:rPr sz="2000" b="1">
+              <a:rPr sz="2000">
                 <a:solidFill>
                   <a:srgbClr val="1E293B"/>
                 </a:solidFill>
                 <a:latin typeface="Calibri"/>
               </a:rPr>
-              <a:t>Đồ thị Hình 4.8 (SGK): cường độ quang hợp tăng khi nồng độ CO₂ tăng từ điểm A đến điểm B, sau B cường độ quang hợp không tăng.</a:t>
-            </a:r>
-          </a:p>
-          <a:p>
-            <a:pPr algn="l">
+              <a:t>a) Đúng: Đọc trực tiếp bảng số liệu.</a:t>
+            </a:r>
+          </a:p>
+          <a:p>
+            <a:pPr algn="l" marL="365760" indent="-365760">
               <a:spcAft>
                 <a:spcPts val="800"/>
               </a:spcAft>
+              <a:buClr>
+                <a:srgbClr val="1E40AF"/>
+              </a:buClr>
+              <a:buFont typeface="Arial"/>
+              <a:buChar char="•"/>
             </a:pPr>
             <a:r>
-              <a:rPr sz="2000" b="1">
+              <a:rPr sz="2000">
                 <a:solidFill>
                   <a:srgbClr val="1E293B"/>
                 </a:solidFill>
                 <a:latin typeface="Calibri"/>
               </a:rPr>
-              <a:t>a) Điểm A là điểm bù CO₂.</a:t>
-            </a:r>
-          </a:p>
-          <a:p>
-            <a:pPr algn="l">
+              <a:t>b) Đúng: 15,23 : 7,45 ≈ 2,04.</a:t>
+            </a:r>
+          </a:p>
+          <a:p>
+            <a:pPr algn="l" marL="365760" indent="-365760">
               <a:spcAft>
                 <a:spcPts val="800"/>
               </a:spcAft>
+              <a:buClr>
+                <a:srgbClr val="1E40AF"/>
+              </a:buClr>
+              <a:buFont typeface="Arial"/>
+              <a:buChar char="•"/>
             </a:pPr>
             <a:r>
-              <a:rPr sz="2000" b="1">
+              <a:rPr sz="2000">
                 <a:solidFill>
                   <a:srgbClr val="1E293B"/>
                 </a:solidFill>
                 <a:latin typeface="Calibri"/>
               </a:rPr>
-              <a:t>b) Điểm B là điểm bão hoà CO₂.</a:t>
-            </a:r>
-          </a:p>
-          <a:p>
-            <a:pPr algn="l">
+              <a:t>c) Sai: Trên 45 °C lông hút có thể tổn thương, hấp thụ giảm hoặc dừng.</a:t>
+            </a:r>
+          </a:p>
+          <a:p>
+            <a:pPr algn="l" marL="365760" indent="-365760">
               <a:spcAft>
                 <a:spcPts val="800"/>
               </a:spcAft>
+              <a:buClr>
+                <a:srgbClr val="1E40AF"/>
+              </a:buClr>
+              <a:buFont typeface="Arial"/>
+              <a:buChar char="•"/>
             </a:pPr>
             <a:r>
-              <a:rPr sz="2000" b="1">
+              <a:rPr sz="2000">
                 <a:solidFill>
                   <a:srgbClr val="1E293B"/>
                 </a:solidFill>
                 <a:latin typeface="Calibri"/>
               </a:rPr>
-              <a:t>c) Nồng độ CO₂ càng cao thì cây càng sinh trưởng tốt, không có giới hạn.</a:t>
-            </a:r>
-          </a:p>
-          <a:p>
-            <a:pPr algn="l">
-              <a:spcAft>
-                <a:spcPts val="800"/>
-              </a:spcAft>
-            </a:pPr>
-            <a:r>
-              <a:rPr sz="2000" b="1">
-                <a:solidFill>
-                  <a:srgbClr val="1E293B"/>
-                </a:solidFill>
-                <a:latin typeface="Calibri"/>
-              </a:rPr>
-              <a:t>d) Điểm bù CO₂ của thực vật C₄ thấp hơn thực vật C₃.</a:t>
+              <a:t>d) Đúng: SGK mục IV.2.</a:t>
             </a:r>
           </a:p>
         </p:txBody>
@@ -17322,6 +17283,345 @@
         </p:nvSpPr>
         <p:spPr>
           <a:xfrm>
+            <a:off x="10701223" y="457200"/>
+            <a:ext cx="941832" cy="457200"/>
+          </a:xfrm>
+          <a:prstGeom prst="roundRect">
+            <a:avLst/>
+          </a:prstGeom>
+          <a:solidFill>
+            <a:srgbClr val="1E40AF"/>
+          </a:solidFill>
+          <a:ln>
+            <a:noFill/>
+          </a:ln>
+          <a:effectLst/>
+        </p:spPr>
+        <p:style>
+          <a:lnRef idx="1">
+            <a:schemeClr val="accent1"/>
+          </a:lnRef>
+          <a:fillRef idx="3">
+            <a:schemeClr val="accent1"/>
+          </a:fillRef>
+          <a:effectRef idx="2">
+            <a:schemeClr val="accent1"/>
+          </a:effectRef>
+          <a:fontRef idx="minor">
+            <a:schemeClr val="lt1"/>
+          </a:fontRef>
+        </p:style>
+        <p:txBody>
+          <a:bodyPr rtlCol="0" anchor="ctr" tIns="0" bIns="0"/>
+          <a:lstStyle/>
+          <a:p>
+            <a:pPr algn="ctr"/>
+            <a:r>
+              <a:rPr sz="1400" b="1">
+                <a:solidFill>
+                  <a:srgbClr val="FFFFFF"/>
+                </a:solidFill>
+                <a:latin typeface="Arial"/>
+              </a:rPr>
+              <a:t>ĐỀ BÀI</a:t>
+            </a:r>
+          </a:p>
+        </p:txBody>
+      </p:sp>
+      <p:sp>
+        <p:nvSpPr>
+          <p:cNvPr id="4" name="TextBox 3"/>
+          <p:cNvSpPr txBox="1"/>
+          <p:nvPr/>
+        </p:nvSpPr>
+        <p:spPr>
+          <a:xfrm>
+            <a:off x="731520" y="274320"/>
+            <a:ext cx="10030968" cy="868680"/>
+          </a:xfrm>
+          <a:prstGeom prst="rect">
+            <a:avLst/>
+          </a:prstGeom>
+          <a:noFill/>
+        </p:spPr>
+        <p:txBody>
+          <a:bodyPr wrap="square" anchor="ctr">
+            <a:spAutoFit/>
+          </a:bodyPr>
+          <a:lstStyle/>
+          <a:p>
+            <a:r>
+              <a:rPr sz="3600" b="1">
+                <a:solidFill>
+                  <a:srgbClr val="1E40AF"/>
+                </a:solidFill>
+                <a:latin typeface="Arial"/>
+              </a:rPr>
+              <a:t>ĐỀ MINH HỌA · PHẦN II · CÂU 3</a:t>
+            </a:r>
+          </a:p>
+        </p:txBody>
+      </p:sp>
+      <p:sp>
+        <p:nvSpPr>
+          <p:cNvPr id="5" name="Rectangle 4"/>
+          <p:cNvSpPr/>
+          <p:nvPr/>
+        </p:nvSpPr>
+        <p:spPr>
+          <a:xfrm>
+            <a:off x="457200" y="1207008"/>
+            <a:ext cx="11274552" cy="22000"/>
+          </a:xfrm>
+          <a:prstGeom prst="rect">
+            <a:avLst/>
+          </a:prstGeom>
+          <a:solidFill>
+            <a:srgbClr val="E2E8F0"/>
+          </a:solidFill>
+          <a:ln>
+            <a:noFill/>
+          </a:ln>
+          <a:effectLst/>
+        </p:spPr>
+        <p:style>
+          <a:lnRef idx="1">
+            <a:schemeClr val="accent1"/>
+          </a:lnRef>
+          <a:fillRef idx="3">
+            <a:schemeClr val="accent1"/>
+          </a:fillRef>
+          <a:effectRef idx="2">
+            <a:schemeClr val="accent1"/>
+          </a:effectRef>
+          <a:fontRef idx="minor">
+            <a:schemeClr val="lt1"/>
+          </a:fontRef>
+        </p:style>
+        <p:txBody>
+          <a:bodyPr rtlCol="0" anchor="ctr"/>
+          <a:lstStyle/>
+          <a:p>
+            <a:pPr algn="ctr"/>
+          </a:p>
+        </p:txBody>
+      </p:sp>
+      <p:sp>
+        <p:nvSpPr>
+          <p:cNvPr id="6" name="TextBox 5"/>
+          <p:cNvSpPr txBox="1"/>
+          <p:nvPr/>
+        </p:nvSpPr>
+        <p:spPr>
+          <a:xfrm>
+            <a:off x="457200" y="6355080"/>
+            <a:ext cx="11274552" cy="365760"/>
+          </a:xfrm>
+          <a:prstGeom prst="rect">
+            <a:avLst/>
+          </a:prstGeom>
+          <a:noFill/>
+        </p:spPr>
+        <p:txBody>
+          <a:bodyPr wrap="none">
+            <a:spAutoFit/>
+          </a:bodyPr>
+          <a:lstStyle/>
+          <a:p>
+            <a:pPr algn="r"/>
+            <a:r>
+              <a:rPr sz="1200">
+                <a:solidFill>
+                  <a:srgbClr val="64748B"/>
+                </a:solidFill>
+                <a:latin typeface="Calibri"/>
+              </a:rPr>
+              <a:t>Đề cương Sinh học 11 · Giữa học kì I          50</a:t>
+            </a:r>
+          </a:p>
+        </p:txBody>
+      </p:sp>
+      <p:sp>
+        <p:nvSpPr>
+          <p:cNvPr id="7" name="TextBox 6"/>
+          <p:cNvSpPr txBox="1"/>
+          <p:nvPr/>
+        </p:nvSpPr>
+        <p:spPr>
+          <a:xfrm>
+            <a:off x="731520" y="1463040"/>
+            <a:ext cx="10789920" cy="4754880"/>
+          </a:xfrm>
+          <a:prstGeom prst="rect">
+            <a:avLst/>
+          </a:prstGeom>
+          <a:noFill/>
+        </p:spPr>
+        <p:txBody>
+          <a:bodyPr wrap="square" anchor="t" lIns="45720" rIns="45720">
+            <a:spAutoFit/>
+          </a:bodyPr>
+          <a:lstStyle/>
+          <a:p>
+            <a:pPr algn="l">
+              <a:spcAft>
+                <a:spcPts val="800"/>
+              </a:spcAft>
+            </a:pPr>
+            <a:r>
+              <a:rPr sz="2000" b="1">
+                <a:solidFill>
+                  <a:srgbClr val="1E293B"/>
+                </a:solidFill>
+                <a:latin typeface="Calibri"/>
+              </a:rPr>
+              <a:t>Bố trí 3 ống nghiệm: ống 1 có cây còn đủ lá, ống 2 có cây đã ngắt hết lá, ống 3 không có cây (cùng mực nước, có giọt dầu). Sau 1 giờ quan sát mực nước.</a:t>
+            </a:r>
+          </a:p>
+          <a:p>
+            <a:pPr algn="l">
+              <a:spcAft>
+                <a:spcPts val="800"/>
+              </a:spcAft>
+            </a:pPr>
+            <a:r>
+              <a:rPr sz="2000" b="1">
+                <a:solidFill>
+                  <a:srgbClr val="1E293B"/>
+                </a:solidFill>
+                <a:latin typeface="Calibri"/>
+              </a:rPr>
+              <a:t>a) Ống 3 là ống đối chứng.</a:t>
+            </a:r>
+          </a:p>
+          <a:p>
+            <a:pPr algn="l">
+              <a:spcAft>
+                <a:spcPts val="800"/>
+              </a:spcAft>
+            </a:pPr>
+            <a:r>
+              <a:rPr sz="2000" b="1">
+                <a:solidFill>
+                  <a:srgbClr val="1E293B"/>
+                </a:solidFill>
+                <a:latin typeface="Calibri"/>
+              </a:rPr>
+              <a:t>b) Mực nước ở ống 1 giảm nhiều hơn ống 2.</a:t>
+            </a:r>
+          </a:p>
+          <a:p>
+            <a:pPr algn="l">
+              <a:spcAft>
+                <a:spcPts val="800"/>
+              </a:spcAft>
+            </a:pPr>
+            <a:r>
+              <a:rPr sz="2000" b="1">
+                <a:solidFill>
+                  <a:srgbClr val="1E293B"/>
+                </a:solidFill>
+                <a:latin typeface="Calibri"/>
+              </a:rPr>
+              <a:t>c) Mực nước ở ống 3 giảm nhiều nhất vì nước bay hơi.</a:t>
+            </a:r>
+          </a:p>
+          <a:p>
+            <a:pPr algn="l">
+              <a:spcAft>
+                <a:spcPts val="800"/>
+              </a:spcAft>
+            </a:pPr>
+            <a:r>
+              <a:rPr sz="2000" b="1">
+                <a:solidFill>
+                  <a:srgbClr val="1E293B"/>
+                </a:solidFill>
+                <a:latin typeface="Calibri"/>
+              </a:rPr>
+              <a:t>d) Thí nghiệm chứng minh rễ hấp thụ nước và thoát hơi nước ở lá là động lực của quá trình đó.</a:t>
+            </a:r>
+          </a:p>
+        </p:txBody>
+      </p:sp>
+    </p:spTree>
+  </p:cSld>
+  <p:clrMapOvr>
+    <a:masterClrMapping/>
+  </p:clrMapOvr>
+</p:sld>
+</file>
+
+<file path=ppt/slides/slide51.xml><?xml version="1.0" encoding="utf-8"?>
+<p:sld xmlns:a="http://schemas.openxmlformats.org/drawingml/2006/main" xmlns:p="http://schemas.openxmlformats.org/presentationml/2006/main" xmlns:r="http://schemas.openxmlformats.org/officeDocument/2006/relationships">
+  <p:cSld>
+    <p:bg>
+      <p:bgPr>
+        <a:solidFill>
+          <a:srgbClr val="FFFFFF"/>
+        </a:solidFill>
+        <a:effectLst/>
+      </p:bgPr>
+    </p:bg>
+    <p:spTree>
+      <p:nvGrpSpPr>
+        <p:cNvPr id="1" name=""/>
+        <p:cNvGrpSpPr/>
+        <p:nvPr/>
+      </p:nvGrpSpPr>
+      <p:grpSpPr/>
+      <p:sp>
+        <p:nvSpPr>
+          <p:cNvPr id="2" name="Rectangle 1"/>
+          <p:cNvSpPr/>
+          <p:nvPr/>
+        </p:nvSpPr>
+        <p:spPr>
+          <a:xfrm>
+            <a:off x="457200" y="384048"/>
+            <a:ext cx="109728" cy="658368"/>
+          </a:xfrm>
+          <a:prstGeom prst="rect">
+            <a:avLst/>
+          </a:prstGeom>
+          <a:solidFill>
+            <a:srgbClr val="1E40AF"/>
+          </a:solidFill>
+          <a:ln>
+            <a:noFill/>
+          </a:ln>
+          <a:effectLst/>
+        </p:spPr>
+        <p:style>
+          <a:lnRef idx="1">
+            <a:schemeClr val="accent1"/>
+          </a:lnRef>
+          <a:fillRef idx="3">
+            <a:schemeClr val="accent1"/>
+          </a:fillRef>
+          <a:effectRef idx="2">
+            <a:schemeClr val="accent1"/>
+          </a:effectRef>
+          <a:fontRef idx="minor">
+            <a:schemeClr val="lt1"/>
+          </a:fontRef>
+        </p:style>
+        <p:txBody>
+          <a:bodyPr rtlCol="0" anchor="ctr"/>
+          <a:lstStyle/>
+          <a:p>
+            <a:pPr algn="ctr"/>
+          </a:p>
+        </p:txBody>
+      </p:sp>
+      <p:sp>
+        <p:nvSpPr>
+          <p:cNvPr id="3" name="Rounded Rectangle 2"/>
+          <p:cNvSpPr/>
+          <p:nvPr/>
+        </p:nvSpPr>
+        <p:spPr>
+          <a:xfrm>
             <a:off x="10463479" y="457200"/>
             <a:ext cx="1179576" cy="457200"/>
           </a:xfrm>
@@ -17396,7 +17696,7 @@
                 </a:solidFill>
                 <a:latin typeface="Arial"/>
               </a:rPr>
-              <a:t>ĐỀ MINH HỌA · PHẦN II · CÂU 4</a:t>
+              <a:t>ĐỀ MINH HỌA · PHẦN II · CÂU 3</a:t>
             </a:r>
           </a:p>
         </p:txBody>
@@ -17475,7 +17775,689 @@
                 </a:solidFill>
                 <a:latin typeface="Calibri"/>
               </a:rPr>
-              <a:t>Đề cương Sinh học 11 · Giữa học kì I          50</a:t>
+              <a:t>Đề cương Sinh học 11 · Giữa học kì I          51</a:t>
+            </a:r>
+          </a:p>
+        </p:txBody>
+      </p:sp>
+      <p:sp>
+        <p:nvSpPr>
+          <p:cNvPr id="7" name="TextBox 6"/>
+          <p:cNvSpPr txBox="1"/>
+          <p:nvPr/>
+        </p:nvSpPr>
+        <p:spPr>
+          <a:xfrm>
+            <a:off x="731520" y="1463040"/>
+            <a:ext cx="10789920" cy="4754880"/>
+          </a:xfrm>
+          <a:prstGeom prst="rect">
+            <a:avLst/>
+          </a:prstGeom>
+          <a:noFill/>
+        </p:spPr>
+        <p:txBody>
+          <a:bodyPr wrap="square" anchor="t" lIns="45720" rIns="45720">
+            <a:spAutoFit/>
+          </a:bodyPr>
+          <a:lstStyle/>
+          <a:p>
+            <a:pPr algn="l" marL="365760" indent="-365760">
+              <a:spcAft>
+                <a:spcPts val="800"/>
+              </a:spcAft>
+              <a:buClr>
+                <a:srgbClr val="1E40AF"/>
+              </a:buClr>
+              <a:buFont typeface="Arial"/>
+              <a:buChar char="•"/>
+            </a:pPr>
+            <a:r>
+              <a:rPr sz="2000">
+                <a:solidFill>
+                  <a:srgbClr val="1E293B"/>
+                </a:solidFill>
+                <a:latin typeface="Calibri"/>
+              </a:rPr>
+              <a:t>a) Đúng: Không có cây.</a:t>
+            </a:r>
+          </a:p>
+          <a:p>
+            <a:pPr algn="l" marL="365760" indent="-365760">
+              <a:spcAft>
+                <a:spcPts val="800"/>
+              </a:spcAft>
+              <a:buClr>
+                <a:srgbClr val="1E40AF"/>
+              </a:buClr>
+              <a:buFont typeface="Arial"/>
+              <a:buChar char="•"/>
+            </a:pPr>
+            <a:r>
+              <a:rPr sz="2000">
+                <a:solidFill>
+                  <a:srgbClr val="1E293B"/>
+                </a:solidFill>
+                <a:latin typeface="Calibri"/>
+              </a:rPr>
+              <a:t>b) Đúng: Có thoát hơi nước ở lá tạo lực kéo.</a:t>
+            </a:r>
+          </a:p>
+          <a:p>
+            <a:pPr algn="l" marL="365760" indent="-365760">
+              <a:spcAft>
+                <a:spcPts val="800"/>
+              </a:spcAft>
+              <a:buClr>
+                <a:srgbClr val="1E40AF"/>
+              </a:buClr>
+              <a:buFont typeface="Arial"/>
+              <a:buChar char="•"/>
+            </a:pPr>
+            <a:r>
+              <a:rPr sz="2000">
+                <a:solidFill>
+                  <a:srgbClr val="1E293B"/>
+                </a:solidFill>
+                <a:latin typeface="Calibri"/>
+              </a:rPr>
+              <a:t>c) Sai: Giọt dầu ngăn bay hơi; ống 3 gần như không đổi.</a:t>
+            </a:r>
+          </a:p>
+          <a:p>
+            <a:pPr algn="l" marL="365760" indent="-365760">
+              <a:spcAft>
+                <a:spcPts val="800"/>
+              </a:spcAft>
+              <a:buClr>
+                <a:srgbClr val="1E40AF"/>
+              </a:buClr>
+              <a:buFont typeface="Arial"/>
+              <a:buChar char="•"/>
+            </a:pPr>
+            <a:r>
+              <a:rPr sz="2000">
+                <a:solidFill>
+                  <a:srgbClr val="1E293B"/>
+                </a:solidFill>
+                <a:latin typeface="Calibri"/>
+              </a:rPr>
+              <a:t>d) Đúng: Kết hợp kết quả 3 ống.</a:t>
+            </a:r>
+          </a:p>
+        </p:txBody>
+      </p:sp>
+    </p:spTree>
+  </p:cSld>
+  <p:clrMapOvr>
+    <a:masterClrMapping/>
+  </p:clrMapOvr>
+</p:sld>
+</file>
+
+<file path=ppt/slides/slide52.xml><?xml version="1.0" encoding="utf-8"?>
+<p:sld xmlns:a="http://schemas.openxmlformats.org/drawingml/2006/main" xmlns:p="http://schemas.openxmlformats.org/presentationml/2006/main" xmlns:r="http://schemas.openxmlformats.org/officeDocument/2006/relationships">
+  <p:cSld>
+    <p:bg>
+      <p:bgPr>
+        <a:solidFill>
+          <a:srgbClr val="FFFFFF"/>
+        </a:solidFill>
+        <a:effectLst/>
+      </p:bgPr>
+    </p:bg>
+    <p:spTree>
+      <p:nvGrpSpPr>
+        <p:cNvPr id="1" name=""/>
+        <p:cNvGrpSpPr/>
+        <p:nvPr/>
+      </p:nvGrpSpPr>
+      <p:grpSpPr/>
+      <p:sp>
+        <p:nvSpPr>
+          <p:cNvPr id="2" name="Rectangle 1"/>
+          <p:cNvSpPr/>
+          <p:nvPr/>
+        </p:nvSpPr>
+        <p:spPr>
+          <a:xfrm>
+            <a:off x="457200" y="384048"/>
+            <a:ext cx="109728" cy="658368"/>
+          </a:xfrm>
+          <a:prstGeom prst="rect">
+            <a:avLst/>
+          </a:prstGeom>
+          <a:solidFill>
+            <a:srgbClr val="1E40AF"/>
+          </a:solidFill>
+          <a:ln>
+            <a:noFill/>
+          </a:ln>
+          <a:effectLst/>
+        </p:spPr>
+        <p:style>
+          <a:lnRef idx="1">
+            <a:schemeClr val="accent1"/>
+          </a:lnRef>
+          <a:fillRef idx="3">
+            <a:schemeClr val="accent1"/>
+          </a:fillRef>
+          <a:effectRef idx="2">
+            <a:schemeClr val="accent1"/>
+          </a:effectRef>
+          <a:fontRef idx="minor">
+            <a:schemeClr val="lt1"/>
+          </a:fontRef>
+        </p:style>
+        <p:txBody>
+          <a:bodyPr rtlCol="0" anchor="ctr"/>
+          <a:lstStyle/>
+          <a:p>
+            <a:pPr algn="ctr"/>
+          </a:p>
+        </p:txBody>
+      </p:sp>
+      <p:sp>
+        <p:nvSpPr>
+          <p:cNvPr id="3" name="Rounded Rectangle 2"/>
+          <p:cNvSpPr/>
+          <p:nvPr/>
+        </p:nvSpPr>
+        <p:spPr>
+          <a:xfrm>
+            <a:off x="10701223" y="457200"/>
+            <a:ext cx="941832" cy="457200"/>
+          </a:xfrm>
+          <a:prstGeom prst="roundRect">
+            <a:avLst/>
+          </a:prstGeom>
+          <a:solidFill>
+            <a:srgbClr val="1E40AF"/>
+          </a:solidFill>
+          <a:ln>
+            <a:noFill/>
+          </a:ln>
+          <a:effectLst/>
+        </p:spPr>
+        <p:style>
+          <a:lnRef idx="1">
+            <a:schemeClr val="accent1"/>
+          </a:lnRef>
+          <a:fillRef idx="3">
+            <a:schemeClr val="accent1"/>
+          </a:fillRef>
+          <a:effectRef idx="2">
+            <a:schemeClr val="accent1"/>
+          </a:effectRef>
+          <a:fontRef idx="minor">
+            <a:schemeClr val="lt1"/>
+          </a:fontRef>
+        </p:style>
+        <p:txBody>
+          <a:bodyPr rtlCol="0" anchor="ctr" tIns="0" bIns="0"/>
+          <a:lstStyle/>
+          <a:p>
+            <a:pPr algn="ctr"/>
+            <a:r>
+              <a:rPr sz="1400" b="1">
+                <a:solidFill>
+                  <a:srgbClr val="FFFFFF"/>
+                </a:solidFill>
+                <a:latin typeface="Arial"/>
+              </a:rPr>
+              <a:t>ĐỀ BÀI</a:t>
+            </a:r>
+          </a:p>
+        </p:txBody>
+      </p:sp>
+      <p:sp>
+        <p:nvSpPr>
+          <p:cNvPr id="4" name="TextBox 3"/>
+          <p:cNvSpPr txBox="1"/>
+          <p:nvPr/>
+        </p:nvSpPr>
+        <p:spPr>
+          <a:xfrm>
+            <a:off x="731520" y="274320"/>
+            <a:ext cx="10030968" cy="868680"/>
+          </a:xfrm>
+          <a:prstGeom prst="rect">
+            <a:avLst/>
+          </a:prstGeom>
+          <a:noFill/>
+        </p:spPr>
+        <p:txBody>
+          <a:bodyPr wrap="square" anchor="ctr">
+            <a:spAutoFit/>
+          </a:bodyPr>
+          <a:lstStyle/>
+          <a:p>
+            <a:r>
+              <a:rPr sz="3600" b="1">
+                <a:solidFill>
+                  <a:srgbClr val="1E40AF"/>
+                </a:solidFill>
+                <a:latin typeface="Arial"/>
+              </a:rPr>
+              <a:t>ĐỀ MINH HỌA · PHẦN II · CÂU 4</a:t>
+            </a:r>
+          </a:p>
+        </p:txBody>
+      </p:sp>
+      <p:sp>
+        <p:nvSpPr>
+          <p:cNvPr id="5" name="Rectangle 4"/>
+          <p:cNvSpPr/>
+          <p:nvPr/>
+        </p:nvSpPr>
+        <p:spPr>
+          <a:xfrm>
+            <a:off x="457200" y="1207008"/>
+            <a:ext cx="11274552" cy="22000"/>
+          </a:xfrm>
+          <a:prstGeom prst="rect">
+            <a:avLst/>
+          </a:prstGeom>
+          <a:solidFill>
+            <a:srgbClr val="E2E8F0"/>
+          </a:solidFill>
+          <a:ln>
+            <a:noFill/>
+          </a:ln>
+          <a:effectLst/>
+        </p:spPr>
+        <p:style>
+          <a:lnRef idx="1">
+            <a:schemeClr val="accent1"/>
+          </a:lnRef>
+          <a:fillRef idx="3">
+            <a:schemeClr val="accent1"/>
+          </a:fillRef>
+          <a:effectRef idx="2">
+            <a:schemeClr val="accent1"/>
+          </a:effectRef>
+          <a:fontRef idx="minor">
+            <a:schemeClr val="lt1"/>
+          </a:fontRef>
+        </p:style>
+        <p:txBody>
+          <a:bodyPr rtlCol="0" anchor="ctr"/>
+          <a:lstStyle/>
+          <a:p>
+            <a:pPr algn="ctr"/>
+          </a:p>
+        </p:txBody>
+      </p:sp>
+      <p:sp>
+        <p:nvSpPr>
+          <p:cNvPr id="6" name="TextBox 5"/>
+          <p:cNvSpPr txBox="1"/>
+          <p:nvPr/>
+        </p:nvSpPr>
+        <p:spPr>
+          <a:xfrm>
+            <a:off x="457200" y="6355080"/>
+            <a:ext cx="11274552" cy="365760"/>
+          </a:xfrm>
+          <a:prstGeom prst="rect">
+            <a:avLst/>
+          </a:prstGeom>
+          <a:noFill/>
+        </p:spPr>
+        <p:txBody>
+          <a:bodyPr wrap="none">
+            <a:spAutoFit/>
+          </a:bodyPr>
+          <a:lstStyle/>
+          <a:p>
+            <a:pPr algn="r"/>
+            <a:r>
+              <a:rPr sz="1200">
+                <a:solidFill>
+                  <a:srgbClr val="64748B"/>
+                </a:solidFill>
+                <a:latin typeface="Calibri"/>
+              </a:rPr>
+              <a:t>Đề cương Sinh học 11 · Giữa học kì I          52</a:t>
+            </a:r>
+          </a:p>
+        </p:txBody>
+      </p:sp>
+      <p:sp>
+        <p:nvSpPr>
+          <p:cNvPr id="7" name="TextBox 6"/>
+          <p:cNvSpPr txBox="1"/>
+          <p:nvPr/>
+        </p:nvSpPr>
+        <p:spPr>
+          <a:xfrm>
+            <a:off x="731520" y="1463040"/>
+            <a:ext cx="10789920" cy="4754880"/>
+          </a:xfrm>
+          <a:prstGeom prst="rect">
+            <a:avLst/>
+          </a:prstGeom>
+          <a:noFill/>
+        </p:spPr>
+        <p:txBody>
+          <a:bodyPr wrap="square" anchor="t" lIns="45720" rIns="45720">
+            <a:spAutoFit/>
+          </a:bodyPr>
+          <a:lstStyle/>
+          <a:p>
+            <a:pPr algn="l">
+              <a:spcAft>
+                <a:spcPts val="800"/>
+              </a:spcAft>
+            </a:pPr>
+            <a:r>
+              <a:rPr sz="2000" b="1">
+                <a:solidFill>
+                  <a:srgbClr val="1E293B"/>
+                </a:solidFill>
+                <a:latin typeface="Calibri"/>
+              </a:rPr>
+              <a:t>Đồ thị Hình 4.8 (SGK): cường độ quang hợp tăng khi nồng độ CO₂ tăng từ điểm A đến điểm B, sau B cường độ quang hợp không tăng.</a:t>
+            </a:r>
+          </a:p>
+          <a:p>
+            <a:pPr algn="l">
+              <a:spcAft>
+                <a:spcPts val="800"/>
+              </a:spcAft>
+            </a:pPr>
+            <a:r>
+              <a:rPr sz="2000" b="1">
+                <a:solidFill>
+                  <a:srgbClr val="1E293B"/>
+                </a:solidFill>
+                <a:latin typeface="Calibri"/>
+              </a:rPr>
+              <a:t>a) Điểm A là điểm bù CO₂.</a:t>
+            </a:r>
+          </a:p>
+          <a:p>
+            <a:pPr algn="l">
+              <a:spcAft>
+                <a:spcPts val="800"/>
+              </a:spcAft>
+            </a:pPr>
+            <a:r>
+              <a:rPr sz="2000" b="1">
+                <a:solidFill>
+                  <a:srgbClr val="1E293B"/>
+                </a:solidFill>
+                <a:latin typeface="Calibri"/>
+              </a:rPr>
+              <a:t>b) Điểm B là điểm bão hoà CO₂.</a:t>
+            </a:r>
+          </a:p>
+          <a:p>
+            <a:pPr algn="l">
+              <a:spcAft>
+                <a:spcPts val="800"/>
+              </a:spcAft>
+            </a:pPr>
+            <a:r>
+              <a:rPr sz="2000" b="1">
+                <a:solidFill>
+                  <a:srgbClr val="1E293B"/>
+                </a:solidFill>
+                <a:latin typeface="Calibri"/>
+              </a:rPr>
+              <a:t>c) Nồng độ CO₂ càng cao thì cây càng sinh trưởng tốt, không có giới hạn.</a:t>
+            </a:r>
+          </a:p>
+          <a:p>
+            <a:pPr algn="l">
+              <a:spcAft>
+                <a:spcPts val="800"/>
+              </a:spcAft>
+            </a:pPr>
+            <a:r>
+              <a:rPr sz="2000" b="1">
+                <a:solidFill>
+                  <a:srgbClr val="1E293B"/>
+                </a:solidFill>
+                <a:latin typeface="Calibri"/>
+              </a:rPr>
+              <a:t>d) Điểm bù CO₂ của thực vật C₄ thấp hơn thực vật C₃.</a:t>
+            </a:r>
+          </a:p>
+        </p:txBody>
+      </p:sp>
+    </p:spTree>
+  </p:cSld>
+  <p:clrMapOvr>
+    <a:masterClrMapping/>
+  </p:clrMapOvr>
+</p:sld>
+</file>
+
+<file path=ppt/slides/slide53.xml><?xml version="1.0" encoding="utf-8"?>
+<p:sld xmlns:a="http://schemas.openxmlformats.org/drawingml/2006/main" xmlns:p="http://schemas.openxmlformats.org/presentationml/2006/main" xmlns:r="http://schemas.openxmlformats.org/officeDocument/2006/relationships">
+  <p:cSld>
+    <p:bg>
+      <p:bgPr>
+        <a:solidFill>
+          <a:srgbClr val="FFFFFF"/>
+        </a:solidFill>
+        <a:effectLst/>
+      </p:bgPr>
+    </p:bg>
+    <p:spTree>
+      <p:nvGrpSpPr>
+        <p:cNvPr id="1" name=""/>
+        <p:cNvGrpSpPr/>
+        <p:nvPr/>
+      </p:nvGrpSpPr>
+      <p:grpSpPr/>
+      <p:sp>
+        <p:nvSpPr>
+          <p:cNvPr id="2" name="Rectangle 1"/>
+          <p:cNvSpPr/>
+          <p:nvPr/>
+        </p:nvSpPr>
+        <p:spPr>
+          <a:xfrm>
+            <a:off x="457200" y="384048"/>
+            <a:ext cx="109728" cy="658368"/>
+          </a:xfrm>
+          <a:prstGeom prst="rect">
+            <a:avLst/>
+          </a:prstGeom>
+          <a:solidFill>
+            <a:srgbClr val="1E40AF"/>
+          </a:solidFill>
+          <a:ln>
+            <a:noFill/>
+          </a:ln>
+          <a:effectLst/>
+        </p:spPr>
+        <p:style>
+          <a:lnRef idx="1">
+            <a:schemeClr val="accent1"/>
+          </a:lnRef>
+          <a:fillRef idx="3">
+            <a:schemeClr val="accent1"/>
+          </a:fillRef>
+          <a:effectRef idx="2">
+            <a:schemeClr val="accent1"/>
+          </a:effectRef>
+          <a:fontRef idx="minor">
+            <a:schemeClr val="lt1"/>
+          </a:fontRef>
+        </p:style>
+        <p:txBody>
+          <a:bodyPr rtlCol="0" anchor="ctr"/>
+          <a:lstStyle/>
+          <a:p>
+            <a:pPr algn="ctr"/>
+          </a:p>
+        </p:txBody>
+      </p:sp>
+      <p:sp>
+        <p:nvSpPr>
+          <p:cNvPr id="3" name="Rounded Rectangle 2"/>
+          <p:cNvSpPr/>
+          <p:nvPr/>
+        </p:nvSpPr>
+        <p:spPr>
+          <a:xfrm>
+            <a:off x="10463479" y="457200"/>
+            <a:ext cx="1179576" cy="457200"/>
+          </a:xfrm>
+          <a:prstGeom prst="roundRect">
+            <a:avLst/>
+          </a:prstGeom>
+          <a:solidFill>
+            <a:srgbClr val="991B1B"/>
+          </a:solidFill>
+          <a:ln>
+            <a:noFill/>
+          </a:ln>
+          <a:effectLst/>
+        </p:spPr>
+        <p:style>
+          <a:lnRef idx="1">
+            <a:schemeClr val="accent1"/>
+          </a:lnRef>
+          <a:fillRef idx="3">
+            <a:schemeClr val="accent1"/>
+          </a:fillRef>
+          <a:effectRef idx="2">
+            <a:schemeClr val="accent1"/>
+          </a:effectRef>
+          <a:fontRef idx="minor">
+            <a:schemeClr val="lt1"/>
+          </a:fontRef>
+        </p:style>
+        <p:txBody>
+          <a:bodyPr rtlCol="0" anchor="ctr" tIns="0" bIns="0"/>
+          <a:lstStyle/>
+          <a:p>
+            <a:pPr algn="ctr"/>
+            <a:r>
+              <a:rPr sz="1400" b="1">
+                <a:solidFill>
+                  <a:srgbClr val="FFFFFF"/>
+                </a:solidFill>
+                <a:latin typeface="Arial"/>
+              </a:rPr>
+              <a:t>LỜI GIẢI</a:t>
+            </a:r>
+          </a:p>
+        </p:txBody>
+      </p:sp>
+      <p:sp>
+        <p:nvSpPr>
+          <p:cNvPr id="4" name="TextBox 3"/>
+          <p:cNvSpPr txBox="1"/>
+          <p:nvPr/>
+        </p:nvSpPr>
+        <p:spPr>
+          <a:xfrm>
+            <a:off x="731520" y="274320"/>
+            <a:ext cx="9793224" cy="868680"/>
+          </a:xfrm>
+          <a:prstGeom prst="rect">
+            <a:avLst/>
+          </a:prstGeom>
+          <a:noFill/>
+        </p:spPr>
+        <p:txBody>
+          <a:bodyPr wrap="square" anchor="ctr">
+            <a:spAutoFit/>
+          </a:bodyPr>
+          <a:lstStyle/>
+          <a:p>
+            <a:r>
+              <a:rPr sz="3600" b="1">
+                <a:solidFill>
+                  <a:srgbClr val="1E40AF"/>
+                </a:solidFill>
+                <a:latin typeface="Arial"/>
+              </a:rPr>
+              <a:t>ĐỀ MINH HỌA · PHẦN II · CÂU 4</a:t>
+            </a:r>
+          </a:p>
+        </p:txBody>
+      </p:sp>
+      <p:sp>
+        <p:nvSpPr>
+          <p:cNvPr id="5" name="Rectangle 4"/>
+          <p:cNvSpPr/>
+          <p:nvPr/>
+        </p:nvSpPr>
+        <p:spPr>
+          <a:xfrm>
+            <a:off x="457200" y="1207008"/>
+            <a:ext cx="11274552" cy="22000"/>
+          </a:xfrm>
+          <a:prstGeom prst="rect">
+            <a:avLst/>
+          </a:prstGeom>
+          <a:solidFill>
+            <a:srgbClr val="E2E8F0"/>
+          </a:solidFill>
+          <a:ln>
+            <a:noFill/>
+          </a:ln>
+          <a:effectLst/>
+        </p:spPr>
+        <p:style>
+          <a:lnRef idx="1">
+            <a:schemeClr val="accent1"/>
+          </a:lnRef>
+          <a:fillRef idx="3">
+            <a:schemeClr val="accent1"/>
+          </a:fillRef>
+          <a:effectRef idx="2">
+            <a:schemeClr val="accent1"/>
+          </a:effectRef>
+          <a:fontRef idx="minor">
+            <a:schemeClr val="lt1"/>
+          </a:fontRef>
+        </p:style>
+        <p:txBody>
+          <a:bodyPr rtlCol="0" anchor="ctr"/>
+          <a:lstStyle/>
+          <a:p>
+            <a:pPr algn="ctr"/>
+          </a:p>
+        </p:txBody>
+      </p:sp>
+      <p:sp>
+        <p:nvSpPr>
+          <p:cNvPr id="6" name="TextBox 5"/>
+          <p:cNvSpPr txBox="1"/>
+          <p:nvPr/>
+        </p:nvSpPr>
+        <p:spPr>
+          <a:xfrm>
+            <a:off x="457200" y="6355080"/>
+            <a:ext cx="11274552" cy="365760"/>
+          </a:xfrm>
+          <a:prstGeom prst="rect">
+            <a:avLst/>
+          </a:prstGeom>
+          <a:noFill/>
+        </p:spPr>
+        <p:txBody>
+          <a:bodyPr wrap="none">
+            <a:spAutoFit/>
+          </a:bodyPr>
+          <a:lstStyle/>
+          <a:p>
+            <a:pPr algn="r"/>
+            <a:r>
+              <a:rPr sz="1200">
+                <a:solidFill>
+                  <a:srgbClr val="64748B"/>
+                </a:solidFill>
+                <a:latin typeface="Calibri"/>
+              </a:rPr>
+              <a:t>Đề cương Sinh học 11 · Giữa học kì I          53</a:t>
             </a:r>
           </a:p>
         </p:txBody>
@@ -17925,14 +18907,14 @@
         </p:nvSpPr>
         <p:spPr>
           <a:xfrm>
-            <a:off x="10701223" y="457200"/>
-            <a:ext cx="941832" cy="457200"/>
+            <a:off x="10344607" y="457200"/>
+            <a:ext cx="1298448" cy="457200"/>
           </a:xfrm>
           <a:prstGeom prst="roundRect">
             <a:avLst/>
           </a:prstGeom>
           <a:solidFill>
-            <a:srgbClr val="1E40AF"/>
+            <a:srgbClr val="166534"/>
           </a:solidFill>
           <a:ln>
             <a:noFill/>
@@ -17965,7 +18947,7 @@
                 </a:solidFill>
                 <a:latin typeface="Arial"/>
               </a:rPr>
-              <a:t>ĐỀ BÀI</a:t>
+              <a:t>LÝ THUYẾT</a:t>
             </a:r>
           </a:p>
         </p:txBody>
@@ -17979,7 +18961,7 @@
         <p:spPr>
           <a:xfrm>
             <a:off x="731520" y="274320"/>
-            <a:ext cx="10030968" cy="868680"/>
+            <a:ext cx="9674352" cy="868680"/>
           </a:xfrm>
           <a:prstGeom prst="rect">
             <a:avLst/>
@@ -17999,7 +18981,7 @@
                 </a:solidFill>
                 <a:latin typeface="Arial"/>
               </a:rPr>
-              <a:t>ĐỀ MINH HỌA · PHẦN I · CÂU 1</a:t>
+              <a:t>BÀI 5: THỰC HÀNH: QUANG HỢP Ở THỰC VẬT · SƠ ĐỒ TƯ DUY</a:t>
             </a:r>
           </a:p>
         </p:txBody>
@@ -18083,109 +19065,30 @@
           </a:p>
         </p:txBody>
       </p:sp>
-      <p:sp>
-        <p:nvSpPr>
-          <p:cNvPr id="7" name="TextBox 6"/>
-          <p:cNvSpPr txBox="1"/>
-          <p:nvPr/>
-        </p:nvSpPr>
-        <p:spPr>
-          <a:xfrm>
-            <a:off x="731520" y="1463040"/>
-            <a:ext cx="10789920" cy="4754880"/>
-          </a:xfrm>
-          <a:prstGeom prst="rect">
-            <a:avLst/>
-          </a:prstGeom>
-          <a:noFill/>
-        </p:spPr>
-        <p:txBody>
-          <a:bodyPr wrap="square" anchor="t" lIns="45720" rIns="45720">
-            <a:spAutoFit/>
-          </a:bodyPr>
-          <a:lstStyle/>
-          <a:p>
-            <a:pPr algn="l">
-              <a:spcAft>
-                <a:spcPts val="800"/>
-              </a:spcAft>
-            </a:pPr>
-            <a:r>
-              <a:rPr sz="2000" b="1">
-                <a:solidFill>
-                  <a:srgbClr val="1E293B"/>
-                </a:solidFill>
-                <a:latin typeface="Calibri"/>
-              </a:rPr>
-              <a:t>Quá trình chuyển hoá năng lượng trong sinh giới gồm ba giai đoạn theo thứ tự là</a:t>
-            </a:r>
-          </a:p>
-          <a:p>
-            <a:pPr algn="l">
-              <a:spcAft>
-                <a:spcPts val="800"/>
-              </a:spcAft>
-            </a:pPr>
-            <a:r>
-              <a:rPr sz="2000" b="1">
-                <a:solidFill>
-                  <a:srgbClr val="1E293B"/>
-                </a:solidFill>
-                <a:latin typeface="Calibri"/>
-              </a:rPr>
-              <a:t>A. phân giải → tổng hợp → huy động năng lượng</a:t>
-            </a:r>
-          </a:p>
-          <a:p>
-            <a:pPr algn="l">
-              <a:spcAft>
-                <a:spcPts val="800"/>
-              </a:spcAft>
-            </a:pPr>
-            <a:r>
-              <a:rPr sz="2000" b="1">
-                <a:solidFill>
-                  <a:srgbClr val="1E293B"/>
-                </a:solidFill>
-                <a:latin typeface="Calibri"/>
-              </a:rPr>
-              <a:t>B. tổng hợp → phân giải → huy động năng lượng</a:t>
-            </a:r>
-          </a:p>
-          <a:p>
-            <a:pPr algn="l">
-              <a:spcAft>
-                <a:spcPts val="800"/>
-              </a:spcAft>
-            </a:pPr>
-            <a:r>
-              <a:rPr sz="2000" b="1">
-                <a:solidFill>
-                  <a:srgbClr val="1E293B"/>
-                </a:solidFill>
-                <a:latin typeface="Calibri"/>
-              </a:rPr>
-              <a:t>C. huy động năng lượng → tổng hợp → phân giải</a:t>
-            </a:r>
-          </a:p>
-          <a:p>
-            <a:pPr algn="l">
-              <a:spcAft>
-                <a:spcPts val="800"/>
-              </a:spcAft>
-            </a:pPr>
-            <a:r>
-              <a:rPr sz="2000" b="1">
-                <a:solidFill>
-                  <a:srgbClr val="1E293B"/>
-                </a:solidFill>
-                <a:latin typeface="Calibri"/>
-              </a:rPr>
-              <a:t>D. tổng hợp → huy động năng lượng → phân giải</a:t>
-            </a:r>
-          </a:p>
-        </p:txBody>
-      </p:sp>
+      <p:pic>
+        <p:nvPicPr>
+          <p:cNvPr id="7" name="Picture 6" descr="SoDoTuDuy_SINH11_Bai5_TH_QuangHopOThucVat_T11-12.png"/>
+          <p:cNvPicPr>
+            <a:picLocks noChangeAspect="1"/>
+          </p:cNvPicPr>
+          <p:nvPr/>
+        </p:nvPicPr>
+        <p:blipFill>
+          <a:blip r:embed="rId2"/>
+          <a:stretch>
+            <a:fillRect/>
+          </a:stretch>
+        </p:blipFill>
+        <p:spPr>
+          <a:xfrm>
+            <a:off x="1811117" y="1371600"/>
+            <a:ext cx="8630725" cy="4846320"/>
+          </a:xfrm>
+          <a:prstGeom prst="rect">
+            <a:avLst/>
+          </a:prstGeom>
+        </p:spPr>
+      </p:pic>
     </p:spTree>
   </p:cSld>
   <p:clrMapOvr>
@@ -18264,14 +19167,14 @@
         </p:nvSpPr>
         <p:spPr>
           <a:xfrm>
-            <a:off x="10463479" y="457200"/>
-            <a:ext cx="1179576" cy="457200"/>
+            <a:off x="10344607" y="457200"/>
+            <a:ext cx="1298448" cy="457200"/>
           </a:xfrm>
           <a:prstGeom prst="roundRect">
             <a:avLst/>
           </a:prstGeom>
           <a:solidFill>
-            <a:srgbClr val="991B1B"/>
+            <a:srgbClr val="166534"/>
           </a:solidFill>
           <a:ln>
             <a:noFill/>
@@ -18304,7 +19207,7 @@
                 </a:solidFill>
                 <a:latin typeface="Arial"/>
               </a:rPr>
-              <a:t>LỜI GIẢI</a:t>
+              <a:t>LÝ THUYẾT</a:t>
             </a:r>
           </a:p>
         </p:txBody>
@@ -18318,7 +19221,7 @@
         <p:spPr>
           <a:xfrm>
             <a:off x="731520" y="274320"/>
-            <a:ext cx="9793224" cy="868680"/>
+            <a:ext cx="9674352" cy="868680"/>
           </a:xfrm>
           <a:prstGeom prst="rect">
             <a:avLst/>
@@ -18338,7 +19241,7 @@
                 </a:solidFill>
                 <a:latin typeface="Arial"/>
               </a:rPr>
-              <a:t>ĐỀ MINH HỌA · PHẦN I · CÂU 1</a:t>
+              <a:t>BÀI 6: HÔ HẤP Ở THỰC VẬT · SƠ ĐỒ TƯ DUY</a:t>
             </a:r>
           </a:p>
         </p:txBody>
@@ -18422,71 +19325,30 @@
           </a:p>
         </p:txBody>
       </p:sp>
-      <p:sp>
-        <p:nvSpPr>
-          <p:cNvPr id="7" name="TextBox 6"/>
-          <p:cNvSpPr txBox="1"/>
-          <p:nvPr/>
-        </p:nvSpPr>
-        <p:spPr>
-          <a:xfrm>
-            <a:off x="731520" y="1463040"/>
-            <a:ext cx="10789920" cy="4754880"/>
-          </a:xfrm>
-          <a:prstGeom prst="rect">
-            <a:avLst/>
-          </a:prstGeom>
-          <a:noFill/>
-        </p:spPr>
-        <p:txBody>
-          <a:bodyPr wrap="square" anchor="t" lIns="45720" rIns="45720">
-            <a:spAutoFit/>
-          </a:bodyPr>
-          <a:lstStyle/>
-          <a:p>
-            <a:pPr algn="l" marL="365760" indent="-365760">
-              <a:spcAft>
-                <a:spcPts val="800"/>
-              </a:spcAft>
-              <a:buClr>
-                <a:srgbClr val="1E40AF"/>
-              </a:buClr>
-              <a:buFont typeface="Arial"/>
-              <a:buChar char="•"/>
-            </a:pPr>
-            <a:r>
-              <a:rPr sz="2000">
-                <a:solidFill>
-                  <a:srgbClr val="1E293B"/>
-                </a:solidFill>
-                <a:latin typeface="Calibri"/>
-              </a:rPr>
-              <a:t>Đáp án B.</a:t>
-            </a:r>
-          </a:p>
-          <a:p>
-            <a:pPr algn="l" marL="365760" indent="-365760">
-              <a:spcAft>
-                <a:spcPts val="800"/>
-              </a:spcAft>
-              <a:buClr>
-                <a:srgbClr val="1E40AF"/>
-              </a:buClr>
-              <a:buFont typeface="Arial"/>
-              <a:buChar char="•"/>
-            </a:pPr>
-            <a:r>
-              <a:rPr sz="2000">
-                <a:solidFill>
-                  <a:srgbClr val="1E293B"/>
-                </a:solidFill>
-                <a:latin typeface="Calibri"/>
-              </a:rPr>
-              <a:t>SGK mục III, Hình 1.1: năng lượng ánh sáng → tổng hợp → phân giải (ATP) → huy động năng lượng cho hoạt động sống.</a:t>
-            </a:r>
-          </a:p>
-        </p:txBody>
-      </p:sp>
+      <p:pic>
+        <p:nvPicPr>
+          <p:cNvPr id="7" name="Picture 6" descr="SoDoTuDuy_SINH11_Bai6_HoHapOThucVat_T13-14.png"/>
+          <p:cNvPicPr>
+            <a:picLocks noChangeAspect="1"/>
+          </p:cNvPicPr>
+          <p:nvPr/>
+        </p:nvPicPr>
+        <p:blipFill>
+          <a:blip r:embed="rId2"/>
+          <a:stretch>
+            <a:fillRect/>
+          </a:stretch>
+        </p:blipFill>
+        <p:spPr>
+          <a:xfrm>
+            <a:off x="1811117" y="1371600"/>
+            <a:ext cx="8630725" cy="4846320"/>
+          </a:xfrm>
+          <a:prstGeom prst="rect">
+            <a:avLst/>
+          </a:prstGeom>
+        </p:spPr>
+      </p:pic>
     </p:spTree>
   </p:cSld>
   <p:clrMapOvr>
@@ -18565,14 +19427,14 @@
         </p:nvSpPr>
         <p:spPr>
           <a:xfrm>
-            <a:off x="10701223" y="457200"/>
-            <a:ext cx="941832" cy="457200"/>
+            <a:off x="10344607" y="457200"/>
+            <a:ext cx="1298448" cy="457200"/>
           </a:xfrm>
           <a:prstGeom prst="roundRect">
             <a:avLst/>
           </a:prstGeom>
           <a:solidFill>
-            <a:srgbClr val="1E40AF"/>
+            <a:srgbClr val="166534"/>
           </a:solidFill>
           <a:ln>
             <a:noFill/>
@@ -18605,7 +19467,7 @@
                 </a:solidFill>
                 <a:latin typeface="Arial"/>
               </a:rPr>
-              <a:t>ĐỀ BÀI</a:t>
+              <a:t>LÝ THUYẾT</a:t>
             </a:r>
           </a:p>
         </p:txBody>
@@ -18619,7 +19481,7 @@
         <p:spPr>
           <a:xfrm>
             <a:off x="731520" y="274320"/>
-            <a:ext cx="10030968" cy="868680"/>
+            <a:ext cx="9674352" cy="868680"/>
           </a:xfrm>
           <a:prstGeom prst="rect">
             <a:avLst/>
@@ -18639,7 +19501,7 @@
                 </a:solidFill>
                 <a:latin typeface="Arial"/>
               </a:rPr>
-              <a:t>ĐỀ MINH HỌA · PHẦN I · CÂU 2</a:t>
+              <a:t>BÀI 7: THỰC HÀNH: HÔ HẤP Ở THỰC VẬT · SƠ ĐỒ TƯ DUY</a:t>
             </a:r>
           </a:p>
         </p:txBody>
@@ -18723,109 +19585,30 @@
           </a:p>
         </p:txBody>
       </p:sp>
-      <p:sp>
-        <p:nvSpPr>
-          <p:cNvPr id="7" name="TextBox 6"/>
-          <p:cNvSpPr txBox="1"/>
-          <p:nvPr/>
-        </p:nvSpPr>
-        <p:spPr>
-          <a:xfrm>
-            <a:off x="731520" y="1463040"/>
-            <a:ext cx="10789920" cy="4754880"/>
-          </a:xfrm>
-          <a:prstGeom prst="rect">
-            <a:avLst/>
-          </a:prstGeom>
-          <a:noFill/>
-        </p:spPr>
-        <p:txBody>
-          <a:bodyPr wrap="square" anchor="t" lIns="45720" rIns="45720">
-            <a:spAutoFit/>
-          </a:bodyPr>
-          <a:lstStyle/>
-          <a:p>
-            <a:pPr algn="l">
-              <a:spcAft>
-                <a:spcPts val="800"/>
-              </a:spcAft>
-            </a:pPr>
-            <a:r>
-              <a:rPr sz="2000" b="1">
-                <a:solidFill>
-                  <a:srgbClr val="1E293B"/>
-                </a:solidFill>
-                <a:latin typeface="Calibri"/>
-              </a:rPr>
-              <a:t>Dòng mạch gỗ vận chuyển chủ yếu</a:t>
-            </a:r>
-          </a:p>
-          <a:p>
-            <a:pPr algn="l">
-              <a:spcAft>
-                <a:spcPts val="800"/>
-              </a:spcAft>
-            </a:pPr>
-            <a:r>
-              <a:rPr sz="2000" b="1">
-                <a:solidFill>
-                  <a:srgbClr val="1E293B"/>
-                </a:solidFill>
-                <a:latin typeface="Calibri"/>
-              </a:rPr>
-              <a:t>A. O₂ từ lá xuống rễ</a:t>
-            </a:r>
-          </a:p>
-          <a:p>
-            <a:pPr algn="l">
-              <a:spcAft>
-                <a:spcPts val="800"/>
-              </a:spcAft>
-            </a:pPr>
-            <a:r>
-              <a:rPr sz="2000" b="1">
-                <a:solidFill>
-                  <a:srgbClr val="1E293B"/>
-                </a:solidFill>
-                <a:latin typeface="Calibri"/>
-              </a:rPr>
-              <a:t>B. sucrose từ lá xuống rễ</a:t>
-            </a:r>
-          </a:p>
-          <a:p>
-            <a:pPr algn="l">
-              <a:spcAft>
-                <a:spcPts val="800"/>
-              </a:spcAft>
-            </a:pPr>
-            <a:r>
-              <a:rPr sz="2000" b="1">
-                <a:solidFill>
-                  <a:srgbClr val="1E293B"/>
-                </a:solidFill>
-                <a:latin typeface="Calibri"/>
-              </a:rPr>
-              <a:t>C. nước và chất khoáng từ rễ lên lá</a:t>
-            </a:r>
-          </a:p>
-          <a:p>
-            <a:pPr algn="l">
-              <a:spcAft>
-                <a:spcPts val="800"/>
-              </a:spcAft>
-            </a:pPr>
-            <a:r>
-              <a:rPr sz="2000" b="1">
-                <a:solidFill>
-                  <a:srgbClr val="1E293B"/>
-                </a:solidFill>
-                <a:latin typeface="Calibri"/>
-              </a:rPr>
-              <a:t>D. hormone từ rễ lên lá</a:t>
-            </a:r>
-          </a:p>
-        </p:txBody>
-      </p:sp>
+      <p:pic>
+        <p:nvPicPr>
+          <p:cNvPr id="7" name="Picture 6" descr="SoDoTuDuy_SINH11_Bai7_TH_HoHapOThucVat_T15.png"/>
+          <p:cNvPicPr>
+            <a:picLocks noChangeAspect="1"/>
+          </p:cNvPicPr>
+          <p:nvPr/>
+        </p:nvPicPr>
+        <p:blipFill>
+          <a:blip r:embed="rId2"/>
+          <a:stretch>
+            <a:fillRect/>
+          </a:stretch>
+        </p:blipFill>
+        <p:spPr>
+          <a:xfrm>
+            <a:off x="1811117" y="1371600"/>
+            <a:ext cx="8630725" cy="4846320"/>
+          </a:xfrm>
+          <a:prstGeom prst="rect">
+            <a:avLst/>
+          </a:prstGeom>
+        </p:spPr>
+      </p:pic>
     </p:spTree>
   </p:cSld>
   <p:clrMapOvr>
